--- a/assets/powerpoints/module-nouvelles/A2-quatre-sortes-de-nouvelles.pptx
+++ b/assets/powerpoints/module-nouvelles/A2-quatre-sortes-de-nouvelles.pptx
@@ -4578,7 +4578,7 @@
                 </a:solidFill>
                 <a:latin typeface="Verdana"/>
               </a:rPr>
-              <a:t>SÉANCE A2  ·  MODULE 5</a:t>
+              <a:t>SÉANCE A2  ·  MODULE 6</a:t>
             </a:r>
           </a:p>
         </p:txBody>

--- a/assets/powerpoints/module-nouvelles/A2-quatre-sortes-de-nouvelles.pptx
+++ b/assets/powerpoints/module-nouvelles/A2-quatre-sortes-de-nouvelles.pptx
@@ -20,6 +20,13 @@
     <p:sldId id="268" r:id="rId20"/>
     <p:sldId id="269" r:id="rId21"/>
     <p:sldId id="270" r:id="rId22"/>
+    <p:sldId id="271" r:id="rId23"/>
+    <p:sldId id="272" r:id="rId24"/>
+    <p:sldId id="273" r:id="rId25"/>
+    <p:sldId id="274" r:id="rId26"/>
+    <p:sldId id="275" r:id="rId27"/>
+    <p:sldId id="276" r:id="rId28"/>
+    <p:sldId id="277" r:id="rId29"/>
   </p:sldIdLst>
   <p:sldSz cx="12191695" cy="6858000" type="screen4x3"/>
   <p:notesSz cx="6858000" cy="9144000"/>
@@ -936,7 +943,287 @@
           <a:lstStyle/>
           <a:p>
             <a:r>
-              <a:t>Ces titres serviront en E1, où chacun développera l'un d'eux en un vrai fait divers.</a:t>
+              <a:t>Écrire « voisine » et « poisson » au tableau et faire entourer ce qui suit et précède le s. La règle se déduit sans être dite.</a:t>
+            </a:r>
+          </a:p>
+        </p:txBody>
+      </p:sp>
+      <p:sp>
+        <p:nvSpPr>
+          <p:cNvPr id="4" name="Slide Number Placeholder 3"/>
+          <p:cNvSpPr>
+            <a:spLocks noGrp="1"/>
+          </p:cNvSpPr>
+          <p:nvPr>
+            <p:ph type="sldNum" idx="5" sz="quarter"/>
+          </p:nvPr>
+        </p:nvSpPr>
+        <p:spPr/>
+      </p:sp>
+    </p:spTree>
+  </p:cSld>
+  <p:clrMapOvr>
+    <a:masterClrMapping/>
+  </p:clrMapOvr>
+</p:notes>
+</file>
+
+<file path=ppt/notesSlides/notesSlide16.xml><?xml version="1.0" encoding="utf-8"?>
+<p:notes xmlns:a="http://schemas.openxmlformats.org/drawingml/2006/main" xmlns:p="http://schemas.openxmlformats.org/presentationml/2006/main" xmlns:r="http://schemas.openxmlformats.org/officeDocument/2006/relationships">
+  <p:cSld>
+    <p:spTree>
+      <p:nvGrpSpPr>
+        <p:cNvPr id="1" name=""/>
+        <p:cNvGrpSpPr/>
+        <p:nvPr/>
+      </p:nvGrpSpPr>
+      <p:grpSpPr>
+        <a:xfrm>
+          <a:off x="0" y="0"/>
+          <a:ext cx="0" cy="0"/>
+          <a:chOff x="0" y="0"/>
+          <a:chExt cx="0" cy="0"/>
+        </a:xfrm>
+      </p:grpSpPr>
+      <p:sp>
+        <p:nvSpPr>
+          <p:cNvPr id="2" name="Slide Image Placeholder 1"/>
+          <p:cNvSpPr>
+            <a:spLocks noGrp="1"/>
+          </p:cNvSpPr>
+          <p:nvPr>
+            <p:ph type="sldImg" idx="2"/>
+          </p:nvPr>
+        </p:nvSpPr>
+        <p:spPr/>
+      </p:sp>
+      <p:sp>
+        <p:nvSpPr>
+          <p:cNvPr id="3" name="Notes Placeholder 2"/>
+          <p:cNvSpPr>
+            <a:spLocks noGrp="1"/>
+          </p:cNvSpPr>
+          <p:nvPr>
+            <p:ph type="body" idx="3" sz="quarter"/>
+          </p:nvPr>
+        </p:nvSpPr>
+        <p:spPr/>
+        <p:txBody>
+          <a:bodyPr/>
+          <a:lstStyle/>
+          <a:p>
+            <a:r>
+              <a:t>Le doublement du s est une conséquence de la règle, pas une exception : le dire dans ce sens-là évite une liste à mémoriser.</a:t>
+            </a:r>
+          </a:p>
+        </p:txBody>
+      </p:sp>
+      <p:sp>
+        <p:nvSpPr>
+          <p:cNvPr id="4" name="Slide Number Placeholder 3"/>
+          <p:cNvSpPr>
+            <a:spLocks noGrp="1"/>
+          </p:cNvSpPr>
+          <p:nvPr>
+            <p:ph type="sldNum" idx="5" sz="quarter"/>
+          </p:nvPr>
+        </p:nvSpPr>
+        <p:spPr/>
+      </p:sp>
+    </p:spTree>
+  </p:cSld>
+  <p:clrMapOvr>
+    <a:masterClrMapping/>
+  </p:clrMapOvr>
+</p:notes>
+</file>
+
+<file path=ppt/notesSlides/notesSlide17.xml><?xml version="1.0" encoding="utf-8"?>
+<p:notes xmlns:a="http://schemas.openxmlformats.org/drawingml/2006/main" xmlns:p="http://schemas.openxmlformats.org/presentationml/2006/main" xmlns:r="http://schemas.openxmlformats.org/officeDocument/2006/relationships">
+  <p:cSld>
+    <p:spTree>
+      <p:nvGrpSpPr>
+        <p:cNvPr id="1" name=""/>
+        <p:cNvGrpSpPr/>
+        <p:nvPr/>
+      </p:nvGrpSpPr>
+      <p:grpSpPr>
+        <a:xfrm>
+          <a:off x="0" y="0"/>
+          <a:ext cx="0" cy="0"/>
+          <a:chOff x="0" y="0"/>
+          <a:chExt cx="0" cy="0"/>
+        </a:xfrm>
+      </p:grpSpPr>
+      <p:sp>
+        <p:nvSpPr>
+          <p:cNvPr id="2" name="Slide Image Placeholder 1"/>
+          <p:cNvSpPr>
+            <a:spLocks noGrp="1"/>
+          </p:cNvSpPr>
+          <p:nvPr>
+            <p:ph type="sldImg" idx="2"/>
+          </p:nvPr>
+        </p:nvSpPr>
+        <p:spPr/>
+      </p:sp>
+      <p:sp>
+        <p:nvSpPr>
+          <p:cNvPr id="3" name="Notes Placeholder 2"/>
+          <p:cNvSpPr>
+            <a:spLocks noGrp="1"/>
+          </p:cNvSpPr>
+          <p:nvPr>
+            <p:ph type="body" idx="3" sz="quarter"/>
+          </p:nvPr>
+        </p:nvSpPr>
+        <p:spPr/>
+        <p:txBody>
+          <a:bodyPr/>
+          <a:lstStyle/>
+          <a:p>
+            <a:r>
+              <a:t>C'est la paire à retenir de la séance. La faire écrire dans le cahier avec un dessin à côté de chaque mot.</a:t>
+            </a:r>
+          </a:p>
+        </p:txBody>
+      </p:sp>
+      <p:sp>
+        <p:nvSpPr>
+          <p:cNvPr id="4" name="Slide Number Placeholder 3"/>
+          <p:cNvSpPr>
+            <a:spLocks noGrp="1"/>
+          </p:cNvSpPr>
+          <p:nvPr>
+            <p:ph type="sldNum" idx="5" sz="quarter"/>
+          </p:nvPr>
+        </p:nvSpPr>
+        <p:spPr/>
+      </p:sp>
+    </p:spTree>
+  </p:cSld>
+  <p:clrMapOvr>
+    <a:masterClrMapping/>
+  </p:clrMapOvr>
+</p:notes>
+</file>
+
+<file path=ppt/notesSlides/notesSlide18.xml><?xml version="1.0" encoding="utf-8"?>
+<p:notes xmlns:a="http://schemas.openxmlformats.org/drawingml/2006/main" xmlns:p="http://schemas.openxmlformats.org/presentationml/2006/main" xmlns:r="http://schemas.openxmlformats.org/officeDocument/2006/relationships">
+  <p:cSld>
+    <p:spTree>
+      <p:nvGrpSpPr>
+        <p:cNvPr id="1" name=""/>
+        <p:cNvGrpSpPr/>
+        <p:nvPr/>
+      </p:nvGrpSpPr>
+      <p:grpSpPr>
+        <a:xfrm>
+          <a:off x="0" y="0"/>
+          <a:ext cx="0" cy="0"/>
+          <a:chOff x="0" y="0"/>
+          <a:chExt cx="0" cy="0"/>
+        </a:xfrm>
+      </p:grpSpPr>
+      <p:sp>
+        <p:nvSpPr>
+          <p:cNvPr id="2" name="Slide Image Placeholder 1"/>
+          <p:cNvSpPr>
+            <a:spLocks noGrp="1"/>
+          </p:cNvSpPr>
+          <p:nvPr>
+            <p:ph type="sldImg" idx="2"/>
+          </p:nvPr>
+        </p:nvSpPr>
+        <p:spPr/>
+      </p:sp>
+      <p:sp>
+        <p:nvSpPr>
+          <p:cNvPr id="3" name="Notes Placeholder 2"/>
+          <p:cNvSpPr>
+            <a:spLocks noGrp="1"/>
+          </p:cNvSpPr>
+          <p:nvPr>
+            <p:ph type="body" idx="3" sz="quarter"/>
+          </p:nvPr>
+        </p:nvSpPr>
+        <p:spPr/>
+        <p:txBody>
+          <a:bodyPr/>
+          <a:lstStyle/>
+          <a:p>
+            <a:r>
+              <a:t>Les huit mots de l'exercice de sons du module en ligne, dans le même ordre. Après la correction, faire justifier chaque réponse par la position du s.</a:t>
+            </a:r>
+          </a:p>
+        </p:txBody>
+      </p:sp>
+      <p:sp>
+        <p:nvSpPr>
+          <p:cNvPr id="4" name="Slide Number Placeholder 3"/>
+          <p:cNvSpPr>
+            <a:spLocks noGrp="1"/>
+          </p:cNvSpPr>
+          <p:nvPr>
+            <p:ph type="sldNum" idx="5" sz="quarter"/>
+          </p:nvPr>
+        </p:nvSpPr>
+        <p:spPr/>
+      </p:sp>
+    </p:spTree>
+  </p:cSld>
+  <p:clrMapOvr>
+    <a:masterClrMapping/>
+  </p:clrMapOvr>
+</p:notes>
+</file>
+
+<file path=ppt/notesSlides/notesSlide19.xml><?xml version="1.0" encoding="utf-8"?>
+<p:notes xmlns:a="http://schemas.openxmlformats.org/drawingml/2006/main" xmlns:p="http://schemas.openxmlformats.org/presentationml/2006/main" xmlns:r="http://schemas.openxmlformats.org/officeDocument/2006/relationships">
+  <p:cSld>
+    <p:spTree>
+      <p:nvGrpSpPr>
+        <p:cNvPr id="1" name=""/>
+        <p:cNvGrpSpPr/>
+        <p:nvPr/>
+      </p:nvGrpSpPr>
+      <p:grpSpPr>
+        <a:xfrm>
+          <a:off x="0" y="0"/>
+          <a:ext cx="0" cy="0"/>
+          <a:chOff x="0" y="0"/>
+          <a:chExt cx="0" cy="0"/>
+        </a:xfrm>
+      </p:grpSpPr>
+      <p:sp>
+        <p:nvSpPr>
+          <p:cNvPr id="2" name="Slide Image Placeholder 1"/>
+          <p:cNvSpPr>
+            <a:spLocks noGrp="1"/>
+          </p:cNvSpPr>
+          <p:nvPr>
+            <p:ph type="sldImg" idx="2"/>
+          </p:nvPr>
+        </p:nvSpPr>
+        <p:spPr/>
+      </p:sp>
+      <p:sp>
+        <p:nvSpPr>
+          <p:cNvPr id="3" name="Notes Placeholder 2"/>
+          <p:cNvSpPr>
+            <a:spLocks noGrp="1"/>
+          </p:cNvSpPr>
+          <p:nvPr>
+            <p:ph type="body" idx="3" sz="quarter"/>
+          </p:nvPr>
+        </p:nvSpPr>
+        <p:spPr/>
+        <p:txBody>
+          <a:bodyPr/>
+          <a:lstStyle/>
+          <a:p>
+            <a:r>
+              <a:t>Corriger en groupe. Donner la bonne réponse, sans revenir sur qui s'est trompé.</a:t>
             </a:r>
           </a:p>
         </p:txBody>
@@ -1007,6 +1294,216 @@
           <a:p>
             <a:r>
               <a:t>Lire les objectifs à voix haute. Y revenir au billet de sortie.</a:t>
+            </a:r>
+          </a:p>
+        </p:txBody>
+      </p:sp>
+      <p:sp>
+        <p:nvSpPr>
+          <p:cNvPr id="4" name="Slide Number Placeholder 3"/>
+          <p:cNvSpPr>
+            <a:spLocks noGrp="1"/>
+          </p:cNvSpPr>
+          <p:nvPr>
+            <p:ph type="sldNum" idx="5" sz="quarter"/>
+          </p:nvPr>
+        </p:nvSpPr>
+        <p:spPr/>
+      </p:sp>
+    </p:spTree>
+  </p:cSld>
+  <p:clrMapOvr>
+    <a:masterClrMapping/>
+  </p:clrMapOvr>
+</p:notes>
+</file>
+
+<file path=ppt/notesSlides/notesSlide20.xml><?xml version="1.0" encoding="utf-8"?>
+<p:notes xmlns:a="http://schemas.openxmlformats.org/drawingml/2006/main" xmlns:p="http://schemas.openxmlformats.org/presentationml/2006/main" xmlns:r="http://schemas.openxmlformats.org/officeDocument/2006/relationships">
+  <p:cSld>
+    <p:spTree>
+      <p:nvGrpSpPr>
+        <p:cNvPr id="1" name=""/>
+        <p:cNvGrpSpPr/>
+        <p:nvPr/>
+      </p:nvGrpSpPr>
+      <p:grpSpPr>
+        <a:xfrm>
+          <a:off x="0" y="0"/>
+          <a:ext cx="0" cy="0"/>
+          <a:chOff x="0" y="0"/>
+          <a:chExt cx="0" cy="0"/>
+        </a:xfrm>
+      </p:grpSpPr>
+      <p:sp>
+        <p:nvSpPr>
+          <p:cNvPr id="2" name="Slide Image Placeholder 1"/>
+          <p:cNvSpPr>
+            <a:spLocks noGrp="1"/>
+          </p:cNvSpPr>
+          <p:nvPr>
+            <p:ph type="sldImg" idx="2"/>
+          </p:nvPr>
+        </p:nvSpPr>
+        <p:spPr/>
+      </p:sp>
+      <p:sp>
+        <p:nvSpPr>
+          <p:cNvPr id="3" name="Notes Placeholder 2"/>
+          <p:cNvSpPr>
+            <a:spLocks noGrp="1"/>
+          </p:cNvSpPr>
+          <p:nvPr>
+            <p:ph type="body" idx="3" sz="quarter"/>
+          </p:nvPr>
+        </p:nvSpPr>
+        <p:spPr/>
+        <p:txBody>
+          <a:bodyPr/>
+          <a:lstStyle/>
+          <a:p>
+            <a:r>
+              <a:t>La troisième phrase contient les deux sons : la faire relire deux fois, une fois lentement, une fois au rythme d'un bulletin.</a:t>
+            </a:r>
+          </a:p>
+        </p:txBody>
+      </p:sp>
+      <p:sp>
+        <p:nvSpPr>
+          <p:cNvPr id="4" name="Slide Number Placeholder 3"/>
+          <p:cNvSpPr>
+            <a:spLocks noGrp="1"/>
+          </p:cNvSpPr>
+          <p:nvPr>
+            <p:ph type="sldNum" idx="5" sz="quarter"/>
+          </p:nvPr>
+        </p:nvSpPr>
+        <p:spPr/>
+      </p:sp>
+    </p:spTree>
+  </p:cSld>
+  <p:clrMapOvr>
+    <a:masterClrMapping/>
+  </p:clrMapOvr>
+</p:notes>
+</file>
+
+<file path=ppt/notesSlides/notesSlide21.xml><?xml version="1.0" encoding="utf-8"?>
+<p:notes xmlns:a="http://schemas.openxmlformats.org/drawingml/2006/main" xmlns:p="http://schemas.openxmlformats.org/presentationml/2006/main" xmlns:r="http://schemas.openxmlformats.org/officeDocument/2006/relationships">
+  <p:cSld>
+    <p:spTree>
+      <p:nvGrpSpPr>
+        <p:cNvPr id="1" name=""/>
+        <p:cNvGrpSpPr/>
+        <p:nvPr/>
+      </p:nvGrpSpPr>
+      <p:grpSpPr>
+        <a:xfrm>
+          <a:off x="0" y="0"/>
+          <a:ext cx="0" cy="0"/>
+          <a:chOff x="0" y="0"/>
+          <a:chExt cx="0" cy="0"/>
+        </a:xfrm>
+      </p:grpSpPr>
+      <p:sp>
+        <p:nvSpPr>
+          <p:cNvPr id="2" name="Slide Image Placeholder 1"/>
+          <p:cNvSpPr>
+            <a:spLocks noGrp="1"/>
+          </p:cNvSpPr>
+          <p:nvPr>
+            <p:ph type="sldImg" idx="2"/>
+          </p:nvPr>
+        </p:nvSpPr>
+        <p:spPr/>
+      </p:sp>
+      <p:sp>
+        <p:nvSpPr>
+          <p:cNvPr id="3" name="Notes Placeholder 2"/>
+          <p:cNvSpPr>
+            <a:spLocks noGrp="1"/>
+          </p:cNvSpPr>
+          <p:nvPr>
+            <p:ph type="body" idx="3" sz="quarter"/>
+          </p:nvPr>
+        </p:nvSpPr>
+        <p:spPr/>
+        <p:txBody>
+          <a:bodyPr/>
+          <a:lstStyle/>
+          <a:p>
+            <a:r>
+              <a:t>Corriger en groupe. Donner la bonne réponse, sans revenir sur qui s'est trompé.</a:t>
+            </a:r>
+          </a:p>
+        </p:txBody>
+      </p:sp>
+      <p:sp>
+        <p:nvSpPr>
+          <p:cNvPr id="4" name="Slide Number Placeholder 3"/>
+          <p:cNvSpPr>
+            <a:spLocks noGrp="1"/>
+          </p:cNvSpPr>
+          <p:nvPr>
+            <p:ph type="sldNum" idx="5" sz="quarter"/>
+          </p:nvPr>
+        </p:nvSpPr>
+        <p:spPr/>
+      </p:sp>
+    </p:spTree>
+  </p:cSld>
+  <p:clrMapOvr>
+    <a:masterClrMapping/>
+  </p:clrMapOvr>
+</p:notes>
+</file>
+
+<file path=ppt/notesSlides/notesSlide22.xml><?xml version="1.0" encoding="utf-8"?>
+<p:notes xmlns:a="http://schemas.openxmlformats.org/drawingml/2006/main" xmlns:p="http://schemas.openxmlformats.org/presentationml/2006/main" xmlns:r="http://schemas.openxmlformats.org/officeDocument/2006/relationships">
+  <p:cSld>
+    <p:spTree>
+      <p:nvGrpSpPr>
+        <p:cNvPr id="1" name=""/>
+        <p:cNvGrpSpPr/>
+        <p:nvPr/>
+      </p:nvGrpSpPr>
+      <p:grpSpPr>
+        <a:xfrm>
+          <a:off x="0" y="0"/>
+          <a:ext cx="0" cy="0"/>
+          <a:chOff x="0" y="0"/>
+          <a:chExt cx="0" cy="0"/>
+        </a:xfrm>
+      </p:grpSpPr>
+      <p:sp>
+        <p:nvSpPr>
+          <p:cNvPr id="2" name="Slide Image Placeholder 1"/>
+          <p:cNvSpPr>
+            <a:spLocks noGrp="1"/>
+          </p:cNvSpPr>
+          <p:nvPr>
+            <p:ph type="sldImg" idx="2"/>
+          </p:nvPr>
+        </p:nvSpPr>
+        <p:spPr/>
+      </p:sp>
+      <p:sp>
+        <p:nvSpPr>
+          <p:cNvPr id="3" name="Notes Placeholder 2"/>
+          <p:cNvSpPr>
+            <a:spLocks noGrp="1"/>
+          </p:cNvSpPr>
+          <p:nvPr>
+            <p:ph type="body" idx="3" sz="quarter"/>
+          </p:nvPr>
+        </p:nvSpPr>
+        <p:spPr/>
+        <p:txBody>
+          <a:bodyPr/>
+          <a:lstStyle/>
+          <a:p>
+            <a:r>
+              <a:t>Ces titres serviront en E1, où chacun développera l'un d'eux en un vrai fait divers.</a:t>
             </a:r>
           </a:p>
         </p:txBody>
@@ -6016,7 +6513,7 @@
                 </a:solidFill>
                 <a:latin typeface="Verdana"/>
               </a:rPr>
-              <a:t>PRATIQUE · 3 DE 4</a:t>
+              <a:t>PRATIQUE · 3 DE 6</a:t>
             </a:r>
           </a:p>
         </p:txBody>
@@ -8251,7 +8748,7 @@
                 </a:solidFill>
                 <a:latin typeface="Verdana"/>
               </a:rPr>
-              <a:t>PRATIQUE · 4 DE 4</a:t>
+              <a:t>PRATIQUE · 4 DE 6</a:t>
             </a:r>
           </a:p>
         </p:txBody>
@@ -8978,7 +9475,234 @@
       </p:sp>
       <p:sp>
         <p:nvSpPr>
-          <p:cNvPr id="5" name="Rectangle 4"/>
+          <p:cNvPr id="5" name="TextBox 4"/>
+          <p:cNvSpPr txBox="1"/>
+          <p:nvPr/>
+        </p:nvSpPr>
+        <p:spPr>
+          <a:xfrm>
+            <a:off x="566928" y="420624"/>
+            <a:ext cx="11057839" cy="237744"/>
+          </a:xfrm>
+          <a:prstGeom prst="rect">
+            <a:avLst/>
+          </a:prstGeom>
+          <a:noFill/>
+        </p:spPr>
+        <p:txBody>
+          <a:bodyPr wrap="square" lIns="0" rIns="0" tIns="0" bIns="0" anchor="t">
+            <a:spAutoFit/>
+          </a:bodyPr>
+          <a:lstStyle/>
+          <a:p>
+            <a:pPr algn="l">
+              <a:lnSpc>
+                <a:spcPct val="135000"/>
+              </a:lnSpc>
+            </a:pPr>
+            <a:r>
+              <a:rPr sz="1300" b="1" i="0" spc="156">
+                <a:solidFill>
+                  <a:srgbClr val="166534"/>
+                </a:solidFill>
+                <a:latin typeface="Verdana"/>
+              </a:rPr>
+              <a:t>LA LETTRE S NE DIT PAS TOUJOURS LE MÊME SON</a:t>
+            </a:r>
+          </a:p>
+        </p:txBody>
+      </p:sp>
+      <p:sp>
+        <p:nvSpPr>
+          <p:cNvPr id="6" name="Rounded Rectangle 5"/>
+          <p:cNvSpPr/>
+          <p:nvPr/>
+        </p:nvSpPr>
+        <p:spPr>
+          <a:xfrm>
+            <a:off x="566928" y="1225296"/>
+            <a:ext cx="11057839" cy="1967991"/>
+          </a:xfrm>
+          <a:prstGeom prst="roundRect">
+            <a:avLst>
+              <a:gd name="adj" fmla="val 7434"/>
+            </a:avLst>
+          </a:prstGeom>
+          <a:solidFill>
+            <a:srgbClr val="E3F1E7"/>
+          </a:solidFill>
+          <a:ln w="12700">
+            <a:solidFill>
+              <a:srgbClr val="EAEAE8"/>
+            </a:solidFill>
+          </a:ln>
+          <a:effectLst/>
+        </p:spPr>
+        <p:style>
+          <a:lnRef idx="1">
+            <a:schemeClr val="accent1"/>
+          </a:lnRef>
+          <a:fillRef idx="3">
+            <a:schemeClr val="accent1"/>
+          </a:fillRef>
+          <a:effectRef idx="2">
+            <a:schemeClr val="accent1"/>
+          </a:effectRef>
+          <a:fontRef idx="minor">
+            <a:schemeClr val="lt1"/>
+          </a:fontRef>
+        </p:style>
+        <p:txBody>
+          <a:bodyPr rtlCol="0" anchor="ctr"/>
+          <a:lstStyle/>
+          <a:p/>
+        </p:txBody>
+      </p:sp>
+      <p:sp>
+        <p:nvSpPr>
+          <p:cNvPr id="7" name="TextBox 6"/>
+          <p:cNvSpPr txBox="1"/>
+          <p:nvPr/>
+        </p:nvSpPr>
+        <p:spPr>
+          <a:xfrm>
+            <a:off x="1298448" y="1682496"/>
+            <a:ext cx="9594799" cy="1145032"/>
+          </a:xfrm>
+          <a:prstGeom prst="rect">
+            <a:avLst/>
+          </a:prstGeom>
+          <a:noFill/>
+        </p:spPr>
+        <p:txBody>
+          <a:bodyPr wrap="square" lIns="0" rIns="0" tIns="0" bIns="0" anchor="t">
+            <a:spAutoFit/>
+          </a:bodyPr>
+          <a:lstStyle/>
+          <a:p>
+            <a:pPr algn="l">
+              <a:lnSpc>
+                <a:spcPct val="122000"/>
+              </a:lnSpc>
+            </a:pPr>
+            <a:r>
+              <a:rPr sz="3400" b="1" i="0">
+                <a:solidFill>
+                  <a:srgbClr val="17181A"/>
+                </a:solidFill>
+                <a:latin typeface="Verdana"/>
+              </a:rPr>
+              <a:t>Entre deux voyelles, un seul s se dit « z ».</a:t>
+            </a:r>
+          </a:p>
+        </p:txBody>
+      </p:sp>
+      <p:sp>
+        <p:nvSpPr>
+          <p:cNvPr id="8" name="Rounded Rectangle 7"/>
+          <p:cNvSpPr/>
+          <p:nvPr/>
+        </p:nvSpPr>
+        <p:spPr>
+          <a:xfrm>
+            <a:off x="566928" y="3467607"/>
+            <a:ext cx="11057839" cy="1671827"/>
+          </a:xfrm>
+          <a:prstGeom prst="roundRect">
+            <a:avLst>
+              <a:gd name="adj" fmla="val 8751"/>
+            </a:avLst>
+          </a:prstGeom>
+          <a:solidFill>
+            <a:srgbClr val="FFFFFF"/>
+          </a:solidFill>
+          <a:ln w="12700">
+            <a:solidFill>
+              <a:srgbClr val="EAEAE8"/>
+            </a:solidFill>
+          </a:ln>
+          <a:effectLst/>
+        </p:spPr>
+        <p:style>
+          <a:lnRef idx="1">
+            <a:schemeClr val="accent1"/>
+          </a:lnRef>
+          <a:fillRef idx="3">
+            <a:schemeClr val="accent1"/>
+          </a:fillRef>
+          <a:effectRef idx="2">
+            <a:schemeClr val="accent1"/>
+          </a:effectRef>
+          <a:fontRef idx="minor">
+            <a:schemeClr val="lt1"/>
+          </a:fontRef>
+        </p:style>
+        <p:txBody>
+          <a:bodyPr rtlCol="0" anchor="ctr"/>
+          <a:lstStyle/>
+          <a:p/>
+        </p:txBody>
+      </p:sp>
+      <p:sp>
+        <p:nvSpPr>
+          <p:cNvPr id="9" name="TextBox 8"/>
+          <p:cNvSpPr txBox="1"/>
+          <p:nvPr/>
+        </p:nvSpPr>
+        <p:spPr>
+          <a:xfrm>
+            <a:off x="969264" y="3741927"/>
+            <a:ext cx="10234879" cy="1214627"/>
+          </a:xfrm>
+          <a:prstGeom prst="rect">
+            <a:avLst/>
+          </a:prstGeom>
+          <a:noFill/>
+        </p:spPr>
+        <p:txBody>
+          <a:bodyPr wrap="square" lIns="0" rIns="0" tIns="0" bIns="0" anchor="t">
+            <a:spAutoFit/>
+          </a:bodyPr>
+          <a:lstStyle/>
+          <a:p>
+            <a:pPr algn="l">
+              <a:lnSpc>
+                <a:spcPct val="145000"/>
+              </a:lnSpc>
+            </a:pPr>
+            <a:r>
+              <a:rPr sz="2000" b="0" i="0">
+                <a:solidFill>
+                  <a:srgbClr val="4B4F52"/>
+                </a:solidFill>
+                <a:latin typeface="Verdana"/>
+              </a:rPr>
+              <a:t>« Voisine » et « succès » sont deux mots de la même nouvelle. Le premier a le son « z », le second le son « s ». La règle se voit à l'écrit : il suffit de regarder ce qui entoure le s.</a:t>
+            </a:r>
+          </a:p>
+        </p:txBody>
+      </p:sp>
+    </p:spTree>
+  </p:cSld>
+  <p:clrMapOvr>
+    <a:masterClrMapping/>
+  </p:clrMapOvr>
+</p:sld>
+</file>
+
+<file path=ppt/slides/slide16.xml><?xml version="1.0" encoding="utf-8"?>
+<p:sld xmlns:a="http://schemas.openxmlformats.org/drawingml/2006/main" xmlns:p="http://schemas.openxmlformats.org/presentationml/2006/main" xmlns:r="http://schemas.openxmlformats.org/officeDocument/2006/relationships">
+  <p:cSld>
+    <p:spTree>
+      <p:nvGrpSpPr>
+        <p:cNvPr id="1" name=""/>
+        <p:cNvGrpSpPr/>
+        <p:nvPr/>
+      </p:nvGrpSpPr>
+      <p:grpSpPr/>
+      <p:sp>
+        <p:nvSpPr>
+          <p:cNvPr id="2" name="Rectangle 1"/>
           <p:cNvSpPr/>
           <p:nvPr/>
         </p:nvSpPr>
@@ -8991,7 +9715,7 @@
             <a:avLst/>
           </a:prstGeom>
           <a:solidFill>
-            <a:srgbClr val="17181A"/>
+            <a:srgbClr val="F7F7F5"/>
           </a:solidFill>
           <a:ln>
             <a:noFill/>
@@ -9020,14 +9744,131 @@
       </p:sp>
       <p:sp>
         <p:nvSpPr>
+          <p:cNvPr id="3" name="TextBox 2"/>
+          <p:cNvSpPr txBox="1"/>
+          <p:nvPr/>
+        </p:nvSpPr>
+        <p:spPr>
+          <a:xfrm>
+            <a:off x="566928" y="6355080"/>
+            <a:ext cx="6400800" cy="219456"/>
+          </a:xfrm>
+          <a:prstGeom prst="rect">
+            <a:avLst/>
+          </a:prstGeom>
+          <a:noFill/>
+        </p:spPr>
+        <p:txBody>
+          <a:bodyPr wrap="square" lIns="0" rIns="0" tIns="0" bIns="0" anchor="t">
+            <a:spAutoFit/>
+          </a:bodyPr>
+          <a:lstStyle/>
+          <a:p>
+            <a:pPr algn="l">
+              <a:lnSpc>
+                <a:spcPct val="135000"/>
+              </a:lnSpc>
+            </a:pPr>
+            <a:r>
+              <a:rPr sz="1200" b="0" i="0">
+                <a:solidFill>
+                  <a:srgbClr val="6E7175"/>
+                </a:solidFill>
+                <a:latin typeface="Verdana"/>
+              </a:rPr>
+              <a:t>A2 · C'est l'heure des nouvelles</a:t>
+            </a:r>
+          </a:p>
+        </p:txBody>
+      </p:sp>
+      <p:sp>
+        <p:nvSpPr>
+          <p:cNvPr id="4" name="TextBox 3"/>
+          <p:cNvSpPr txBox="1"/>
+          <p:nvPr/>
+        </p:nvSpPr>
+        <p:spPr>
+          <a:xfrm>
+            <a:off x="10710367" y="6355080"/>
+            <a:ext cx="914400" cy="219456"/>
+          </a:xfrm>
+          <a:prstGeom prst="rect">
+            <a:avLst/>
+          </a:prstGeom>
+          <a:noFill/>
+        </p:spPr>
+        <p:txBody>
+          <a:bodyPr wrap="square" lIns="0" rIns="0" tIns="0" bIns="0" anchor="t">
+            <a:spAutoFit/>
+          </a:bodyPr>
+          <a:lstStyle/>
+          <a:p>
+            <a:pPr algn="r">
+              <a:lnSpc>
+                <a:spcPct val="135000"/>
+              </a:lnSpc>
+            </a:pPr>
+            <a:r>
+              <a:rPr sz="1200" b="0" i="0">
+                <a:solidFill>
+                  <a:srgbClr val="6E7175"/>
+                </a:solidFill>
+                <a:latin typeface="Verdana"/>
+              </a:rPr>
+              <a:t>16</a:t>
+            </a:r>
+          </a:p>
+        </p:txBody>
+      </p:sp>
+      <p:sp>
+        <p:nvSpPr>
+          <p:cNvPr id="5" name="TextBox 4"/>
+          <p:cNvSpPr txBox="1"/>
+          <p:nvPr/>
+        </p:nvSpPr>
+        <p:spPr>
+          <a:xfrm>
+            <a:off x="566928" y="420624"/>
+            <a:ext cx="11057839" cy="237744"/>
+          </a:xfrm>
+          <a:prstGeom prst="rect">
+            <a:avLst/>
+          </a:prstGeom>
+          <a:noFill/>
+        </p:spPr>
+        <p:txBody>
+          <a:bodyPr wrap="square" lIns="0" rIns="0" tIns="0" bIns="0" anchor="t">
+            <a:spAutoFit/>
+          </a:bodyPr>
+          <a:lstStyle/>
+          <a:p>
+            <a:pPr algn="l">
+              <a:lnSpc>
+                <a:spcPct val="135000"/>
+              </a:lnSpc>
+            </a:pPr>
+            <a:r>
+              <a:rPr sz="1300" b="1" i="0" spc="156">
+                <a:solidFill>
+                  <a:srgbClr val="166534"/>
+                </a:solidFill>
+                <a:latin typeface="Verdana"/>
+              </a:rPr>
+              <a:t>ANALYSE</a:t>
+            </a:r>
+          </a:p>
+        </p:txBody>
+      </p:sp>
+      <p:sp>
+        <p:nvSpPr>
           <p:cNvPr id="6" name="TextBox 5"/>
           <p:cNvSpPr txBox="1"/>
           <p:nvPr/>
         </p:nvSpPr>
         <p:spPr>
           <a:xfrm>
-            <a:off x="566928" y="1051560"/>
-            <a:ext cx="11057839" cy="274320"/>
+            <a:off x="566928" y="749808"/>
+            <a:ext cx="11057839" cy="877824"/>
           </a:xfrm>
           <a:prstGeom prst="rect">
             <a:avLst/>
@@ -9042,78 +9883,317 @@
           <a:p>
             <a:pPr algn="l">
               <a:lnSpc>
-                <a:spcPct val="135000"/>
-              </a:lnSpc>
-            </a:pPr>
-            <a:r>
-              <a:rPr sz="1300" b="1" i="0" spc="156">
-                <a:solidFill>
-                  <a:srgbClr val="FFFFFF"/>
-                </a:solidFill>
-                <a:latin typeface="Verdana"/>
-              </a:rPr>
-              <a:t>BILLET DE SORTIE</a:t>
-            </a:r>
-          </a:p>
-        </p:txBody>
-      </p:sp>
-      <p:sp>
-        <p:nvSpPr>
-          <p:cNvPr id="7" name="TextBox 6"/>
-          <p:cNvSpPr txBox="1"/>
-          <p:nvPr/>
-        </p:nvSpPr>
-        <p:spPr>
-          <a:xfrm>
-            <a:off x="566928" y="1572768"/>
-            <a:ext cx="9777679" cy="2103120"/>
-          </a:xfrm>
-          <a:prstGeom prst="rect">
-            <a:avLst/>
-          </a:prstGeom>
-          <a:noFill/>
-        </p:spPr>
-        <p:txBody>
-          <a:bodyPr wrap="square" lIns="0" rIns="0" tIns="0" bIns="0" anchor="t">
-            <a:spAutoFit/>
-          </a:bodyPr>
-          <a:lstStyle/>
-          <a:p>
-            <a:pPr algn="l">
-              <a:lnSpc>
-                <a:spcPct val="125000"/>
+                <a:spcPct val="115000"/>
               </a:lnSpc>
             </a:pPr>
             <a:r>
               <a:rPr sz="3400" b="1" i="0">
                 <a:solidFill>
-                  <a:srgbClr val="FFFFFF"/>
-                </a:solidFill>
-                <a:latin typeface="Verdana"/>
-              </a:rPr>
-              <a:t>Écrivez quatre titres de nouvelles, un par catégorie.</a:t>
-            </a:r>
-          </a:p>
-        </p:txBody>
-      </p:sp>
-      <p:sp>
-        <p:nvSpPr>
-          <p:cNvPr id="8" name="Rounded Rectangle 7"/>
+                  <a:srgbClr val="17181A"/>
+                </a:solidFill>
+                <a:latin typeface="Verdana"/>
+              </a:rPr>
+              <a:t>Les deux sons dans les mots du bulletin</a:t>
+            </a:r>
+          </a:p>
+        </p:txBody>
+      </p:sp>
+      <p:sp>
+        <p:nvSpPr>
+          <p:cNvPr id="7" name="Rounded Rectangle 6"/>
           <p:cNvSpPr/>
           <p:nvPr/>
         </p:nvSpPr>
         <p:spPr>
           <a:xfrm>
-            <a:off x="566928" y="3931920"/>
-            <a:ext cx="11057839" cy="666496"/>
+            <a:off x="566928" y="1810512"/>
+            <a:ext cx="11057839" cy="2624328"/>
           </a:xfrm>
           <a:prstGeom prst="roundRect">
             <a:avLst>
-              <a:gd name="adj" fmla="val 13719"/>
+              <a:gd name="adj" fmla="val 5574"/>
             </a:avLst>
           </a:prstGeom>
           <a:solidFill>
-            <a:srgbClr val="2A2C2F"/>
+            <a:srgbClr val="FFFFFF"/>
+          </a:solidFill>
+          <a:ln w="12700">
+            <a:solidFill>
+              <a:srgbClr val="EAEAE8"/>
+            </a:solidFill>
+          </a:ln>
+          <a:effectLst/>
+        </p:spPr>
+        <p:style>
+          <a:lnRef idx="1">
+            <a:schemeClr val="accent1"/>
+          </a:lnRef>
+          <a:fillRef idx="3">
+            <a:schemeClr val="accent1"/>
+          </a:fillRef>
+          <a:effectRef idx="2">
+            <a:schemeClr val="accent1"/>
+          </a:effectRef>
+          <a:fontRef idx="minor">
+            <a:schemeClr val="lt1"/>
+          </a:fontRef>
+        </p:style>
+        <p:txBody>
+          <a:bodyPr rtlCol="0" anchor="ctr"/>
+          <a:lstStyle/>
+          <a:p/>
+        </p:txBody>
+      </p:sp>
+      <p:sp>
+        <p:nvSpPr>
+          <p:cNvPr id="8" name="TextBox 7"/>
+          <p:cNvSpPr txBox="1"/>
+          <p:nvPr/>
+        </p:nvSpPr>
+        <p:spPr>
+          <a:xfrm>
+            <a:off x="932688" y="1975104"/>
+            <a:ext cx="3222650" cy="237744"/>
+          </a:xfrm>
+          <a:prstGeom prst="rect">
+            <a:avLst/>
+          </a:prstGeom>
+          <a:noFill/>
+        </p:spPr>
+        <p:txBody>
+          <a:bodyPr wrap="square" lIns="0" rIns="0" tIns="0" bIns="0" anchor="t">
+            <a:spAutoFit/>
+          </a:bodyPr>
+          <a:lstStyle/>
+          <a:p>
+            <a:pPr algn="l">
+              <a:lnSpc>
+                <a:spcPct val="135000"/>
+              </a:lnSpc>
+            </a:pPr>
+            <a:r>
+              <a:rPr sz="1300" b="1" i="0" spc="156">
+                <a:solidFill>
+                  <a:srgbClr val="6E7175"/>
+                </a:solidFill>
+                <a:latin typeface="Verdana"/>
+              </a:rPr>
+              <a:t>LE SON</a:t>
+            </a:r>
+          </a:p>
+        </p:txBody>
+      </p:sp>
+      <p:sp>
+        <p:nvSpPr>
+          <p:cNvPr id="9" name="TextBox 8"/>
+          <p:cNvSpPr txBox="1"/>
+          <p:nvPr/>
+        </p:nvSpPr>
+        <p:spPr>
+          <a:xfrm>
+            <a:off x="4374794" y="1975104"/>
+            <a:ext cx="3222650" cy="237744"/>
+          </a:xfrm>
+          <a:prstGeom prst="rect">
+            <a:avLst/>
+          </a:prstGeom>
+          <a:noFill/>
+        </p:spPr>
+        <p:txBody>
+          <a:bodyPr wrap="square" lIns="0" rIns="0" tIns="0" bIns="0" anchor="t">
+            <a:spAutoFit/>
+          </a:bodyPr>
+          <a:lstStyle/>
+          <a:p>
+            <a:pPr algn="l">
+              <a:lnSpc>
+                <a:spcPct val="135000"/>
+              </a:lnSpc>
+            </a:pPr>
+            <a:r>
+              <a:rPr sz="1300" b="1" i="0" spc="156">
+                <a:solidFill>
+                  <a:srgbClr val="6E7175"/>
+                </a:solidFill>
+                <a:latin typeface="Verdana"/>
+              </a:rPr>
+              <a:t>IL S'ÉCRIT</a:t>
+            </a:r>
+          </a:p>
+        </p:txBody>
+      </p:sp>
+      <p:sp>
+        <p:nvSpPr>
+          <p:cNvPr id="10" name="TextBox 9"/>
+          <p:cNvSpPr txBox="1"/>
+          <p:nvPr/>
+        </p:nvSpPr>
+        <p:spPr>
+          <a:xfrm>
+            <a:off x="7816900" y="1975104"/>
+            <a:ext cx="3222650" cy="237744"/>
+          </a:xfrm>
+          <a:prstGeom prst="rect">
+            <a:avLst/>
+          </a:prstGeom>
+          <a:noFill/>
+        </p:spPr>
+        <p:txBody>
+          <a:bodyPr wrap="square" lIns="0" rIns="0" tIns="0" bIns="0" anchor="t">
+            <a:spAutoFit/>
+          </a:bodyPr>
+          <a:lstStyle/>
+          <a:p>
+            <a:pPr algn="l">
+              <a:lnSpc>
+                <a:spcPct val="135000"/>
+              </a:lnSpc>
+            </a:pPr>
+            <a:r>
+              <a:rPr sz="1300" b="1" i="0" spc="156">
+                <a:solidFill>
+                  <a:srgbClr val="6E7175"/>
+                </a:solidFill>
+                <a:latin typeface="Verdana"/>
+              </a:rPr>
+              <a:t>MOTS DU MODULE</a:t>
+            </a:r>
+          </a:p>
+        </p:txBody>
+      </p:sp>
+      <p:sp>
+        <p:nvSpPr>
+          <p:cNvPr id="11" name="TextBox 10"/>
+          <p:cNvSpPr txBox="1"/>
+          <p:nvPr/>
+        </p:nvSpPr>
+        <p:spPr>
+          <a:xfrm>
+            <a:off x="932688" y="2395728"/>
+            <a:ext cx="3222650" cy="640080"/>
+          </a:xfrm>
+          <a:prstGeom prst="rect">
+            <a:avLst/>
+          </a:prstGeom>
+          <a:noFill/>
+        </p:spPr>
+        <p:txBody>
+          <a:bodyPr wrap="square" lIns="0" rIns="0" tIns="0" bIns="0" anchor="t">
+            <a:spAutoFit/>
+          </a:bodyPr>
+          <a:lstStyle/>
+          <a:p>
+            <a:pPr algn="l">
+              <a:lnSpc>
+                <a:spcPct val="132000"/>
+              </a:lnSpc>
+            </a:pPr>
+            <a:r>
+              <a:rPr sz="1800" b="1" i="0">
+                <a:solidFill>
+                  <a:srgbClr val="166534"/>
+                </a:solidFill>
+                <a:latin typeface="Verdana"/>
+              </a:rPr>
+              <a:t>le son « z »</a:t>
+            </a:r>
+          </a:p>
+        </p:txBody>
+      </p:sp>
+      <p:sp>
+        <p:nvSpPr>
+          <p:cNvPr id="12" name="TextBox 11"/>
+          <p:cNvSpPr txBox="1"/>
+          <p:nvPr/>
+        </p:nvSpPr>
+        <p:spPr>
+          <a:xfrm>
+            <a:off x="4374794" y="2395728"/>
+            <a:ext cx="3222650" cy="640080"/>
+          </a:xfrm>
+          <a:prstGeom prst="rect">
+            <a:avLst/>
+          </a:prstGeom>
+          <a:noFill/>
+        </p:spPr>
+        <p:txBody>
+          <a:bodyPr wrap="square" lIns="0" rIns="0" tIns="0" bIns="0" anchor="t">
+            <a:spAutoFit/>
+          </a:bodyPr>
+          <a:lstStyle/>
+          <a:p>
+            <a:pPr algn="l">
+              <a:lnSpc>
+                <a:spcPct val="132000"/>
+              </a:lnSpc>
+            </a:pPr>
+            <a:r>
+              <a:rPr sz="1800" b="0" i="0">
+                <a:solidFill>
+                  <a:srgbClr val="3A3D40"/>
+                </a:solidFill>
+                <a:latin typeface="Verdana"/>
+              </a:rPr>
+              <a:t>un seul s entre deux voyelles</a:t>
+            </a:r>
+          </a:p>
+        </p:txBody>
+      </p:sp>
+      <p:sp>
+        <p:nvSpPr>
+          <p:cNvPr id="13" name="TextBox 12"/>
+          <p:cNvSpPr txBox="1"/>
+          <p:nvPr/>
+        </p:nvSpPr>
+        <p:spPr>
+          <a:xfrm>
+            <a:off x="7816900" y="2395728"/>
+            <a:ext cx="3222650" cy="640080"/>
+          </a:xfrm>
+          <a:prstGeom prst="rect">
+            <a:avLst/>
+          </a:prstGeom>
+          <a:noFill/>
+        </p:spPr>
+        <p:txBody>
+          <a:bodyPr wrap="square" lIns="0" rIns="0" tIns="0" bIns="0" anchor="t">
+            <a:spAutoFit/>
+          </a:bodyPr>
+          <a:lstStyle/>
+          <a:p>
+            <a:pPr algn="l">
+              <a:lnSpc>
+                <a:spcPct val="132000"/>
+              </a:lnSpc>
+            </a:pPr>
+            <a:r>
+              <a:rPr sz="1800" b="0" i="0">
+                <a:solidFill>
+                  <a:srgbClr val="3A3D40"/>
+                </a:solidFill>
+                <a:latin typeface="Verdana"/>
+              </a:rPr>
+              <a:t>voisine, organisée, organisme, visite</a:t>
+            </a:r>
+          </a:p>
+        </p:txBody>
+      </p:sp>
+      <p:sp>
+        <p:nvSpPr>
+          <p:cNvPr id="14" name="Rectangle 13"/>
+          <p:cNvSpPr/>
+          <p:nvPr/>
+        </p:nvSpPr>
+        <p:spPr>
+          <a:xfrm>
+            <a:off x="932688" y="3108960"/>
+            <a:ext cx="10326319" cy="10058"/>
+          </a:xfrm>
+          <a:prstGeom prst="rect">
+            <a:avLst/>
+          </a:prstGeom>
+          <a:solidFill>
+            <a:srgbClr val="EAEAE8"/>
           </a:solidFill>
           <a:ln>
             <a:noFill/>
@@ -9142,14 +10222,14 @@
       </p:sp>
       <p:sp>
         <p:nvSpPr>
-          <p:cNvPr id="9" name="TextBox 8"/>
-          <p:cNvSpPr txBox="1"/>
-          <p:nvPr/>
-        </p:nvSpPr>
-        <p:spPr>
-          <a:xfrm>
-            <a:off x="932688" y="4087368"/>
-            <a:ext cx="10051999" cy="392176"/>
+          <p:cNvPr id="15" name="TextBox 14"/>
+          <p:cNvSpPr txBox="1"/>
+          <p:nvPr/>
+        </p:nvSpPr>
+        <p:spPr>
+          <a:xfrm>
+            <a:off x="932688" y="3236976"/>
+            <a:ext cx="3222650" cy="941832"/>
           </a:xfrm>
           <a:prstGeom prst="rect">
             <a:avLst/>
@@ -9164,39 +10244,218 @@
           <a:p>
             <a:pPr algn="l">
               <a:lnSpc>
-                <a:spcPct val="140000"/>
-              </a:lnSpc>
-            </a:pPr>
-            <a:r>
-              <a:rPr sz="2000" b="0" i="0">
-                <a:solidFill>
-                  <a:srgbClr val="FFFFFF"/>
-                </a:solidFill>
-                <a:latin typeface="Verdana"/>
-              </a:rPr>
-              <a:t>Une régionale, une nationale, une internationale, un fait divers.</a:t>
-            </a:r>
-          </a:p>
-        </p:txBody>
-      </p:sp>
-      <p:sp>
-        <p:nvSpPr>
-          <p:cNvPr id="10" name="Rounded Rectangle 9"/>
+                <a:spcPct val="132000"/>
+              </a:lnSpc>
+            </a:pPr>
+            <a:r>
+              <a:rPr sz="1800" b="1" i="0">
+                <a:solidFill>
+                  <a:srgbClr val="166534"/>
+                </a:solidFill>
+                <a:latin typeface="Verdana"/>
+              </a:rPr>
+              <a:t>le son « s »</a:t>
+            </a:r>
+          </a:p>
+        </p:txBody>
+      </p:sp>
+      <p:sp>
+        <p:nvSpPr>
+          <p:cNvPr id="16" name="TextBox 15"/>
+          <p:cNvSpPr txBox="1"/>
+          <p:nvPr/>
+        </p:nvSpPr>
+        <p:spPr>
+          <a:xfrm>
+            <a:off x="4374794" y="3236976"/>
+            <a:ext cx="3222650" cy="941832"/>
+          </a:xfrm>
+          <a:prstGeom prst="rect">
+            <a:avLst/>
+          </a:prstGeom>
+          <a:noFill/>
+        </p:spPr>
+        <p:txBody>
+          <a:bodyPr wrap="square" lIns="0" rIns="0" tIns="0" bIns="0" anchor="t">
+            <a:spAutoFit/>
+          </a:bodyPr>
+          <a:lstStyle/>
+          <a:p>
+            <a:pPr algn="l">
+              <a:lnSpc>
+                <a:spcPct val="132000"/>
+              </a:lnSpc>
+            </a:pPr>
+            <a:r>
+              <a:rPr sz="1800" b="0" i="0">
+                <a:solidFill>
+                  <a:srgbClr val="3A3D40"/>
+                </a:solidFill>
+                <a:latin typeface="Verdana"/>
+              </a:rPr>
+              <a:t>ss, ou s après une consonne ou en début de mot</a:t>
+            </a:r>
+          </a:p>
+        </p:txBody>
+      </p:sp>
+      <p:sp>
+        <p:nvSpPr>
+          <p:cNvPr id="17" name="TextBox 16"/>
+          <p:cNvSpPr txBox="1"/>
+          <p:nvPr/>
+        </p:nvSpPr>
+        <p:spPr>
+          <a:xfrm>
+            <a:off x="7816900" y="3236976"/>
+            <a:ext cx="3222650" cy="941832"/>
+          </a:xfrm>
+          <a:prstGeom prst="rect">
+            <a:avLst/>
+          </a:prstGeom>
+          <a:noFill/>
+        </p:spPr>
+        <p:txBody>
+          <a:bodyPr wrap="square" lIns="0" rIns="0" tIns="0" bIns="0" anchor="t">
+            <a:spAutoFit/>
+          </a:bodyPr>
+          <a:lstStyle/>
+          <a:p>
+            <a:pPr algn="l">
+              <a:lnSpc>
+                <a:spcPct val="132000"/>
+              </a:lnSpc>
+            </a:pPr>
+            <a:r>
+              <a:rPr sz="1800" b="0" i="0">
+                <a:solidFill>
+                  <a:srgbClr val="3A3D40"/>
+                </a:solidFill>
+                <a:latin typeface="Verdana"/>
+              </a:rPr>
+              <a:t>succès, amassé, cents, personne</a:t>
+            </a:r>
+          </a:p>
+        </p:txBody>
+      </p:sp>
+      <p:sp>
+        <p:nvSpPr>
+          <p:cNvPr id="18" name="Rounded Rectangle 17"/>
           <p:cNvSpPr/>
           <p:nvPr/>
         </p:nvSpPr>
         <p:spPr>
           <a:xfrm>
-            <a:off x="566928" y="4680712"/>
-            <a:ext cx="11057839" cy="666496"/>
+            <a:off x="566928" y="4672583"/>
+            <a:ext cx="11057839" cy="1175004"/>
           </a:xfrm>
           <a:prstGeom prst="roundRect">
             <a:avLst>
-              <a:gd name="adj" fmla="val 13719"/>
+              <a:gd name="adj" fmla="val 12451"/>
             </a:avLst>
           </a:prstGeom>
           <a:solidFill>
-            <a:srgbClr val="2A2C2F"/>
+            <a:srgbClr val="FBFBFA"/>
+          </a:solidFill>
+          <a:ln w="12700">
+            <a:solidFill>
+              <a:srgbClr val="EAEAE8"/>
+            </a:solidFill>
+          </a:ln>
+          <a:effectLst/>
+        </p:spPr>
+        <p:style>
+          <a:lnRef idx="1">
+            <a:schemeClr val="accent1"/>
+          </a:lnRef>
+          <a:fillRef idx="3">
+            <a:schemeClr val="accent1"/>
+          </a:fillRef>
+          <a:effectRef idx="2">
+            <a:schemeClr val="accent1"/>
+          </a:effectRef>
+          <a:fontRef idx="minor">
+            <a:schemeClr val="lt1"/>
+          </a:fontRef>
+        </p:style>
+        <p:txBody>
+          <a:bodyPr rtlCol="0" anchor="ctr"/>
+          <a:lstStyle/>
+          <a:p/>
+        </p:txBody>
+      </p:sp>
+      <p:sp>
+        <p:nvSpPr>
+          <p:cNvPr id="19" name="TextBox 18"/>
+          <p:cNvSpPr txBox="1"/>
+          <p:nvPr/>
+        </p:nvSpPr>
+        <p:spPr>
+          <a:xfrm>
+            <a:off x="969264" y="4928616"/>
+            <a:ext cx="10234879" cy="717804"/>
+          </a:xfrm>
+          <a:prstGeom prst="rect">
+            <a:avLst/>
+          </a:prstGeom>
+          <a:noFill/>
+        </p:spPr>
+        <p:txBody>
+          <a:bodyPr wrap="square" lIns="0" rIns="0" tIns="0" bIns="0" anchor="t">
+            <a:spAutoFit/>
+          </a:bodyPr>
+          <a:lstStyle/>
+          <a:p>
+            <a:pPr algn="l">
+              <a:lnSpc>
+                <a:spcPct val="145000"/>
+              </a:lnSpc>
+            </a:pPr>
+            <a:r>
+              <a:rPr sz="1800" b="0" i="0">
+                <a:solidFill>
+                  <a:srgbClr val="4B4F52"/>
+                </a:solidFill>
+                <a:latin typeface="Verdana"/>
+              </a:rPr>
+              <a:t>C'est pour cette raison qu'on double le s dans « amassé » : sans le second s, on lirait « amazé ».</a:t>
+            </a:r>
+          </a:p>
+        </p:txBody>
+      </p:sp>
+    </p:spTree>
+  </p:cSld>
+  <p:clrMapOvr>
+    <a:masterClrMapping/>
+  </p:clrMapOvr>
+</p:sld>
+</file>
+
+<file path=ppt/slides/slide17.xml><?xml version="1.0" encoding="utf-8"?>
+<p:sld xmlns:a="http://schemas.openxmlformats.org/drawingml/2006/main" xmlns:p="http://schemas.openxmlformats.org/presentationml/2006/main" xmlns:r="http://schemas.openxmlformats.org/officeDocument/2006/relationships">
+  <p:cSld>
+    <p:spTree>
+      <p:nvGrpSpPr>
+        <p:cNvPr id="1" name=""/>
+        <p:cNvGrpSpPr/>
+        <p:nvPr/>
+      </p:nvGrpSpPr>
+      <p:grpSpPr/>
+      <p:sp>
+        <p:nvSpPr>
+          <p:cNvPr id="2" name="Rectangle 1"/>
+          <p:cNvSpPr/>
+          <p:nvPr/>
+        </p:nvSpPr>
+        <p:spPr>
+          <a:xfrm>
+            <a:off x="0" y="0"/>
+            <a:ext cx="12191695" cy="6858000"/>
+          </a:xfrm>
+          <a:prstGeom prst="rect">
+            <a:avLst/>
+          </a:prstGeom>
+          <a:solidFill>
+            <a:srgbClr val="F7F7F5"/>
           </a:solidFill>
           <a:ln>
             <a:noFill/>
@@ -9225,46 +10484,7 @@
       </p:sp>
       <p:sp>
         <p:nvSpPr>
-          <p:cNvPr id="11" name="TextBox 10"/>
-          <p:cNvSpPr txBox="1"/>
-          <p:nvPr/>
-        </p:nvSpPr>
-        <p:spPr>
-          <a:xfrm>
-            <a:off x="932688" y="4836160"/>
-            <a:ext cx="10051999" cy="392176"/>
-          </a:xfrm>
-          <a:prstGeom prst="rect">
-            <a:avLst/>
-          </a:prstGeom>
-          <a:noFill/>
-        </p:spPr>
-        <p:txBody>
-          <a:bodyPr wrap="square" lIns="0" rIns="0" tIns="0" bIns="0" anchor="t">
-            <a:spAutoFit/>
-          </a:bodyPr>
-          <a:lstStyle/>
-          <a:p>
-            <a:pPr algn="l">
-              <a:lnSpc>
-                <a:spcPct val="140000"/>
-              </a:lnSpc>
-            </a:pPr>
-            <a:r>
-              <a:rPr sz="2000" b="0" i="0">
-                <a:solidFill>
-                  <a:srgbClr val="FFFFFF"/>
-                </a:solidFill>
-                <a:latin typeface="Verdana"/>
-              </a:rPr>
-              <a:t>Un titre court : cinq à huit mots.</a:t>
-            </a:r>
-          </a:p>
-        </p:txBody>
-      </p:sp>
-      <p:sp>
-        <p:nvSpPr>
-          <p:cNvPr id="12" name="TextBox 11"/>
+          <p:cNvPr id="3" name="TextBox 2"/>
           <p:cNvSpPr txBox="1"/>
           <p:nvPr/>
         </p:nvSpPr>
@@ -9297,6 +10517,3726 @@
                 <a:latin typeface="Verdana"/>
               </a:rPr>
               <a:t>A2 · C'est l'heure des nouvelles</a:t>
+            </a:r>
+          </a:p>
+        </p:txBody>
+      </p:sp>
+      <p:sp>
+        <p:nvSpPr>
+          <p:cNvPr id="4" name="TextBox 3"/>
+          <p:cNvSpPr txBox="1"/>
+          <p:nvPr/>
+        </p:nvSpPr>
+        <p:spPr>
+          <a:xfrm>
+            <a:off x="10710367" y="6355080"/>
+            <a:ext cx="914400" cy="219456"/>
+          </a:xfrm>
+          <a:prstGeom prst="rect">
+            <a:avLst/>
+          </a:prstGeom>
+          <a:noFill/>
+        </p:spPr>
+        <p:txBody>
+          <a:bodyPr wrap="square" lIns="0" rIns="0" tIns="0" bIns="0" anchor="t">
+            <a:spAutoFit/>
+          </a:bodyPr>
+          <a:lstStyle/>
+          <a:p>
+            <a:pPr algn="r">
+              <a:lnSpc>
+                <a:spcPct val="135000"/>
+              </a:lnSpc>
+            </a:pPr>
+            <a:r>
+              <a:rPr sz="1200" b="0" i="0">
+                <a:solidFill>
+                  <a:srgbClr val="6E7175"/>
+                </a:solidFill>
+                <a:latin typeface="Verdana"/>
+              </a:rPr>
+              <a:t>17</a:t>
+            </a:r>
+          </a:p>
+        </p:txBody>
+      </p:sp>
+      <p:sp>
+        <p:nvSpPr>
+          <p:cNvPr id="5" name="TextBox 4"/>
+          <p:cNvSpPr txBox="1"/>
+          <p:nvPr/>
+        </p:nvSpPr>
+        <p:spPr>
+          <a:xfrm>
+            <a:off x="566928" y="420624"/>
+            <a:ext cx="11057839" cy="237744"/>
+          </a:xfrm>
+          <a:prstGeom prst="rect">
+            <a:avLst/>
+          </a:prstGeom>
+          <a:noFill/>
+        </p:spPr>
+        <p:txBody>
+          <a:bodyPr wrap="square" lIns="0" rIns="0" tIns="0" bIns="0" anchor="t">
+            <a:spAutoFit/>
+          </a:bodyPr>
+          <a:lstStyle/>
+          <a:p>
+            <a:pPr algn="l">
+              <a:lnSpc>
+                <a:spcPct val="135000"/>
+              </a:lnSpc>
+            </a:pPr>
+            <a:r>
+              <a:rPr sz="1300" b="1" i="0" spc="156">
+                <a:solidFill>
+                  <a:srgbClr val="166534"/>
+                </a:solidFill>
+                <a:latin typeface="Verdana"/>
+              </a:rPr>
+              <a:t>LE PIÈGE DE « POISSON » ET « POISON »</a:t>
+            </a:r>
+          </a:p>
+        </p:txBody>
+      </p:sp>
+      <p:sp>
+        <p:nvSpPr>
+          <p:cNvPr id="6" name="TextBox 5"/>
+          <p:cNvSpPr txBox="1"/>
+          <p:nvPr/>
+        </p:nvSpPr>
+        <p:spPr>
+          <a:xfrm>
+            <a:off x="566928" y="749808"/>
+            <a:ext cx="11057839" cy="877824"/>
+          </a:xfrm>
+          <a:prstGeom prst="rect">
+            <a:avLst/>
+          </a:prstGeom>
+          <a:noFill/>
+        </p:spPr>
+        <p:txBody>
+          <a:bodyPr wrap="square" lIns="0" rIns="0" tIns="0" bIns="0" anchor="t">
+            <a:spAutoFit/>
+          </a:bodyPr>
+          <a:lstStyle/>
+          <a:p>
+            <a:pPr algn="l">
+              <a:lnSpc>
+                <a:spcPct val="115000"/>
+              </a:lnSpc>
+            </a:pPr>
+            <a:r>
+              <a:rPr sz="3400" b="1" i="0">
+                <a:solidFill>
+                  <a:srgbClr val="17181A"/>
+                </a:solidFill>
+                <a:latin typeface="Verdana"/>
+              </a:rPr>
+              <a:t>Le piège le plus fréquent</a:t>
+            </a:r>
+          </a:p>
+        </p:txBody>
+      </p:sp>
+      <p:sp>
+        <p:nvSpPr>
+          <p:cNvPr id="7" name="Rounded Rectangle 6"/>
+          <p:cNvSpPr/>
+          <p:nvPr/>
+        </p:nvSpPr>
+        <p:spPr>
+          <a:xfrm>
+            <a:off x="566928" y="1856232"/>
+            <a:ext cx="5428335" cy="2331720"/>
+          </a:xfrm>
+          <a:prstGeom prst="roundRect">
+            <a:avLst>
+              <a:gd name="adj" fmla="val 6274"/>
+            </a:avLst>
+          </a:prstGeom>
+          <a:solidFill>
+            <a:srgbClr val="FFF6F5"/>
+          </a:solidFill>
+          <a:ln w="12700">
+            <a:solidFill>
+              <a:srgbClr val="DC2626"/>
+            </a:solidFill>
+          </a:ln>
+          <a:effectLst/>
+        </p:spPr>
+        <p:style>
+          <a:lnRef idx="1">
+            <a:schemeClr val="accent1"/>
+          </a:lnRef>
+          <a:fillRef idx="3">
+            <a:schemeClr val="accent1"/>
+          </a:fillRef>
+          <a:effectRef idx="2">
+            <a:schemeClr val="accent1"/>
+          </a:effectRef>
+          <a:fontRef idx="minor">
+            <a:schemeClr val="lt1"/>
+          </a:fontRef>
+        </p:style>
+        <p:txBody>
+          <a:bodyPr rtlCol="0" anchor="ctr"/>
+          <a:lstStyle/>
+          <a:p/>
+        </p:txBody>
+      </p:sp>
+      <p:sp>
+        <p:nvSpPr>
+          <p:cNvPr id="8" name="TextBox 7"/>
+          <p:cNvSpPr txBox="1"/>
+          <p:nvPr/>
+        </p:nvSpPr>
+        <p:spPr>
+          <a:xfrm>
+            <a:off x="932688" y="2130552"/>
+            <a:ext cx="4696815" cy="274320"/>
+          </a:xfrm>
+          <a:prstGeom prst="rect">
+            <a:avLst/>
+          </a:prstGeom>
+          <a:noFill/>
+        </p:spPr>
+        <p:txBody>
+          <a:bodyPr wrap="square" lIns="0" rIns="0" tIns="0" bIns="0" anchor="t">
+            <a:spAutoFit/>
+          </a:bodyPr>
+          <a:lstStyle/>
+          <a:p>
+            <a:pPr algn="l">
+              <a:lnSpc>
+                <a:spcPct val="135000"/>
+              </a:lnSpc>
+            </a:pPr>
+            <a:r>
+              <a:rPr sz="1300" b="1" i="0" spc="156">
+                <a:solidFill>
+                  <a:srgbClr val="B91C1C"/>
+                </a:solidFill>
+                <a:latin typeface="Verdana"/>
+              </a:rPr>
+              <a:t>ON ENTEND SOUVENT</a:t>
+            </a:r>
+          </a:p>
+        </p:txBody>
+      </p:sp>
+      <p:sp>
+        <p:nvSpPr>
+          <p:cNvPr id="9" name="TextBox 8"/>
+          <p:cNvSpPr txBox="1"/>
+          <p:nvPr/>
+        </p:nvSpPr>
+        <p:spPr>
+          <a:xfrm>
+            <a:off x="932688" y="2569464"/>
+            <a:ext cx="4696815" cy="1417320"/>
+          </a:xfrm>
+          <a:prstGeom prst="rect">
+            <a:avLst/>
+          </a:prstGeom>
+          <a:noFill/>
+        </p:spPr>
+        <p:txBody>
+          <a:bodyPr wrap="square" lIns="0" rIns="0" tIns="0" bIns="0" anchor="t">
+            <a:spAutoFit/>
+          </a:bodyPr>
+          <a:lstStyle/>
+          <a:p>
+            <a:pPr algn="l">
+              <a:lnSpc>
+                <a:spcPct val="130000"/>
+              </a:lnSpc>
+            </a:pPr>
+            <a:r>
+              <a:rPr sz="2500" b="1" i="0">
+                <a:solidFill>
+                  <a:srgbClr val="17181A"/>
+                </a:solidFill>
+                <a:latin typeface="Verdana"/>
+              </a:rPr>
+              <a:t>poison, quand on veut dire poisson</a:t>
+            </a:r>
+          </a:p>
+        </p:txBody>
+      </p:sp>
+      <p:sp>
+        <p:nvSpPr>
+          <p:cNvPr id="10" name="Rounded Rectangle 9"/>
+          <p:cNvSpPr/>
+          <p:nvPr/>
+        </p:nvSpPr>
+        <p:spPr>
+          <a:xfrm>
+            <a:off x="6196431" y="1856232"/>
+            <a:ext cx="5428335" cy="2331720"/>
+          </a:xfrm>
+          <a:prstGeom prst="roundRect">
+            <a:avLst>
+              <a:gd name="adj" fmla="val 6274"/>
+            </a:avLst>
+          </a:prstGeom>
+          <a:solidFill>
+            <a:srgbClr val="E6F5EE"/>
+          </a:solidFill>
+          <a:ln w="12700">
+            <a:solidFill>
+              <a:srgbClr val="0A8F5B"/>
+            </a:solidFill>
+          </a:ln>
+          <a:effectLst/>
+        </p:spPr>
+        <p:style>
+          <a:lnRef idx="1">
+            <a:schemeClr val="accent1"/>
+          </a:lnRef>
+          <a:fillRef idx="3">
+            <a:schemeClr val="accent1"/>
+          </a:fillRef>
+          <a:effectRef idx="2">
+            <a:schemeClr val="accent1"/>
+          </a:effectRef>
+          <a:fontRef idx="minor">
+            <a:schemeClr val="lt1"/>
+          </a:fontRef>
+        </p:style>
+        <p:txBody>
+          <a:bodyPr rtlCol="0" anchor="ctr"/>
+          <a:lstStyle/>
+          <a:p/>
+        </p:txBody>
+      </p:sp>
+      <p:sp>
+        <p:nvSpPr>
+          <p:cNvPr id="11" name="TextBox 10"/>
+          <p:cNvSpPr txBox="1"/>
+          <p:nvPr/>
+        </p:nvSpPr>
+        <p:spPr>
+          <a:xfrm>
+            <a:off x="6562191" y="2130552"/>
+            <a:ext cx="4696815" cy="274320"/>
+          </a:xfrm>
+          <a:prstGeom prst="rect">
+            <a:avLst/>
+          </a:prstGeom>
+          <a:noFill/>
+        </p:spPr>
+        <p:txBody>
+          <a:bodyPr wrap="square" lIns="0" rIns="0" tIns="0" bIns="0" anchor="t">
+            <a:spAutoFit/>
+          </a:bodyPr>
+          <a:lstStyle/>
+          <a:p>
+            <a:pPr algn="l">
+              <a:lnSpc>
+                <a:spcPct val="135000"/>
+              </a:lnSpc>
+            </a:pPr>
+            <a:r>
+              <a:rPr sz="1300" b="1" i="0" spc="156">
+                <a:solidFill>
+                  <a:srgbClr val="07734A"/>
+                </a:solidFill>
+                <a:latin typeface="Verdana"/>
+              </a:rPr>
+              <a:t>IL FAUT DIRE PLUTÔT</a:t>
+            </a:r>
+          </a:p>
+        </p:txBody>
+      </p:sp>
+      <p:sp>
+        <p:nvSpPr>
+          <p:cNvPr id="12" name="TextBox 11"/>
+          <p:cNvSpPr txBox="1"/>
+          <p:nvPr/>
+        </p:nvSpPr>
+        <p:spPr>
+          <a:xfrm>
+            <a:off x="6562191" y="2569464"/>
+            <a:ext cx="4696815" cy="1417320"/>
+          </a:xfrm>
+          <a:prstGeom prst="rect">
+            <a:avLst/>
+          </a:prstGeom>
+          <a:noFill/>
+        </p:spPr>
+        <p:txBody>
+          <a:bodyPr wrap="square" lIns="0" rIns="0" tIns="0" bIns="0" anchor="t">
+            <a:spAutoFit/>
+          </a:bodyPr>
+          <a:lstStyle/>
+          <a:p>
+            <a:pPr algn="l">
+              <a:lnSpc>
+                <a:spcPct val="130000"/>
+              </a:lnSpc>
+            </a:pPr>
+            <a:r>
+              <a:rPr sz="2500" b="1" i="0">
+                <a:solidFill>
+                  <a:srgbClr val="17181A"/>
+                </a:solidFill>
+                <a:latin typeface="Verdana"/>
+              </a:rPr>
+              <a:t>poisson — deux s, donc le son « s »</a:t>
+            </a:r>
+          </a:p>
+        </p:txBody>
+      </p:sp>
+      <p:sp>
+        <p:nvSpPr>
+          <p:cNvPr id="13" name="Rounded Rectangle 12"/>
+          <p:cNvSpPr/>
+          <p:nvPr/>
+        </p:nvSpPr>
+        <p:spPr>
+          <a:xfrm>
+            <a:off x="566928" y="4462272"/>
+            <a:ext cx="11057839" cy="1618487"/>
+          </a:xfrm>
+          <a:prstGeom prst="roundRect">
+            <a:avLst>
+              <a:gd name="adj" fmla="val 9039"/>
+            </a:avLst>
+          </a:prstGeom>
+          <a:solidFill>
+            <a:srgbClr val="FFFFFF"/>
+          </a:solidFill>
+          <a:ln w="12700">
+            <a:solidFill>
+              <a:srgbClr val="EAEAE8"/>
+            </a:solidFill>
+          </a:ln>
+          <a:effectLst/>
+        </p:spPr>
+        <p:style>
+          <a:lnRef idx="1">
+            <a:schemeClr val="accent1"/>
+          </a:lnRef>
+          <a:fillRef idx="3">
+            <a:schemeClr val="accent1"/>
+          </a:fillRef>
+          <a:effectRef idx="2">
+            <a:schemeClr val="accent1"/>
+          </a:effectRef>
+          <a:fontRef idx="minor">
+            <a:schemeClr val="lt1"/>
+          </a:fontRef>
+        </p:style>
+        <p:txBody>
+          <a:bodyPr rtlCol="0" anchor="ctr"/>
+          <a:lstStyle/>
+          <a:p/>
+        </p:txBody>
+      </p:sp>
+      <p:sp>
+        <p:nvSpPr>
+          <p:cNvPr id="14" name="TextBox 13"/>
+          <p:cNvSpPr txBox="1"/>
+          <p:nvPr/>
+        </p:nvSpPr>
+        <p:spPr>
+          <a:xfrm>
+            <a:off x="969264" y="4736592"/>
+            <a:ext cx="10234879" cy="1150620"/>
+          </a:xfrm>
+          <a:prstGeom prst="rect">
+            <a:avLst/>
+          </a:prstGeom>
+          <a:noFill/>
+        </p:spPr>
+        <p:txBody>
+          <a:bodyPr wrap="square" lIns="0" rIns="0" tIns="0" bIns="0" anchor="t">
+            <a:spAutoFit/>
+          </a:bodyPr>
+          <a:lstStyle/>
+          <a:p>
+            <a:pPr algn="l">
+              <a:lnSpc>
+                <a:spcPct val="145000"/>
+              </a:lnSpc>
+            </a:pPr>
+            <a:r>
+              <a:rPr sz="2000" b="0" i="0">
+                <a:solidFill>
+                  <a:srgbClr val="4B4F52"/>
+                </a:solidFill>
+                <a:latin typeface="Verdana"/>
+              </a:rPr>
+              <a:t>Un seul s change le mot du tout au tout : un poisson se mange, un poison tue. La paire est célèbre parce qu'elle montre que la règle n'est pas une politesse d'orthographe — elle porte le sens.</a:t>
+            </a:r>
+          </a:p>
+        </p:txBody>
+      </p:sp>
+    </p:spTree>
+  </p:cSld>
+  <p:clrMapOvr>
+    <a:masterClrMapping/>
+  </p:clrMapOvr>
+</p:sld>
+</file>
+
+<file path=ppt/slides/slide18.xml><?xml version="1.0" encoding="utf-8"?>
+<p:sld xmlns:a="http://schemas.openxmlformats.org/drawingml/2006/main" xmlns:p="http://schemas.openxmlformats.org/presentationml/2006/main" xmlns:r="http://schemas.openxmlformats.org/officeDocument/2006/relationships">
+  <p:cSld>
+    <p:spTree>
+      <p:nvGrpSpPr>
+        <p:cNvPr id="1" name=""/>
+        <p:cNvGrpSpPr/>
+        <p:nvPr/>
+      </p:nvGrpSpPr>
+      <p:grpSpPr/>
+      <p:sp>
+        <p:nvSpPr>
+          <p:cNvPr id="2" name="Rectangle 1"/>
+          <p:cNvSpPr/>
+          <p:nvPr/>
+        </p:nvSpPr>
+        <p:spPr>
+          <a:xfrm>
+            <a:off x="0" y="0"/>
+            <a:ext cx="12191695" cy="6858000"/>
+          </a:xfrm>
+          <a:prstGeom prst="rect">
+            <a:avLst/>
+          </a:prstGeom>
+          <a:solidFill>
+            <a:srgbClr val="F7F7F5"/>
+          </a:solidFill>
+          <a:ln>
+            <a:noFill/>
+          </a:ln>
+          <a:effectLst/>
+        </p:spPr>
+        <p:style>
+          <a:lnRef idx="1">
+            <a:schemeClr val="accent1"/>
+          </a:lnRef>
+          <a:fillRef idx="3">
+            <a:schemeClr val="accent1"/>
+          </a:fillRef>
+          <a:effectRef idx="2">
+            <a:schemeClr val="accent1"/>
+          </a:effectRef>
+          <a:fontRef idx="minor">
+            <a:schemeClr val="lt1"/>
+          </a:fontRef>
+        </p:style>
+        <p:txBody>
+          <a:bodyPr rtlCol="0" anchor="ctr"/>
+          <a:lstStyle/>
+          <a:p/>
+        </p:txBody>
+      </p:sp>
+      <p:sp>
+        <p:nvSpPr>
+          <p:cNvPr id="3" name="TextBox 2"/>
+          <p:cNvSpPr txBox="1"/>
+          <p:nvPr/>
+        </p:nvSpPr>
+        <p:spPr>
+          <a:xfrm>
+            <a:off x="566928" y="6355080"/>
+            <a:ext cx="6400800" cy="219456"/>
+          </a:xfrm>
+          <a:prstGeom prst="rect">
+            <a:avLst/>
+          </a:prstGeom>
+          <a:noFill/>
+        </p:spPr>
+        <p:txBody>
+          <a:bodyPr wrap="square" lIns="0" rIns="0" tIns="0" bIns="0" anchor="t">
+            <a:spAutoFit/>
+          </a:bodyPr>
+          <a:lstStyle/>
+          <a:p>
+            <a:pPr algn="l">
+              <a:lnSpc>
+                <a:spcPct val="135000"/>
+              </a:lnSpc>
+            </a:pPr>
+            <a:r>
+              <a:rPr sz="1200" b="0" i="0">
+                <a:solidFill>
+                  <a:srgbClr val="6E7175"/>
+                </a:solidFill>
+                <a:latin typeface="Verdana"/>
+              </a:rPr>
+              <a:t>A2 · C'est l'heure des nouvelles</a:t>
+            </a:r>
+          </a:p>
+        </p:txBody>
+      </p:sp>
+      <p:sp>
+        <p:nvSpPr>
+          <p:cNvPr id="4" name="TextBox 3"/>
+          <p:cNvSpPr txBox="1"/>
+          <p:nvPr/>
+        </p:nvSpPr>
+        <p:spPr>
+          <a:xfrm>
+            <a:off x="10710367" y="6355080"/>
+            <a:ext cx="914400" cy="219456"/>
+          </a:xfrm>
+          <a:prstGeom prst="rect">
+            <a:avLst/>
+          </a:prstGeom>
+          <a:noFill/>
+        </p:spPr>
+        <p:txBody>
+          <a:bodyPr wrap="square" lIns="0" rIns="0" tIns="0" bIns="0" anchor="t">
+            <a:spAutoFit/>
+          </a:bodyPr>
+          <a:lstStyle/>
+          <a:p>
+            <a:pPr algn="r">
+              <a:lnSpc>
+                <a:spcPct val="135000"/>
+              </a:lnSpc>
+            </a:pPr>
+            <a:r>
+              <a:rPr sz="1200" b="0" i="0">
+                <a:solidFill>
+                  <a:srgbClr val="6E7175"/>
+                </a:solidFill>
+                <a:latin typeface="Verdana"/>
+              </a:rPr>
+              <a:t>18</a:t>
+            </a:r>
+          </a:p>
+        </p:txBody>
+      </p:sp>
+      <p:sp>
+        <p:nvSpPr>
+          <p:cNvPr id="5" name="TextBox 4"/>
+          <p:cNvSpPr txBox="1"/>
+          <p:nvPr/>
+        </p:nvSpPr>
+        <p:spPr>
+          <a:xfrm>
+            <a:off x="566928" y="420624"/>
+            <a:ext cx="11057839" cy="237744"/>
+          </a:xfrm>
+          <a:prstGeom prst="rect">
+            <a:avLst/>
+          </a:prstGeom>
+          <a:noFill/>
+        </p:spPr>
+        <p:txBody>
+          <a:bodyPr wrap="square" lIns="0" rIns="0" tIns="0" bIns="0" anchor="t">
+            <a:spAutoFit/>
+          </a:bodyPr>
+          <a:lstStyle/>
+          <a:p>
+            <a:pPr algn="l">
+              <a:lnSpc>
+                <a:spcPct val="135000"/>
+              </a:lnSpc>
+            </a:pPr>
+            <a:r>
+              <a:rPr sz="1300" b="1" i="0" spc="156">
+                <a:solidFill>
+                  <a:srgbClr val="166534"/>
+                </a:solidFill>
+                <a:latin typeface="Verdana"/>
+              </a:rPr>
+              <a:t>PRATIQUE · 5 DE 6</a:t>
+            </a:r>
+          </a:p>
+        </p:txBody>
+      </p:sp>
+      <p:sp>
+        <p:nvSpPr>
+          <p:cNvPr id="6" name="TextBox 5"/>
+          <p:cNvSpPr txBox="1"/>
+          <p:nvPr/>
+        </p:nvSpPr>
+        <p:spPr>
+          <a:xfrm>
+            <a:off x="566928" y="749808"/>
+            <a:ext cx="11057839" cy="877824"/>
+          </a:xfrm>
+          <a:prstGeom prst="rect">
+            <a:avLst/>
+          </a:prstGeom>
+          <a:noFill/>
+        </p:spPr>
+        <p:txBody>
+          <a:bodyPr wrap="square" lIns="0" rIns="0" tIns="0" bIns="0" anchor="t">
+            <a:spAutoFit/>
+          </a:bodyPr>
+          <a:lstStyle/>
+          <a:p>
+            <a:pPr algn="l">
+              <a:lnSpc>
+                <a:spcPct val="115000"/>
+              </a:lnSpc>
+            </a:pPr>
+            <a:r>
+              <a:rPr sz="3400" b="1" i="0">
+                <a:solidFill>
+                  <a:srgbClr val="17181A"/>
+                </a:solidFill>
+                <a:latin typeface="Verdana"/>
+              </a:rPr>
+              <a:t>Quel son entendez-vous ?</a:t>
+            </a:r>
+          </a:p>
+        </p:txBody>
+      </p:sp>
+      <p:sp>
+        <p:nvSpPr>
+          <p:cNvPr id="7" name="TextBox 6"/>
+          <p:cNvSpPr txBox="1"/>
+          <p:nvPr/>
+        </p:nvSpPr>
+        <p:spPr>
+          <a:xfrm>
+            <a:off x="566928" y="1645920"/>
+            <a:ext cx="11057839" cy="329184"/>
+          </a:xfrm>
+          <a:prstGeom prst="rect">
+            <a:avLst/>
+          </a:prstGeom>
+          <a:noFill/>
+        </p:spPr>
+        <p:txBody>
+          <a:bodyPr wrap="square" lIns="0" rIns="0" tIns="0" bIns="0" anchor="t">
+            <a:spAutoFit/>
+          </a:bodyPr>
+          <a:lstStyle/>
+          <a:p>
+            <a:pPr algn="l">
+              <a:lnSpc>
+                <a:spcPct val="135000"/>
+              </a:lnSpc>
+            </a:pPr>
+            <a:r>
+              <a:rPr sz="1800" b="0" i="0">
+                <a:solidFill>
+                  <a:srgbClr val="6E7175"/>
+                </a:solidFill>
+                <a:latin typeface="Verdana"/>
+              </a:rPr>
+              <a:t>Écoutez le mot, écrivez « s » ou « z ».</a:t>
+            </a:r>
+          </a:p>
+        </p:txBody>
+      </p:sp>
+      <p:sp>
+        <p:nvSpPr>
+          <p:cNvPr id="8" name="Rounded Rectangle 7"/>
+          <p:cNvSpPr/>
+          <p:nvPr/>
+        </p:nvSpPr>
+        <p:spPr>
+          <a:xfrm>
+            <a:off x="566928" y="2139696"/>
+            <a:ext cx="5464911" cy="648716"/>
+          </a:xfrm>
+          <a:prstGeom prst="roundRect">
+            <a:avLst>
+              <a:gd name="adj" fmla="val 22552"/>
+            </a:avLst>
+          </a:prstGeom>
+          <a:solidFill>
+            <a:srgbClr val="FFFFFF"/>
+          </a:solidFill>
+          <a:ln w="12700">
+            <a:solidFill>
+              <a:srgbClr val="EAEAE8"/>
+            </a:solidFill>
+          </a:ln>
+          <a:effectLst/>
+        </p:spPr>
+        <p:style>
+          <a:lnRef idx="1">
+            <a:schemeClr val="accent1"/>
+          </a:lnRef>
+          <a:fillRef idx="3">
+            <a:schemeClr val="accent1"/>
+          </a:fillRef>
+          <a:effectRef idx="2">
+            <a:schemeClr val="accent1"/>
+          </a:effectRef>
+          <a:fontRef idx="minor">
+            <a:schemeClr val="lt1"/>
+          </a:fontRef>
+        </p:style>
+        <p:txBody>
+          <a:bodyPr rtlCol="0" anchor="ctr"/>
+          <a:lstStyle/>
+          <a:p/>
+        </p:txBody>
+      </p:sp>
+      <p:sp>
+        <p:nvSpPr>
+          <p:cNvPr id="9" name="Rounded Rectangle 8"/>
+          <p:cNvSpPr/>
+          <p:nvPr/>
+        </p:nvSpPr>
+        <p:spPr>
+          <a:xfrm>
+            <a:off x="841247" y="2281174"/>
+            <a:ext cx="365760" cy="365760"/>
+          </a:xfrm>
+          <a:prstGeom prst="roundRect">
+            <a:avLst>
+              <a:gd name="adj" fmla="val 32500"/>
+            </a:avLst>
+          </a:prstGeom>
+          <a:solidFill>
+            <a:srgbClr val="E3F1E7"/>
+          </a:solidFill>
+          <a:ln>
+            <a:noFill/>
+          </a:ln>
+          <a:effectLst/>
+        </p:spPr>
+        <p:style>
+          <a:lnRef idx="1">
+            <a:schemeClr val="accent1"/>
+          </a:lnRef>
+          <a:fillRef idx="3">
+            <a:schemeClr val="accent1"/>
+          </a:fillRef>
+          <a:effectRef idx="2">
+            <a:schemeClr val="accent1"/>
+          </a:effectRef>
+          <a:fontRef idx="minor">
+            <a:schemeClr val="lt1"/>
+          </a:fontRef>
+        </p:style>
+        <p:txBody>
+          <a:bodyPr rtlCol="0" anchor="ctr"/>
+          <a:lstStyle/>
+          <a:p/>
+        </p:txBody>
+      </p:sp>
+      <p:sp>
+        <p:nvSpPr>
+          <p:cNvPr id="10" name="TextBox 9"/>
+          <p:cNvSpPr txBox="1"/>
+          <p:nvPr/>
+        </p:nvSpPr>
+        <p:spPr>
+          <a:xfrm>
+            <a:off x="841247" y="2345182"/>
+            <a:ext cx="365760" cy="256032"/>
+          </a:xfrm>
+          <a:prstGeom prst="rect">
+            <a:avLst/>
+          </a:prstGeom>
+          <a:noFill/>
+        </p:spPr>
+        <p:txBody>
+          <a:bodyPr wrap="square" lIns="0" rIns="0" tIns="0" bIns="0" anchor="t">
+            <a:spAutoFit/>
+          </a:bodyPr>
+          <a:lstStyle/>
+          <a:p>
+            <a:pPr algn="ctr">
+              <a:lnSpc>
+                <a:spcPct val="135000"/>
+              </a:lnSpc>
+            </a:pPr>
+            <a:r>
+              <a:rPr sz="1500" b="1" i="0">
+                <a:solidFill>
+                  <a:srgbClr val="166534"/>
+                </a:solidFill>
+                <a:latin typeface="Verdana"/>
+              </a:rPr>
+              <a:t>1</a:t>
+            </a:r>
+          </a:p>
+        </p:txBody>
+      </p:sp>
+      <p:sp>
+        <p:nvSpPr>
+          <p:cNvPr id="11" name="TextBox 10"/>
+          <p:cNvSpPr txBox="1"/>
+          <p:nvPr/>
+        </p:nvSpPr>
+        <p:spPr>
+          <a:xfrm>
+            <a:off x="1344168" y="2295144"/>
+            <a:ext cx="4504791" cy="374396"/>
+          </a:xfrm>
+          <a:prstGeom prst="rect">
+            <a:avLst/>
+          </a:prstGeom>
+          <a:noFill/>
+        </p:spPr>
+        <p:txBody>
+          <a:bodyPr wrap="square" lIns="0" rIns="0" tIns="0" bIns="0" anchor="t">
+            <a:spAutoFit/>
+          </a:bodyPr>
+          <a:lstStyle/>
+          <a:p>
+            <a:pPr algn="l">
+              <a:lnSpc>
+                <a:spcPct val="140000"/>
+              </a:lnSpc>
+            </a:pPr>
+            <a:r>
+              <a:rPr sz="1900" b="0" i="0">
+                <a:solidFill>
+                  <a:srgbClr val="3A3D40"/>
+                </a:solidFill>
+                <a:latin typeface="Verdana"/>
+              </a:rPr>
+              <a:t>voisine</a:t>
+            </a:r>
+          </a:p>
+        </p:txBody>
+      </p:sp>
+      <p:sp>
+        <p:nvSpPr>
+          <p:cNvPr id="12" name="Rounded Rectangle 11"/>
+          <p:cNvSpPr/>
+          <p:nvPr/>
+        </p:nvSpPr>
+        <p:spPr>
+          <a:xfrm>
+            <a:off x="6159855" y="2139696"/>
+            <a:ext cx="5464911" cy="648716"/>
+          </a:xfrm>
+          <a:prstGeom prst="roundRect">
+            <a:avLst>
+              <a:gd name="adj" fmla="val 22552"/>
+            </a:avLst>
+          </a:prstGeom>
+          <a:solidFill>
+            <a:srgbClr val="FFFFFF"/>
+          </a:solidFill>
+          <a:ln w="12700">
+            <a:solidFill>
+              <a:srgbClr val="EAEAE8"/>
+            </a:solidFill>
+          </a:ln>
+          <a:effectLst/>
+        </p:spPr>
+        <p:style>
+          <a:lnRef idx="1">
+            <a:schemeClr val="accent1"/>
+          </a:lnRef>
+          <a:fillRef idx="3">
+            <a:schemeClr val="accent1"/>
+          </a:fillRef>
+          <a:effectRef idx="2">
+            <a:schemeClr val="accent1"/>
+          </a:effectRef>
+          <a:fontRef idx="minor">
+            <a:schemeClr val="lt1"/>
+          </a:fontRef>
+        </p:style>
+        <p:txBody>
+          <a:bodyPr rtlCol="0" anchor="ctr"/>
+          <a:lstStyle/>
+          <a:p/>
+        </p:txBody>
+      </p:sp>
+      <p:sp>
+        <p:nvSpPr>
+          <p:cNvPr id="13" name="Rounded Rectangle 12"/>
+          <p:cNvSpPr/>
+          <p:nvPr/>
+        </p:nvSpPr>
+        <p:spPr>
+          <a:xfrm>
+            <a:off x="6434175" y="2281174"/>
+            <a:ext cx="365760" cy="365760"/>
+          </a:xfrm>
+          <a:prstGeom prst="roundRect">
+            <a:avLst>
+              <a:gd name="adj" fmla="val 32500"/>
+            </a:avLst>
+          </a:prstGeom>
+          <a:solidFill>
+            <a:srgbClr val="E3F1E7"/>
+          </a:solidFill>
+          <a:ln>
+            <a:noFill/>
+          </a:ln>
+          <a:effectLst/>
+        </p:spPr>
+        <p:style>
+          <a:lnRef idx="1">
+            <a:schemeClr val="accent1"/>
+          </a:lnRef>
+          <a:fillRef idx="3">
+            <a:schemeClr val="accent1"/>
+          </a:fillRef>
+          <a:effectRef idx="2">
+            <a:schemeClr val="accent1"/>
+          </a:effectRef>
+          <a:fontRef idx="minor">
+            <a:schemeClr val="lt1"/>
+          </a:fontRef>
+        </p:style>
+        <p:txBody>
+          <a:bodyPr rtlCol="0" anchor="ctr"/>
+          <a:lstStyle/>
+          <a:p/>
+        </p:txBody>
+      </p:sp>
+      <p:sp>
+        <p:nvSpPr>
+          <p:cNvPr id="14" name="TextBox 13"/>
+          <p:cNvSpPr txBox="1"/>
+          <p:nvPr/>
+        </p:nvSpPr>
+        <p:spPr>
+          <a:xfrm>
+            <a:off x="6434175" y="2345182"/>
+            <a:ext cx="365760" cy="256032"/>
+          </a:xfrm>
+          <a:prstGeom prst="rect">
+            <a:avLst/>
+          </a:prstGeom>
+          <a:noFill/>
+        </p:spPr>
+        <p:txBody>
+          <a:bodyPr wrap="square" lIns="0" rIns="0" tIns="0" bIns="0" anchor="t">
+            <a:spAutoFit/>
+          </a:bodyPr>
+          <a:lstStyle/>
+          <a:p>
+            <a:pPr algn="ctr">
+              <a:lnSpc>
+                <a:spcPct val="135000"/>
+              </a:lnSpc>
+            </a:pPr>
+            <a:r>
+              <a:rPr sz="1500" b="1" i="0">
+                <a:solidFill>
+                  <a:srgbClr val="166534"/>
+                </a:solidFill>
+                <a:latin typeface="Verdana"/>
+              </a:rPr>
+              <a:t>2</a:t>
+            </a:r>
+          </a:p>
+        </p:txBody>
+      </p:sp>
+      <p:sp>
+        <p:nvSpPr>
+          <p:cNvPr id="15" name="TextBox 14"/>
+          <p:cNvSpPr txBox="1"/>
+          <p:nvPr/>
+        </p:nvSpPr>
+        <p:spPr>
+          <a:xfrm>
+            <a:off x="6937095" y="2295144"/>
+            <a:ext cx="4504791" cy="374396"/>
+          </a:xfrm>
+          <a:prstGeom prst="rect">
+            <a:avLst/>
+          </a:prstGeom>
+          <a:noFill/>
+        </p:spPr>
+        <p:txBody>
+          <a:bodyPr wrap="square" lIns="0" rIns="0" tIns="0" bIns="0" anchor="t">
+            <a:spAutoFit/>
+          </a:bodyPr>
+          <a:lstStyle/>
+          <a:p>
+            <a:pPr algn="l">
+              <a:lnSpc>
+                <a:spcPct val="140000"/>
+              </a:lnSpc>
+            </a:pPr>
+            <a:r>
+              <a:rPr sz="1900" b="0" i="0">
+                <a:solidFill>
+                  <a:srgbClr val="3A3D40"/>
+                </a:solidFill>
+                <a:latin typeface="Verdana"/>
+              </a:rPr>
+              <a:t>succès</a:t>
+            </a:r>
+          </a:p>
+        </p:txBody>
+      </p:sp>
+      <p:sp>
+        <p:nvSpPr>
+          <p:cNvPr id="16" name="Rounded Rectangle 15"/>
+          <p:cNvSpPr/>
+          <p:nvPr/>
+        </p:nvSpPr>
+        <p:spPr>
+          <a:xfrm>
+            <a:off x="566928" y="2916428"/>
+            <a:ext cx="5464911" cy="648716"/>
+          </a:xfrm>
+          <a:prstGeom prst="roundRect">
+            <a:avLst>
+              <a:gd name="adj" fmla="val 22552"/>
+            </a:avLst>
+          </a:prstGeom>
+          <a:solidFill>
+            <a:srgbClr val="FFFFFF"/>
+          </a:solidFill>
+          <a:ln w="12700">
+            <a:solidFill>
+              <a:srgbClr val="EAEAE8"/>
+            </a:solidFill>
+          </a:ln>
+          <a:effectLst/>
+        </p:spPr>
+        <p:style>
+          <a:lnRef idx="1">
+            <a:schemeClr val="accent1"/>
+          </a:lnRef>
+          <a:fillRef idx="3">
+            <a:schemeClr val="accent1"/>
+          </a:fillRef>
+          <a:effectRef idx="2">
+            <a:schemeClr val="accent1"/>
+          </a:effectRef>
+          <a:fontRef idx="minor">
+            <a:schemeClr val="lt1"/>
+          </a:fontRef>
+        </p:style>
+        <p:txBody>
+          <a:bodyPr rtlCol="0" anchor="ctr"/>
+          <a:lstStyle/>
+          <a:p/>
+        </p:txBody>
+      </p:sp>
+      <p:sp>
+        <p:nvSpPr>
+          <p:cNvPr id="17" name="Rounded Rectangle 16"/>
+          <p:cNvSpPr/>
+          <p:nvPr/>
+        </p:nvSpPr>
+        <p:spPr>
+          <a:xfrm>
+            <a:off x="841247" y="3057905"/>
+            <a:ext cx="365760" cy="365760"/>
+          </a:xfrm>
+          <a:prstGeom prst="roundRect">
+            <a:avLst>
+              <a:gd name="adj" fmla="val 32500"/>
+            </a:avLst>
+          </a:prstGeom>
+          <a:solidFill>
+            <a:srgbClr val="E3F1E7"/>
+          </a:solidFill>
+          <a:ln>
+            <a:noFill/>
+          </a:ln>
+          <a:effectLst/>
+        </p:spPr>
+        <p:style>
+          <a:lnRef idx="1">
+            <a:schemeClr val="accent1"/>
+          </a:lnRef>
+          <a:fillRef idx="3">
+            <a:schemeClr val="accent1"/>
+          </a:fillRef>
+          <a:effectRef idx="2">
+            <a:schemeClr val="accent1"/>
+          </a:effectRef>
+          <a:fontRef idx="minor">
+            <a:schemeClr val="lt1"/>
+          </a:fontRef>
+        </p:style>
+        <p:txBody>
+          <a:bodyPr rtlCol="0" anchor="ctr"/>
+          <a:lstStyle/>
+          <a:p/>
+        </p:txBody>
+      </p:sp>
+      <p:sp>
+        <p:nvSpPr>
+          <p:cNvPr id="18" name="TextBox 17"/>
+          <p:cNvSpPr txBox="1"/>
+          <p:nvPr/>
+        </p:nvSpPr>
+        <p:spPr>
+          <a:xfrm>
+            <a:off x="841247" y="3121913"/>
+            <a:ext cx="365760" cy="256032"/>
+          </a:xfrm>
+          <a:prstGeom prst="rect">
+            <a:avLst/>
+          </a:prstGeom>
+          <a:noFill/>
+        </p:spPr>
+        <p:txBody>
+          <a:bodyPr wrap="square" lIns="0" rIns="0" tIns="0" bIns="0" anchor="t">
+            <a:spAutoFit/>
+          </a:bodyPr>
+          <a:lstStyle/>
+          <a:p>
+            <a:pPr algn="ctr">
+              <a:lnSpc>
+                <a:spcPct val="135000"/>
+              </a:lnSpc>
+            </a:pPr>
+            <a:r>
+              <a:rPr sz="1500" b="1" i="0">
+                <a:solidFill>
+                  <a:srgbClr val="166534"/>
+                </a:solidFill>
+                <a:latin typeface="Verdana"/>
+              </a:rPr>
+              <a:t>3</a:t>
+            </a:r>
+          </a:p>
+        </p:txBody>
+      </p:sp>
+      <p:sp>
+        <p:nvSpPr>
+          <p:cNvPr id="19" name="TextBox 18"/>
+          <p:cNvSpPr txBox="1"/>
+          <p:nvPr/>
+        </p:nvSpPr>
+        <p:spPr>
+          <a:xfrm>
+            <a:off x="1344168" y="3071876"/>
+            <a:ext cx="4504791" cy="374396"/>
+          </a:xfrm>
+          <a:prstGeom prst="rect">
+            <a:avLst/>
+          </a:prstGeom>
+          <a:noFill/>
+        </p:spPr>
+        <p:txBody>
+          <a:bodyPr wrap="square" lIns="0" rIns="0" tIns="0" bIns="0" anchor="t">
+            <a:spAutoFit/>
+          </a:bodyPr>
+          <a:lstStyle/>
+          <a:p>
+            <a:pPr algn="l">
+              <a:lnSpc>
+                <a:spcPct val="140000"/>
+              </a:lnSpc>
+            </a:pPr>
+            <a:r>
+              <a:rPr sz="1900" b="0" i="0">
+                <a:solidFill>
+                  <a:srgbClr val="3A3D40"/>
+                </a:solidFill>
+                <a:latin typeface="Verdana"/>
+              </a:rPr>
+              <a:t>organisée</a:t>
+            </a:r>
+          </a:p>
+        </p:txBody>
+      </p:sp>
+      <p:sp>
+        <p:nvSpPr>
+          <p:cNvPr id="20" name="Rounded Rectangle 19"/>
+          <p:cNvSpPr/>
+          <p:nvPr/>
+        </p:nvSpPr>
+        <p:spPr>
+          <a:xfrm>
+            <a:off x="6159855" y="2916428"/>
+            <a:ext cx="5464911" cy="648716"/>
+          </a:xfrm>
+          <a:prstGeom prst="roundRect">
+            <a:avLst>
+              <a:gd name="adj" fmla="val 22552"/>
+            </a:avLst>
+          </a:prstGeom>
+          <a:solidFill>
+            <a:srgbClr val="FFFFFF"/>
+          </a:solidFill>
+          <a:ln w="12700">
+            <a:solidFill>
+              <a:srgbClr val="EAEAE8"/>
+            </a:solidFill>
+          </a:ln>
+          <a:effectLst/>
+        </p:spPr>
+        <p:style>
+          <a:lnRef idx="1">
+            <a:schemeClr val="accent1"/>
+          </a:lnRef>
+          <a:fillRef idx="3">
+            <a:schemeClr val="accent1"/>
+          </a:fillRef>
+          <a:effectRef idx="2">
+            <a:schemeClr val="accent1"/>
+          </a:effectRef>
+          <a:fontRef idx="minor">
+            <a:schemeClr val="lt1"/>
+          </a:fontRef>
+        </p:style>
+        <p:txBody>
+          <a:bodyPr rtlCol="0" anchor="ctr"/>
+          <a:lstStyle/>
+          <a:p/>
+        </p:txBody>
+      </p:sp>
+      <p:sp>
+        <p:nvSpPr>
+          <p:cNvPr id="21" name="Rounded Rectangle 20"/>
+          <p:cNvSpPr/>
+          <p:nvPr/>
+        </p:nvSpPr>
+        <p:spPr>
+          <a:xfrm>
+            <a:off x="6434175" y="3057905"/>
+            <a:ext cx="365760" cy="365760"/>
+          </a:xfrm>
+          <a:prstGeom prst="roundRect">
+            <a:avLst>
+              <a:gd name="adj" fmla="val 32500"/>
+            </a:avLst>
+          </a:prstGeom>
+          <a:solidFill>
+            <a:srgbClr val="E3F1E7"/>
+          </a:solidFill>
+          <a:ln>
+            <a:noFill/>
+          </a:ln>
+          <a:effectLst/>
+        </p:spPr>
+        <p:style>
+          <a:lnRef idx="1">
+            <a:schemeClr val="accent1"/>
+          </a:lnRef>
+          <a:fillRef idx="3">
+            <a:schemeClr val="accent1"/>
+          </a:fillRef>
+          <a:effectRef idx="2">
+            <a:schemeClr val="accent1"/>
+          </a:effectRef>
+          <a:fontRef idx="minor">
+            <a:schemeClr val="lt1"/>
+          </a:fontRef>
+        </p:style>
+        <p:txBody>
+          <a:bodyPr rtlCol="0" anchor="ctr"/>
+          <a:lstStyle/>
+          <a:p/>
+        </p:txBody>
+      </p:sp>
+      <p:sp>
+        <p:nvSpPr>
+          <p:cNvPr id="22" name="TextBox 21"/>
+          <p:cNvSpPr txBox="1"/>
+          <p:nvPr/>
+        </p:nvSpPr>
+        <p:spPr>
+          <a:xfrm>
+            <a:off x="6434175" y="3121913"/>
+            <a:ext cx="365760" cy="256032"/>
+          </a:xfrm>
+          <a:prstGeom prst="rect">
+            <a:avLst/>
+          </a:prstGeom>
+          <a:noFill/>
+        </p:spPr>
+        <p:txBody>
+          <a:bodyPr wrap="square" lIns="0" rIns="0" tIns="0" bIns="0" anchor="t">
+            <a:spAutoFit/>
+          </a:bodyPr>
+          <a:lstStyle/>
+          <a:p>
+            <a:pPr algn="ctr">
+              <a:lnSpc>
+                <a:spcPct val="135000"/>
+              </a:lnSpc>
+            </a:pPr>
+            <a:r>
+              <a:rPr sz="1500" b="1" i="0">
+                <a:solidFill>
+                  <a:srgbClr val="166534"/>
+                </a:solidFill>
+                <a:latin typeface="Verdana"/>
+              </a:rPr>
+              <a:t>4</a:t>
+            </a:r>
+          </a:p>
+        </p:txBody>
+      </p:sp>
+      <p:sp>
+        <p:nvSpPr>
+          <p:cNvPr id="23" name="TextBox 22"/>
+          <p:cNvSpPr txBox="1"/>
+          <p:nvPr/>
+        </p:nvSpPr>
+        <p:spPr>
+          <a:xfrm>
+            <a:off x="6937095" y="3071876"/>
+            <a:ext cx="4504791" cy="374396"/>
+          </a:xfrm>
+          <a:prstGeom prst="rect">
+            <a:avLst/>
+          </a:prstGeom>
+          <a:noFill/>
+        </p:spPr>
+        <p:txBody>
+          <a:bodyPr wrap="square" lIns="0" rIns="0" tIns="0" bIns="0" anchor="t">
+            <a:spAutoFit/>
+          </a:bodyPr>
+          <a:lstStyle/>
+          <a:p>
+            <a:pPr algn="l">
+              <a:lnSpc>
+                <a:spcPct val="140000"/>
+              </a:lnSpc>
+            </a:pPr>
+            <a:r>
+              <a:rPr sz="1900" b="0" i="0">
+                <a:solidFill>
+                  <a:srgbClr val="3A3D40"/>
+                </a:solidFill>
+                <a:latin typeface="Verdana"/>
+              </a:rPr>
+              <a:t>amassé</a:t>
+            </a:r>
+          </a:p>
+        </p:txBody>
+      </p:sp>
+      <p:sp>
+        <p:nvSpPr>
+          <p:cNvPr id="24" name="Rounded Rectangle 23"/>
+          <p:cNvSpPr/>
+          <p:nvPr/>
+        </p:nvSpPr>
+        <p:spPr>
+          <a:xfrm>
+            <a:off x="566928" y="3693160"/>
+            <a:ext cx="5464911" cy="648716"/>
+          </a:xfrm>
+          <a:prstGeom prst="roundRect">
+            <a:avLst>
+              <a:gd name="adj" fmla="val 22552"/>
+            </a:avLst>
+          </a:prstGeom>
+          <a:solidFill>
+            <a:srgbClr val="FFFFFF"/>
+          </a:solidFill>
+          <a:ln w="12700">
+            <a:solidFill>
+              <a:srgbClr val="EAEAE8"/>
+            </a:solidFill>
+          </a:ln>
+          <a:effectLst/>
+        </p:spPr>
+        <p:style>
+          <a:lnRef idx="1">
+            <a:schemeClr val="accent1"/>
+          </a:lnRef>
+          <a:fillRef idx="3">
+            <a:schemeClr val="accent1"/>
+          </a:fillRef>
+          <a:effectRef idx="2">
+            <a:schemeClr val="accent1"/>
+          </a:effectRef>
+          <a:fontRef idx="minor">
+            <a:schemeClr val="lt1"/>
+          </a:fontRef>
+        </p:style>
+        <p:txBody>
+          <a:bodyPr rtlCol="0" anchor="ctr"/>
+          <a:lstStyle/>
+          <a:p/>
+        </p:txBody>
+      </p:sp>
+      <p:sp>
+        <p:nvSpPr>
+          <p:cNvPr id="25" name="Rounded Rectangle 24"/>
+          <p:cNvSpPr/>
+          <p:nvPr/>
+        </p:nvSpPr>
+        <p:spPr>
+          <a:xfrm>
+            <a:off x="841247" y="3834638"/>
+            <a:ext cx="365760" cy="365760"/>
+          </a:xfrm>
+          <a:prstGeom prst="roundRect">
+            <a:avLst>
+              <a:gd name="adj" fmla="val 32500"/>
+            </a:avLst>
+          </a:prstGeom>
+          <a:solidFill>
+            <a:srgbClr val="E3F1E7"/>
+          </a:solidFill>
+          <a:ln>
+            <a:noFill/>
+          </a:ln>
+          <a:effectLst/>
+        </p:spPr>
+        <p:style>
+          <a:lnRef idx="1">
+            <a:schemeClr val="accent1"/>
+          </a:lnRef>
+          <a:fillRef idx="3">
+            <a:schemeClr val="accent1"/>
+          </a:fillRef>
+          <a:effectRef idx="2">
+            <a:schemeClr val="accent1"/>
+          </a:effectRef>
+          <a:fontRef idx="minor">
+            <a:schemeClr val="lt1"/>
+          </a:fontRef>
+        </p:style>
+        <p:txBody>
+          <a:bodyPr rtlCol="0" anchor="ctr"/>
+          <a:lstStyle/>
+          <a:p/>
+        </p:txBody>
+      </p:sp>
+      <p:sp>
+        <p:nvSpPr>
+          <p:cNvPr id="26" name="TextBox 25"/>
+          <p:cNvSpPr txBox="1"/>
+          <p:nvPr/>
+        </p:nvSpPr>
+        <p:spPr>
+          <a:xfrm>
+            <a:off x="841247" y="3898646"/>
+            <a:ext cx="365760" cy="256032"/>
+          </a:xfrm>
+          <a:prstGeom prst="rect">
+            <a:avLst/>
+          </a:prstGeom>
+          <a:noFill/>
+        </p:spPr>
+        <p:txBody>
+          <a:bodyPr wrap="square" lIns="0" rIns="0" tIns="0" bIns="0" anchor="t">
+            <a:spAutoFit/>
+          </a:bodyPr>
+          <a:lstStyle/>
+          <a:p>
+            <a:pPr algn="ctr">
+              <a:lnSpc>
+                <a:spcPct val="135000"/>
+              </a:lnSpc>
+            </a:pPr>
+            <a:r>
+              <a:rPr sz="1500" b="1" i="0">
+                <a:solidFill>
+                  <a:srgbClr val="166534"/>
+                </a:solidFill>
+                <a:latin typeface="Verdana"/>
+              </a:rPr>
+              <a:t>5</a:t>
+            </a:r>
+          </a:p>
+        </p:txBody>
+      </p:sp>
+      <p:sp>
+        <p:nvSpPr>
+          <p:cNvPr id="27" name="TextBox 26"/>
+          <p:cNvSpPr txBox="1"/>
+          <p:nvPr/>
+        </p:nvSpPr>
+        <p:spPr>
+          <a:xfrm>
+            <a:off x="1344168" y="3848608"/>
+            <a:ext cx="4504791" cy="374396"/>
+          </a:xfrm>
+          <a:prstGeom prst="rect">
+            <a:avLst/>
+          </a:prstGeom>
+          <a:noFill/>
+        </p:spPr>
+        <p:txBody>
+          <a:bodyPr wrap="square" lIns="0" rIns="0" tIns="0" bIns="0" anchor="t">
+            <a:spAutoFit/>
+          </a:bodyPr>
+          <a:lstStyle/>
+          <a:p>
+            <a:pPr algn="l">
+              <a:lnSpc>
+                <a:spcPct val="140000"/>
+              </a:lnSpc>
+            </a:pPr>
+            <a:r>
+              <a:rPr sz="1900" b="0" i="0">
+                <a:solidFill>
+                  <a:srgbClr val="3A3D40"/>
+                </a:solidFill>
+                <a:latin typeface="Verdana"/>
+              </a:rPr>
+              <a:t>organisme</a:t>
+            </a:r>
+          </a:p>
+        </p:txBody>
+      </p:sp>
+      <p:sp>
+        <p:nvSpPr>
+          <p:cNvPr id="28" name="Rounded Rectangle 27"/>
+          <p:cNvSpPr/>
+          <p:nvPr/>
+        </p:nvSpPr>
+        <p:spPr>
+          <a:xfrm>
+            <a:off x="6159855" y="3693160"/>
+            <a:ext cx="5464911" cy="648716"/>
+          </a:xfrm>
+          <a:prstGeom prst="roundRect">
+            <a:avLst>
+              <a:gd name="adj" fmla="val 22552"/>
+            </a:avLst>
+          </a:prstGeom>
+          <a:solidFill>
+            <a:srgbClr val="FFFFFF"/>
+          </a:solidFill>
+          <a:ln w="12700">
+            <a:solidFill>
+              <a:srgbClr val="EAEAE8"/>
+            </a:solidFill>
+          </a:ln>
+          <a:effectLst/>
+        </p:spPr>
+        <p:style>
+          <a:lnRef idx="1">
+            <a:schemeClr val="accent1"/>
+          </a:lnRef>
+          <a:fillRef idx="3">
+            <a:schemeClr val="accent1"/>
+          </a:fillRef>
+          <a:effectRef idx="2">
+            <a:schemeClr val="accent1"/>
+          </a:effectRef>
+          <a:fontRef idx="minor">
+            <a:schemeClr val="lt1"/>
+          </a:fontRef>
+        </p:style>
+        <p:txBody>
+          <a:bodyPr rtlCol="0" anchor="ctr"/>
+          <a:lstStyle/>
+          <a:p/>
+        </p:txBody>
+      </p:sp>
+      <p:sp>
+        <p:nvSpPr>
+          <p:cNvPr id="29" name="Rounded Rectangle 28"/>
+          <p:cNvSpPr/>
+          <p:nvPr/>
+        </p:nvSpPr>
+        <p:spPr>
+          <a:xfrm>
+            <a:off x="6434175" y="3834638"/>
+            <a:ext cx="365760" cy="365760"/>
+          </a:xfrm>
+          <a:prstGeom prst="roundRect">
+            <a:avLst>
+              <a:gd name="adj" fmla="val 32500"/>
+            </a:avLst>
+          </a:prstGeom>
+          <a:solidFill>
+            <a:srgbClr val="E3F1E7"/>
+          </a:solidFill>
+          <a:ln>
+            <a:noFill/>
+          </a:ln>
+          <a:effectLst/>
+        </p:spPr>
+        <p:style>
+          <a:lnRef idx="1">
+            <a:schemeClr val="accent1"/>
+          </a:lnRef>
+          <a:fillRef idx="3">
+            <a:schemeClr val="accent1"/>
+          </a:fillRef>
+          <a:effectRef idx="2">
+            <a:schemeClr val="accent1"/>
+          </a:effectRef>
+          <a:fontRef idx="minor">
+            <a:schemeClr val="lt1"/>
+          </a:fontRef>
+        </p:style>
+        <p:txBody>
+          <a:bodyPr rtlCol="0" anchor="ctr"/>
+          <a:lstStyle/>
+          <a:p/>
+        </p:txBody>
+      </p:sp>
+      <p:sp>
+        <p:nvSpPr>
+          <p:cNvPr id="30" name="TextBox 29"/>
+          <p:cNvSpPr txBox="1"/>
+          <p:nvPr/>
+        </p:nvSpPr>
+        <p:spPr>
+          <a:xfrm>
+            <a:off x="6434175" y="3898646"/>
+            <a:ext cx="365760" cy="256032"/>
+          </a:xfrm>
+          <a:prstGeom prst="rect">
+            <a:avLst/>
+          </a:prstGeom>
+          <a:noFill/>
+        </p:spPr>
+        <p:txBody>
+          <a:bodyPr wrap="square" lIns="0" rIns="0" tIns="0" bIns="0" anchor="t">
+            <a:spAutoFit/>
+          </a:bodyPr>
+          <a:lstStyle/>
+          <a:p>
+            <a:pPr algn="ctr">
+              <a:lnSpc>
+                <a:spcPct val="135000"/>
+              </a:lnSpc>
+            </a:pPr>
+            <a:r>
+              <a:rPr sz="1500" b="1" i="0">
+                <a:solidFill>
+                  <a:srgbClr val="166534"/>
+                </a:solidFill>
+                <a:latin typeface="Verdana"/>
+              </a:rPr>
+              <a:t>6</a:t>
+            </a:r>
+          </a:p>
+        </p:txBody>
+      </p:sp>
+      <p:sp>
+        <p:nvSpPr>
+          <p:cNvPr id="31" name="TextBox 30"/>
+          <p:cNvSpPr txBox="1"/>
+          <p:nvPr/>
+        </p:nvSpPr>
+        <p:spPr>
+          <a:xfrm>
+            <a:off x="6937095" y="3848608"/>
+            <a:ext cx="4504791" cy="374396"/>
+          </a:xfrm>
+          <a:prstGeom prst="rect">
+            <a:avLst/>
+          </a:prstGeom>
+          <a:noFill/>
+        </p:spPr>
+        <p:txBody>
+          <a:bodyPr wrap="square" lIns="0" rIns="0" tIns="0" bIns="0" anchor="t">
+            <a:spAutoFit/>
+          </a:bodyPr>
+          <a:lstStyle/>
+          <a:p>
+            <a:pPr algn="l">
+              <a:lnSpc>
+                <a:spcPct val="140000"/>
+              </a:lnSpc>
+            </a:pPr>
+            <a:r>
+              <a:rPr sz="1900" b="0" i="0">
+                <a:solidFill>
+                  <a:srgbClr val="3A3D40"/>
+                </a:solidFill>
+                <a:latin typeface="Verdana"/>
+              </a:rPr>
+              <a:t>cents</a:t>
+            </a:r>
+          </a:p>
+        </p:txBody>
+      </p:sp>
+      <p:sp>
+        <p:nvSpPr>
+          <p:cNvPr id="32" name="Rounded Rectangle 31"/>
+          <p:cNvSpPr/>
+          <p:nvPr/>
+        </p:nvSpPr>
+        <p:spPr>
+          <a:xfrm>
+            <a:off x="566928" y="4469892"/>
+            <a:ext cx="5464911" cy="648716"/>
+          </a:xfrm>
+          <a:prstGeom prst="roundRect">
+            <a:avLst>
+              <a:gd name="adj" fmla="val 22552"/>
+            </a:avLst>
+          </a:prstGeom>
+          <a:solidFill>
+            <a:srgbClr val="FFFFFF"/>
+          </a:solidFill>
+          <a:ln w="12700">
+            <a:solidFill>
+              <a:srgbClr val="EAEAE8"/>
+            </a:solidFill>
+          </a:ln>
+          <a:effectLst/>
+        </p:spPr>
+        <p:style>
+          <a:lnRef idx="1">
+            <a:schemeClr val="accent1"/>
+          </a:lnRef>
+          <a:fillRef idx="3">
+            <a:schemeClr val="accent1"/>
+          </a:fillRef>
+          <a:effectRef idx="2">
+            <a:schemeClr val="accent1"/>
+          </a:effectRef>
+          <a:fontRef idx="minor">
+            <a:schemeClr val="lt1"/>
+          </a:fontRef>
+        </p:style>
+        <p:txBody>
+          <a:bodyPr rtlCol="0" anchor="ctr"/>
+          <a:lstStyle/>
+          <a:p/>
+        </p:txBody>
+      </p:sp>
+      <p:sp>
+        <p:nvSpPr>
+          <p:cNvPr id="33" name="Rounded Rectangle 32"/>
+          <p:cNvSpPr/>
+          <p:nvPr/>
+        </p:nvSpPr>
+        <p:spPr>
+          <a:xfrm>
+            <a:off x="841247" y="4611370"/>
+            <a:ext cx="365760" cy="365760"/>
+          </a:xfrm>
+          <a:prstGeom prst="roundRect">
+            <a:avLst>
+              <a:gd name="adj" fmla="val 32500"/>
+            </a:avLst>
+          </a:prstGeom>
+          <a:solidFill>
+            <a:srgbClr val="E3F1E7"/>
+          </a:solidFill>
+          <a:ln>
+            <a:noFill/>
+          </a:ln>
+          <a:effectLst/>
+        </p:spPr>
+        <p:style>
+          <a:lnRef idx="1">
+            <a:schemeClr val="accent1"/>
+          </a:lnRef>
+          <a:fillRef idx="3">
+            <a:schemeClr val="accent1"/>
+          </a:fillRef>
+          <a:effectRef idx="2">
+            <a:schemeClr val="accent1"/>
+          </a:effectRef>
+          <a:fontRef idx="minor">
+            <a:schemeClr val="lt1"/>
+          </a:fontRef>
+        </p:style>
+        <p:txBody>
+          <a:bodyPr rtlCol="0" anchor="ctr"/>
+          <a:lstStyle/>
+          <a:p/>
+        </p:txBody>
+      </p:sp>
+      <p:sp>
+        <p:nvSpPr>
+          <p:cNvPr id="34" name="TextBox 33"/>
+          <p:cNvSpPr txBox="1"/>
+          <p:nvPr/>
+        </p:nvSpPr>
+        <p:spPr>
+          <a:xfrm>
+            <a:off x="841247" y="4675378"/>
+            <a:ext cx="365760" cy="256032"/>
+          </a:xfrm>
+          <a:prstGeom prst="rect">
+            <a:avLst/>
+          </a:prstGeom>
+          <a:noFill/>
+        </p:spPr>
+        <p:txBody>
+          <a:bodyPr wrap="square" lIns="0" rIns="0" tIns="0" bIns="0" anchor="t">
+            <a:spAutoFit/>
+          </a:bodyPr>
+          <a:lstStyle/>
+          <a:p>
+            <a:pPr algn="ctr">
+              <a:lnSpc>
+                <a:spcPct val="135000"/>
+              </a:lnSpc>
+            </a:pPr>
+            <a:r>
+              <a:rPr sz="1500" b="1" i="0">
+                <a:solidFill>
+                  <a:srgbClr val="166534"/>
+                </a:solidFill>
+                <a:latin typeface="Verdana"/>
+              </a:rPr>
+              <a:t>7</a:t>
+            </a:r>
+          </a:p>
+        </p:txBody>
+      </p:sp>
+      <p:sp>
+        <p:nvSpPr>
+          <p:cNvPr id="35" name="TextBox 34"/>
+          <p:cNvSpPr txBox="1"/>
+          <p:nvPr/>
+        </p:nvSpPr>
+        <p:spPr>
+          <a:xfrm>
+            <a:off x="1344168" y="4625340"/>
+            <a:ext cx="4504791" cy="374396"/>
+          </a:xfrm>
+          <a:prstGeom prst="rect">
+            <a:avLst/>
+          </a:prstGeom>
+          <a:noFill/>
+        </p:spPr>
+        <p:txBody>
+          <a:bodyPr wrap="square" lIns="0" rIns="0" tIns="0" bIns="0" anchor="t">
+            <a:spAutoFit/>
+          </a:bodyPr>
+          <a:lstStyle/>
+          <a:p>
+            <a:pPr algn="l">
+              <a:lnSpc>
+                <a:spcPct val="140000"/>
+              </a:lnSpc>
+            </a:pPr>
+            <a:r>
+              <a:rPr sz="1900" b="0" i="0">
+                <a:solidFill>
+                  <a:srgbClr val="3A3D40"/>
+                </a:solidFill>
+                <a:latin typeface="Verdana"/>
+              </a:rPr>
+              <a:t>visite</a:t>
+            </a:r>
+          </a:p>
+        </p:txBody>
+      </p:sp>
+      <p:sp>
+        <p:nvSpPr>
+          <p:cNvPr id="36" name="Rounded Rectangle 35"/>
+          <p:cNvSpPr/>
+          <p:nvPr/>
+        </p:nvSpPr>
+        <p:spPr>
+          <a:xfrm>
+            <a:off x="6159855" y="4469892"/>
+            <a:ext cx="5464911" cy="648716"/>
+          </a:xfrm>
+          <a:prstGeom prst="roundRect">
+            <a:avLst>
+              <a:gd name="adj" fmla="val 22552"/>
+            </a:avLst>
+          </a:prstGeom>
+          <a:solidFill>
+            <a:srgbClr val="FFFFFF"/>
+          </a:solidFill>
+          <a:ln w="12700">
+            <a:solidFill>
+              <a:srgbClr val="EAEAE8"/>
+            </a:solidFill>
+          </a:ln>
+          <a:effectLst/>
+        </p:spPr>
+        <p:style>
+          <a:lnRef idx="1">
+            <a:schemeClr val="accent1"/>
+          </a:lnRef>
+          <a:fillRef idx="3">
+            <a:schemeClr val="accent1"/>
+          </a:fillRef>
+          <a:effectRef idx="2">
+            <a:schemeClr val="accent1"/>
+          </a:effectRef>
+          <a:fontRef idx="minor">
+            <a:schemeClr val="lt1"/>
+          </a:fontRef>
+        </p:style>
+        <p:txBody>
+          <a:bodyPr rtlCol="0" anchor="ctr"/>
+          <a:lstStyle/>
+          <a:p/>
+        </p:txBody>
+      </p:sp>
+      <p:sp>
+        <p:nvSpPr>
+          <p:cNvPr id="37" name="Rounded Rectangle 36"/>
+          <p:cNvSpPr/>
+          <p:nvPr/>
+        </p:nvSpPr>
+        <p:spPr>
+          <a:xfrm>
+            <a:off x="6434175" y="4611370"/>
+            <a:ext cx="365760" cy="365760"/>
+          </a:xfrm>
+          <a:prstGeom prst="roundRect">
+            <a:avLst>
+              <a:gd name="adj" fmla="val 32500"/>
+            </a:avLst>
+          </a:prstGeom>
+          <a:solidFill>
+            <a:srgbClr val="E3F1E7"/>
+          </a:solidFill>
+          <a:ln>
+            <a:noFill/>
+          </a:ln>
+          <a:effectLst/>
+        </p:spPr>
+        <p:style>
+          <a:lnRef idx="1">
+            <a:schemeClr val="accent1"/>
+          </a:lnRef>
+          <a:fillRef idx="3">
+            <a:schemeClr val="accent1"/>
+          </a:fillRef>
+          <a:effectRef idx="2">
+            <a:schemeClr val="accent1"/>
+          </a:effectRef>
+          <a:fontRef idx="minor">
+            <a:schemeClr val="lt1"/>
+          </a:fontRef>
+        </p:style>
+        <p:txBody>
+          <a:bodyPr rtlCol="0" anchor="ctr"/>
+          <a:lstStyle/>
+          <a:p/>
+        </p:txBody>
+      </p:sp>
+      <p:sp>
+        <p:nvSpPr>
+          <p:cNvPr id="38" name="TextBox 37"/>
+          <p:cNvSpPr txBox="1"/>
+          <p:nvPr/>
+        </p:nvSpPr>
+        <p:spPr>
+          <a:xfrm>
+            <a:off x="6434175" y="4675378"/>
+            <a:ext cx="365760" cy="256032"/>
+          </a:xfrm>
+          <a:prstGeom prst="rect">
+            <a:avLst/>
+          </a:prstGeom>
+          <a:noFill/>
+        </p:spPr>
+        <p:txBody>
+          <a:bodyPr wrap="square" lIns="0" rIns="0" tIns="0" bIns="0" anchor="t">
+            <a:spAutoFit/>
+          </a:bodyPr>
+          <a:lstStyle/>
+          <a:p>
+            <a:pPr algn="ctr">
+              <a:lnSpc>
+                <a:spcPct val="135000"/>
+              </a:lnSpc>
+            </a:pPr>
+            <a:r>
+              <a:rPr sz="1500" b="1" i="0">
+                <a:solidFill>
+                  <a:srgbClr val="166534"/>
+                </a:solidFill>
+                <a:latin typeface="Verdana"/>
+              </a:rPr>
+              <a:t>8</a:t>
+            </a:r>
+          </a:p>
+        </p:txBody>
+      </p:sp>
+      <p:sp>
+        <p:nvSpPr>
+          <p:cNvPr id="39" name="TextBox 38"/>
+          <p:cNvSpPr txBox="1"/>
+          <p:nvPr/>
+        </p:nvSpPr>
+        <p:spPr>
+          <a:xfrm>
+            <a:off x="6937095" y="4625340"/>
+            <a:ext cx="4504791" cy="374396"/>
+          </a:xfrm>
+          <a:prstGeom prst="rect">
+            <a:avLst/>
+          </a:prstGeom>
+          <a:noFill/>
+        </p:spPr>
+        <p:txBody>
+          <a:bodyPr wrap="square" lIns="0" rIns="0" tIns="0" bIns="0" anchor="t">
+            <a:spAutoFit/>
+          </a:bodyPr>
+          <a:lstStyle/>
+          <a:p>
+            <a:pPr algn="l">
+              <a:lnSpc>
+                <a:spcPct val="140000"/>
+              </a:lnSpc>
+            </a:pPr>
+            <a:r>
+              <a:rPr sz="1900" b="0" i="0">
+                <a:solidFill>
+                  <a:srgbClr val="3A3D40"/>
+                </a:solidFill>
+                <a:latin typeface="Verdana"/>
+              </a:rPr>
+              <a:t>personne</a:t>
+            </a:r>
+          </a:p>
+        </p:txBody>
+      </p:sp>
+    </p:spTree>
+  </p:cSld>
+  <p:clrMapOvr>
+    <a:masterClrMapping/>
+  </p:clrMapOvr>
+</p:sld>
+</file>
+
+<file path=ppt/slides/slide19.xml><?xml version="1.0" encoding="utf-8"?>
+<p:sld xmlns:a="http://schemas.openxmlformats.org/drawingml/2006/main" xmlns:p="http://schemas.openxmlformats.org/presentationml/2006/main" xmlns:r="http://schemas.openxmlformats.org/officeDocument/2006/relationships">
+  <p:cSld>
+    <p:spTree>
+      <p:nvGrpSpPr>
+        <p:cNvPr id="1" name=""/>
+        <p:cNvGrpSpPr/>
+        <p:nvPr/>
+      </p:nvGrpSpPr>
+      <p:grpSpPr/>
+      <p:sp>
+        <p:nvSpPr>
+          <p:cNvPr id="2" name="Rectangle 1"/>
+          <p:cNvSpPr/>
+          <p:nvPr/>
+        </p:nvSpPr>
+        <p:spPr>
+          <a:xfrm>
+            <a:off x="0" y="0"/>
+            <a:ext cx="12191695" cy="6858000"/>
+          </a:xfrm>
+          <a:prstGeom prst="rect">
+            <a:avLst/>
+          </a:prstGeom>
+          <a:solidFill>
+            <a:srgbClr val="F7F7F5"/>
+          </a:solidFill>
+          <a:ln>
+            <a:noFill/>
+          </a:ln>
+          <a:effectLst/>
+        </p:spPr>
+        <p:style>
+          <a:lnRef idx="1">
+            <a:schemeClr val="accent1"/>
+          </a:lnRef>
+          <a:fillRef idx="3">
+            <a:schemeClr val="accent1"/>
+          </a:fillRef>
+          <a:effectRef idx="2">
+            <a:schemeClr val="accent1"/>
+          </a:effectRef>
+          <a:fontRef idx="minor">
+            <a:schemeClr val="lt1"/>
+          </a:fontRef>
+        </p:style>
+        <p:txBody>
+          <a:bodyPr rtlCol="0" anchor="ctr"/>
+          <a:lstStyle/>
+          <a:p/>
+        </p:txBody>
+      </p:sp>
+      <p:sp>
+        <p:nvSpPr>
+          <p:cNvPr id="3" name="TextBox 2"/>
+          <p:cNvSpPr txBox="1"/>
+          <p:nvPr/>
+        </p:nvSpPr>
+        <p:spPr>
+          <a:xfrm>
+            <a:off x="566928" y="6355080"/>
+            <a:ext cx="6400800" cy="219456"/>
+          </a:xfrm>
+          <a:prstGeom prst="rect">
+            <a:avLst/>
+          </a:prstGeom>
+          <a:noFill/>
+        </p:spPr>
+        <p:txBody>
+          <a:bodyPr wrap="square" lIns="0" rIns="0" tIns="0" bIns="0" anchor="t">
+            <a:spAutoFit/>
+          </a:bodyPr>
+          <a:lstStyle/>
+          <a:p>
+            <a:pPr algn="l">
+              <a:lnSpc>
+                <a:spcPct val="135000"/>
+              </a:lnSpc>
+            </a:pPr>
+            <a:r>
+              <a:rPr sz="1200" b="0" i="0">
+                <a:solidFill>
+                  <a:srgbClr val="6E7175"/>
+                </a:solidFill>
+                <a:latin typeface="Verdana"/>
+              </a:rPr>
+              <a:t>A2 · C'est l'heure des nouvelles</a:t>
+            </a:r>
+          </a:p>
+        </p:txBody>
+      </p:sp>
+      <p:sp>
+        <p:nvSpPr>
+          <p:cNvPr id="4" name="TextBox 3"/>
+          <p:cNvSpPr txBox="1"/>
+          <p:nvPr/>
+        </p:nvSpPr>
+        <p:spPr>
+          <a:xfrm>
+            <a:off x="10710367" y="6355080"/>
+            <a:ext cx="914400" cy="219456"/>
+          </a:xfrm>
+          <a:prstGeom prst="rect">
+            <a:avLst/>
+          </a:prstGeom>
+          <a:noFill/>
+        </p:spPr>
+        <p:txBody>
+          <a:bodyPr wrap="square" lIns="0" rIns="0" tIns="0" bIns="0" anchor="t">
+            <a:spAutoFit/>
+          </a:bodyPr>
+          <a:lstStyle/>
+          <a:p>
+            <a:pPr algn="r">
+              <a:lnSpc>
+                <a:spcPct val="135000"/>
+              </a:lnSpc>
+            </a:pPr>
+            <a:r>
+              <a:rPr sz="1200" b="0" i="0">
+                <a:solidFill>
+                  <a:srgbClr val="6E7175"/>
+                </a:solidFill>
+                <a:latin typeface="Verdana"/>
+              </a:rPr>
+              <a:t>19</a:t>
+            </a:r>
+          </a:p>
+        </p:txBody>
+      </p:sp>
+      <p:sp>
+        <p:nvSpPr>
+          <p:cNvPr id="5" name="TextBox 4"/>
+          <p:cNvSpPr txBox="1"/>
+          <p:nvPr/>
+        </p:nvSpPr>
+        <p:spPr>
+          <a:xfrm>
+            <a:off x="566928" y="420624"/>
+            <a:ext cx="11057839" cy="237744"/>
+          </a:xfrm>
+          <a:prstGeom prst="rect">
+            <a:avLst/>
+          </a:prstGeom>
+          <a:noFill/>
+        </p:spPr>
+        <p:txBody>
+          <a:bodyPr wrap="square" lIns="0" rIns="0" tIns="0" bIns="0" anchor="t">
+            <a:spAutoFit/>
+          </a:bodyPr>
+          <a:lstStyle/>
+          <a:p>
+            <a:pPr algn="l">
+              <a:lnSpc>
+                <a:spcPct val="135000"/>
+              </a:lnSpc>
+            </a:pPr>
+            <a:r>
+              <a:rPr sz="1300" b="1" i="0" spc="156">
+                <a:solidFill>
+                  <a:srgbClr val="166534"/>
+                </a:solidFill>
+                <a:latin typeface="Verdana"/>
+              </a:rPr>
+              <a:t>CORRECTION</a:t>
+            </a:r>
+          </a:p>
+        </p:txBody>
+      </p:sp>
+      <p:sp>
+        <p:nvSpPr>
+          <p:cNvPr id="6" name="TextBox 5"/>
+          <p:cNvSpPr txBox="1"/>
+          <p:nvPr/>
+        </p:nvSpPr>
+        <p:spPr>
+          <a:xfrm>
+            <a:off x="566928" y="749808"/>
+            <a:ext cx="11057839" cy="877824"/>
+          </a:xfrm>
+          <a:prstGeom prst="rect">
+            <a:avLst/>
+          </a:prstGeom>
+          <a:noFill/>
+        </p:spPr>
+        <p:txBody>
+          <a:bodyPr wrap="square" lIns="0" rIns="0" tIns="0" bIns="0" anchor="t">
+            <a:spAutoFit/>
+          </a:bodyPr>
+          <a:lstStyle/>
+          <a:p>
+            <a:pPr algn="l">
+              <a:lnSpc>
+                <a:spcPct val="115000"/>
+              </a:lnSpc>
+            </a:pPr>
+            <a:r>
+              <a:rPr sz="3400" b="1" i="0">
+                <a:solidFill>
+                  <a:srgbClr val="17181A"/>
+                </a:solidFill>
+                <a:latin typeface="Verdana"/>
+              </a:rPr>
+              <a:t>Quel son entendez-vous ?</a:t>
+            </a:r>
+          </a:p>
+        </p:txBody>
+      </p:sp>
+      <p:sp>
+        <p:nvSpPr>
+          <p:cNvPr id="7" name="TextBox 6"/>
+          <p:cNvSpPr txBox="1"/>
+          <p:nvPr/>
+        </p:nvSpPr>
+        <p:spPr>
+          <a:xfrm>
+            <a:off x="566928" y="1645920"/>
+            <a:ext cx="11057839" cy="329184"/>
+          </a:xfrm>
+          <a:prstGeom prst="rect">
+            <a:avLst/>
+          </a:prstGeom>
+          <a:noFill/>
+        </p:spPr>
+        <p:txBody>
+          <a:bodyPr wrap="square" lIns="0" rIns="0" tIns="0" bIns="0" anchor="t">
+            <a:spAutoFit/>
+          </a:bodyPr>
+          <a:lstStyle/>
+          <a:p>
+            <a:pPr algn="l">
+              <a:lnSpc>
+                <a:spcPct val="135000"/>
+              </a:lnSpc>
+            </a:pPr>
+            <a:r>
+              <a:rPr sz="1800" b="0" i="0">
+                <a:solidFill>
+                  <a:srgbClr val="6E7175"/>
+                </a:solidFill>
+                <a:latin typeface="Verdana"/>
+              </a:rPr>
+              <a:t>Correction — on lit la réponse, on ne commente pas l'erreur.</a:t>
+            </a:r>
+          </a:p>
+        </p:txBody>
+      </p:sp>
+      <p:sp>
+        <p:nvSpPr>
+          <p:cNvPr id="8" name="Rounded Rectangle 7"/>
+          <p:cNvSpPr/>
+          <p:nvPr/>
+        </p:nvSpPr>
+        <p:spPr>
+          <a:xfrm>
+            <a:off x="566928" y="2139696"/>
+            <a:ext cx="5464911" cy="648716"/>
+          </a:xfrm>
+          <a:prstGeom prst="roundRect">
+            <a:avLst>
+              <a:gd name="adj" fmla="val 22552"/>
+            </a:avLst>
+          </a:prstGeom>
+          <a:solidFill>
+            <a:srgbClr val="E6F5EE"/>
+          </a:solidFill>
+          <a:ln w="12700">
+            <a:solidFill>
+              <a:srgbClr val="EAEAE8"/>
+            </a:solidFill>
+          </a:ln>
+          <a:effectLst/>
+        </p:spPr>
+        <p:style>
+          <a:lnRef idx="1">
+            <a:schemeClr val="accent1"/>
+          </a:lnRef>
+          <a:fillRef idx="3">
+            <a:schemeClr val="accent1"/>
+          </a:fillRef>
+          <a:effectRef idx="2">
+            <a:schemeClr val="accent1"/>
+          </a:effectRef>
+          <a:fontRef idx="minor">
+            <a:schemeClr val="lt1"/>
+          </a:fontRef>
+        </p:style>
+        <p:txBody>
+          <a:bodyPr rtlCol="0" anchor="ctr"/>
+          <a:lstStyle/>
+          <a:p/>
+        </p:txBody>
+      </p:sp>
+      <p:sp>
+        <p:nvSpPr>
+          <p:cNvPr id="9" name="Rounded Rectangle 8"/>
+          <p:cNvSpPr/>
+          <p:nvPr/>
+        </p:nvSpPr>
+        <p:spPr>
+          <a:xfrm>
+            <a:off x="841247" y="2281174"/>
+            <a:ext cx="365760" cy="365760"/>
+          </a:xfrm>
+          <a:prstGeom prst="roundRect">
+            <a:avLst>
+              <a:gd name="adj" fmla="val 32500"/>
+            </a:avLst>
+          </a:prstGeom>
+          <a:solidFill>
+            <a:srgbClr val="E3F1E7"/>
+          </a:solidFill>
+          <a:ln>
+            <a:noFill/>
+          </a:ln>
+          <a:effectLst/>
+        </p:spPr>
+        <p:style>
+          <a:lnRef idx="1">
+            <a:schemeClr val="accent1"/>
+          </a:lnRef>
+          <a:fillRef idx="3">
+            <a:schemeClr val="accent1"/>
+          </a:fillRef>
+          <a:effectRef idx="2">
+            <a:schemeClr val="accent1"/>
+          </a:effectRef>
+          <a:fontRef idx="minor">
+            <a:schemeClr val="lt1"/>
+          </a:fontRef>
+        </p:style>
+        <p:txBody>
+          <a:bodyPr rtlCol="0" anchor="ctr"/>
+          <a:lstStyle/>
+          <a:p/>
+        </p:txBody>
+      </p:sp>
+      <p:sp>
+        <p:nvSpPr>
+          <p:cNvPr id="10" name="TextBox 9"/>
+          <p:cNvSpPr txBox="1"/>
+          <p:nvPr/>
+        </p:nvSpPr>
+        <p:spPr>
+          <a:xfrm>
+            <a:off x="841247" y="2345182"/>
+            <a:ext cx="365760" cy="256032"/>
+          </a:xfrm>
+          <a:prstGeom prst="rect">
+            <a:avLst/>
+          </a:prstGeom>
+          <a:noFill/>
+        </p:spPr>
+        <p:txBody>
+          <a:bodyPr wrap="square" lIns="0" rIns="0" tIns="0" bIns="0" anchor="t">
+            <a:spAutoFit/>
+          </a:bodyPr>
+          <a:lstStyle/>
+          <a:p>
+            <a:pPr algn="ctr">
+              <a:lnSpc>
+                <a:spcPct val="135000"/>
+              </a:lnSpc>
+            </a:pPr>
+            <a:r>
+              <a:rPr sz="1500" b="1" i="0">
+                <a:solidFill>
+                  <a:srgbClr val="166534"/>
+                </a:solidFill>
+                <a:latin typeface="Verdana"/>
+              </a:rPr>
+              <a:t>1</a:t>
+            </a:r>
+          </a:p>
+        </p:txBody>
+      </p:sp>
+      <p:sp>
+        <p:nvSpPr>
+          <p:cNvPr id="11" name="TextBox 10"/>
+          <p:cNvSpPr txBox="1"/>
+          <p:nvPr/>
+        </p:nvSpPr>
+        <p:spPr>
+          <a:xfrm>
+            <a:off x="1344168" y="2295144"/>
+            <a:ext cx="4504791" cy="374396"/>
+          </a:xfrm>
+          <a:prstGeom prst="rect">
+            <a:avLst/>
+          </a:prstGeom>
+          <a:noFill/>
+        </p:spPr>
+        <p:txBody>
+          <a:bodyPr wrap="square" lIns="0" rIns="0" tIns="0" bIns="0" anchor="t">
+            <a:spAutoFit/>
+          </a:bodyPr>
+          <a:lstStyle/>
+          <a:p>
+            <a:pPr algn="l">
+              <a:lnSpc>
+                <a:spcPct val="140000"/>
+              </a:lnSpc>
+            </a:pPr>
+            <a:r>
+              <a:rPr sz="1900" b="0" i="0">
+                <a:solidFill>
+                  <a:srgbClr val="3A3D40"/>
+                </a:solidFill>
+                <a:latin typeface="Verdana"/>
+              </a:rPr>
+              <a:t>voisine   </a:t>
+            </a:r>
+            <a:r>
+              <a:rPr sz="1900" b="1" i="0">
+                <a:solidFill>
+                  <a:srgbClr val="07734A"/>
+                </a:solidFill>
+                <a:latin typeface="Verdana"/>
+              </a:rPr>
+              <a:t>» le son « z »</a:t>
+            </a:r>
+          </a:p>
+        </p:txBody>
+      </p:sp>
+      <p:sp>
+        <p:nvSpPr>
+          <p:cNvPr id="12" name="Rounded Rectangle 11"/>
+          <p:cNvSpPr/>
+          <p:nvPr/>
+        </p:nvSpPr>
+        <p:spPr>
+          <a:xfrm>
+            <a:off x="6159855" y="2139696"/>
+            <a:ext cx="5464911" cy="648716"/>
+          </a:xfrm>
+          <a:prstGeom prst="roundRect">
+            <a:avLst>
+              <a:gd name="adj" fmla="val 22552"/>
+            </a:avLst>
+          </a:prstGeom>
+          <a:solidFill>
+            <a:srgbClr val="E6F5EE"/>
+          </a:solidFill>
+          <a:ln w="12700">
+            <a:solidFill>
+              <a:srgbClr val="EAEAE8"/>
+            </a:solidFill>
+          </a:ln>
+          <a:effectLst/>
+        </p:spPr>
+        <p:style>
+          <a:lnRef idx="1">
+            <a:schemeClr val="accent1"/>
+          </a:lnRef>
+          <a:fillRef idx="3">
+            <a:schemeClr val="accent1"/>
+          </a:fillRef>
+          <a:effectRef idx="2">
+            <a:schemeClr val="accent1"/>
+          </a:effectRef>
+          <a:fontRef idx="minor">
+            <a:schemeClr val="lt1"/>
+          </a:fontRef>
+        </p:style>
+        <p:txBody>
+          <a:bodyPr rtlCol="0" anchor="ctr"/>
+          <a:lstStyle/>
+          <a:p/>
+        </p:txBody>
+      </p:sp>
+      <p:sp>
+        <p:nvSpPr>
+          <p:cNvPr id="13" name="Rounded Rectangle 12"/>
+          <p:cNvSpPr/>
+          <p:nvPr/>
+        </p:nvSpPr>
+        <p:spPr>
+          <a:xfrm>
+            <a:off x="6434175" y="2281174"/>
+            <a:ext cx="365760" cy="365760"/>
+          </a:xfrm>
+          <a:prstGeom prst="roundRect">
+            <a:avLst>
+              <a:gd name="adj" fmla="val 32500"/>
+            </a:avLst>
+          </a:prstGeom>
+          <a:solidFill>
+            <a:srgbClr val="E3F1E7"/>
+          </a:solidFill>
+          <a:ln>
+            <a:noFill/>
+          </a:ln>
+          <a:effectLst/>
+        </p:spPr>
+        <p:style>
+          <a:lnRef idx="1">
+            <a:schemeClr val="accent1"/>
+          </a:lnRef>
+          <a:fillRef idx="3">
+            <a:schemeClr val="accent1"/>
+          </a:fillRef>
+          <a:effectRef idx="2">
+            <a:schemeClr val="accent1"/>
+          </a:effectRef>
+          <a:fontRef idx="minor">
+            <a:schemeClr val="lt1"/>
+          </a:fontRef>
+        </p:style>
+        <p:txBody>
+          <a:bodyPr rtlCol="0" anchor="ctr"/>
+          <a:lstStyle/>
+          <a:p/>
+        </p:txBody>
+      </p:sp>
+      <p:sp>
+        <p:nvSpPr>
+          <p:cNvPr id="14" name="TextBox 13"/>
+          <p:cNvSpPr txBox="1"/>
+          <p:nvPr/>
+        </p:nvSpPr>
+        <p:spPr>
+          <a:xfrm>
+            <a:off x="6434175" y="2345182"/>
+            <a:ext cx="365760" cy="256032"/>
+          </a:xfrm>
+          <a:prstGeom prst="rect">
+            <a:avLst/>
+          </a:prstGeom>
+          <a:noFill/>
+        </p:spPr>
+        <p:txBody>
+          <a:bodyPr wrap="square" lIns="0" rIns="0" tIns="0" bIns="0" anchor="t">
+            <a:spAutoFit/>
+          </a:bodyPr>
+          <a:lstStyle/>
+          <a:p>
+            <a:pPr algn="ctr">
+              <a:lnSpc>
+                <a:spcPct val="135000"/>
+              </a:lnSpc>
+            </a:pPr>
+            <a:r>
+              <a:rPr sz="1500" b="1" i="0">
+                <a:solidFill>
+                  <a:srgbClr val="166534"/>
+                </a:solidFill>
+                <a:latin typeface="Verdana"/>
+              </a:rPr>
+              <a:t>2</a:t>
+            </a:r>
+          </a:p>
+        </p:txBody>
+      </p:sp>
+      <p:sp>
+        <p:nvSpPr>
+          <p:cNvPr id="15" name="TextBox 14"/>
+          <p:cNvSpPr txBox="1"/>
+          <p:nvPr/>
+        </p:nvSpPr>
+        <p:spPr>
+          <a:xfrm>
+            <a:off x="6937095" y="2295144"/>
+            <a:ext cx="4504791" cy="374396"/>
+          </a:xfrm>
+          <a:prstGeom prst="rect">
+            <a:avLst/>
+          </a:prstGeom>
+          <a:noFill/>
+        </p:spPr>
+        <p:txBody>
+          <a:bodyPr wrap="square" lIns="0" rIns="0" tIns="0" bIns="0" anchor="t">
+            <a:spAutoFit/>
+          </a:bodyPr>
+          <a:lstStyle/>
+          <a:p>
+            <a:pPr algn="l">
+              <a:lnSpc>
+                <a:spcPct val="140000"/>
+              </a:lnSpc>
+            </a:pPr>
+            <a:r>
+              <a:rPr sz="1900" b="0" i="0">
+                <a:solidFill>
+                  <a:srgbClr val="3A3D40"/>
+                </a:solidFill>
+                <a:latin typeface="Verdana"/>
+              </a:rPr>
+              <a:t>succès   </a:t>
+            </a:r>
+            <a:r>
+              <a:rPr sz="1900" b="1" i="0">
+                <a:solidFill>
+                  <a:srgbClr val="07734A"/>
+                </a:solidFill>
+                <a:latin typeface="Verdana"/>
+              </a:rPr>
+              <a:t>» le son « s »</a:t>
+            </a:r>
+          </a:p>
+        </p:txBody>
+      </p:sp>
+      <p:sp>
+        <p:nvSpPr>
+          <p:cNvPr id="16" name="Rounded Rectangle 15"/>
+          <p:cNvSpPr/>
+          <p:nvPr/>
+        </p:nvSpPr>
+        <p:spPr>
+          <a:xfrm>
+            <a:off x="566928" y="2916428"/>
+            <a:ext cx="5464911" cy="648716"/>
+          </a:xfrm>
+          <a:prstGeom prst="roundRect">
+            <a:avLst>
+              <a:gd name="adj" fmla="val 22552"/>
+            </a:avLst>
+          </a:prstGeom>
+          <a:solidFill>
+            <a:srgbClr val="E6F5EE"/>
+          </a:solidFill>
+          <a:ln w="12700">
+            <a:solidFill>
+              <a:srgbClr val="EAEAE8"/>
+            </a:solidFill>
+          </a:ln>
+          <a:effectLst/>
+        </p:spPr>
+        <p:style>
+          <a:lnRef idx="1">
+            <a:schemeClr val="accent1"/>
+          </a:lnRef>
+          <a:fillRef idx="3">
+            <a:schemeClr val="accent1"/>
+          </a:fillRef>
+          <a:effectRef idx="2">
+            <a:schemeClr val="accent1"/>
+          </a:effectRef>
+          <a:fontRef idx="minor">
+            <a:schemeClr val="lt1"/>
+          </a:fontRef>
+        </p:style>
+        <p:txBody>
+          <a:bodyPr rtlCol="0" anchor="ctr"/>
+          <a:lstStyle/>
+          <a:p/>
+        </p:txBody>
+      </p:sp>
+      <p:sp>
+        <p:nvSpPr>
+          <p:cNvPr id="17" name="Rounded Rectangle 16"/>
+          <p:cNvSpPr/>
+          <p:nvPr/>
+        </p:nvSpPr>
+        <p:spPr>
+          <a:xfrm>
+            <a:off x="841247" y="3057905"/>
+            <a:ext cx="365760" cy="365760"/>
+          </a:xfrm>
+          <a:prstGeom prst="roundRect">
+            <a:avLst>
+              <a:gd name="adj" fmla="val 32500"/>
+            </a:avLst>
+          </a:prstGeom>
+          <a:solidFill>
+            <a:srgbClr val="E3F1E7"/>
+          </a:solidFill>
+          <a:ln>
+            <a:noFill/>
+          </a:ln>
+          <a:effectLst/>
+        </p:spPr>
+        <p:style>
+          <a:lnRef idx="1">
+            <a:schemeClr val="accent1"/>
+          </a:lnRef>
+          <a:fillRef idx="3">
+            <a:schemeClr val="accent1"/>
+          </a:fillRef>
+          <a:effectRef idx="2">
+            <a:schemeClr val="accent1"/>
+          </a:effectRef>
+          <a:fontRef idx="minor">
+            <a:schemeClr val="lt1"/>
+          </a:fontRef>
+        </p:style>
+        <p:txBody>
+          <a:bodyPr rtlCol="0" anchor="ctr"/>
+          <a:lstStyle/>
+          <a:p/>
+        </p:txBody>
+      </p:sp>
+      <p:sp>
+        <p:nvSpPr>
+          <p:cNvPr id="18" name="TextBox 17"/>
+          <p:cNvSpPr txBox="1"/>
+          <p:nvPr/>
+        </p:nvSpPr>
+        <p:spPr>
+          <a:xfrm>
+            <a:off x="841247" y="3121913"/>
+            <a:ext cx="365760" cy="256032"/>
+          </a:xfrm>
+          <a:prstGeom prst="rect">
+            <a:avLst/>
+          </a:prstGeom>
+          <a:noFill/>
+        </p:spPr>
+        <p:txBody>
+          <a:bodyPr wrap="square" lIns="0" rIns="0" tIns="0" bIns="0" anchor="t">
+            <a:spAutoFit/>
+          </a:bodyPr>
+          <a:lstStyle/>
+          <a:p>
+            <a:pPr algn="ctr">
+              <a:lnSpc>
+                <a:spcPct val="135000"/>
+              </a:lnSpc>
+            </a:pPr>
+            <a:r>
+              <a:rPr sz="1500" b="1" i="0">
+                <a:solidFill>
+                  <a:srgbClr val="166534"/>
+                </a:solidFill>
+                <a:latin typeface="Verdana"/>
+              </a:rPr>
+              <a:t>3</a:t>
+            </a:r>
+          </a:p>
+        </p:txBody>
+      </p:sp>
+      <p:sp>
+        <p:nvSpPr>
+          <p:cNvPr id="19" name="TextBox 18"/>
+          <p:cNvSpPr txBox="1"/>
+          <p:nvPr/>
+        </p:nvSpPr>
+        <p:spPr>
+          <a:xfrm>
+            <a:off x="1344168" y="3071876"/>
+            <a:ext cx="4504791" cy="374396"/>
+          </a:xfrm>
+          <a:prstGeom prst="rect">
+            <a:avLst/>
+          </a:prstGeom>
+          <a:noFill/>
+        </p:spPr>
+        <p:txBody>
+          <a:bodyPr wrap="square" lIns="0" rIns="0" tIns="0" bIns="0" anchor="t">
+            <a:spAutoFit/>
+          </a:bodyPr>
+          <a:lstStyle/>
+          <a:p>
+            <a:pPr algn="l">
+              <a:lnSpc>
+                <a:spcPct val="140000"/>
+              </a:lnSpc>
+            </a:pPr>
+            <a:r>
+              <a:rPr sz="1900" b="0" i="0">
+                <a:solidFill>
+                  <a:srgbClr val="3A3D40"/>
+                </a:solidFill>
+                <a:latin typeface="Verdana"/>
+              </a:rPr>
+              <a:t>organisée   </a:t>
+            </a:r>
+            <a:r>
+              <a:rPr sz="1900" b="1" i="0">
+                <a:solidFill>
+                  <a:srgbClr val="07734A"/>
+                </a:solidFill>
+                <a:latin typeface="Verdana"/>
+              </a:rPr>
+              <a:t>» le son « z »</a:t>
+            </a:r>
+          </a:p>
+        </p:txBody>
+      </p:sp>
+      <p:sp>
+        <p:nvSpPr>
+          <p:cNvPr id="20" name="Rounded Rectangle 19"/>
+          <p:cNvSpPr/>
+          <p:nvPr/>
+        </p:nvSpPr>
+        <p:spPr>
+          <a:xfrm>
+            <a:off x="6159855" y="2916428"/>
+            <a:ext cx="5464911" cy="648716"/>
+          </a:xfrm>
+          <a:prstGeom prst="roundRect">
+            <a:avLst>
+              <a:gd name="adj" fmla="val 22552"/>
+            </a:avLst>
+          </a:prstGeom>
+          <a:solidFill>
+            <a:srgbClr val="E6F5EE"/>
+          </a:solidFill>
+          <a:ln w="12700">
+            <a:solidFill>
+              <a:srgbClr val="EAEAE8"/>
+            </a:solidFill>
+          </a:ln>
+          <a:effectLst/>
+        </p:spPr>
+        <p:style>
+          <a:lnRef idx="1">
+            <a:schemeClr val="accent1"/>
+          </a:lnRef>
+          <a:fillRef idx="3">
+            <a:schemeClr val="accent1"/>
+          </a:fillRef>
+          <a:effectRef idx="2">
+            <a:schemeClr val="accent1"/>
+          </a:effectRef>
+          <a:fontRef idx="minor">
+            <a:schemeClr val="lt1"/>
+          </a:fontRef>
+        </p:style>
+        <p:txBody>
+          <a:bodyPr rtlCol="0" anchor="ctr"/>
+          <a:lstStyle/>
+          <a:p/>
+        </p:txBody>
+      </p:sp>
+      <p:sp>
+        <p:nvSpPr>
+          <p:cNvPr id="21" name="Rounded Rectangle 20"/>
+          <p:cNvSpPr/>
+          <p:nvPr/>
+        </p:nvSpPr>
+        <p:spPr>
+          <a:xfrm>
+            <a:off x="6434175" y="3057905"/>
+            <a:ext cx="365760" cy="365760"/>
+          </a:xfrm>
+          <a:prstGeom prst="roundRect">
+            <a:avLst>
+              <a:gd name="adj" fmla="val 32500"/>
+            </a:avLst>
+          </a:prstGeom>
+          <a:solidFill>
+            <a:srgbClr val="E3F1E7"/>
+          </a:solidFill>
+          <a:ln>
+            <a:noFill/>
+          </a:ln>
+          <a:effectLst/>
+        </p:spPr>
+        <p:style>
+          <a:lnRef idx="1">
+            <a:schemeClr val="accent1"/>
+          </a:lnRef>
+          <a:fillRef idx="3">
+            <a:schemeClr val="accent1"/>
+          </a:fillRef>
+          <a:effectRef idx="2">
+            <a:schemeClr val="accent1"/>
+          </a:effectRef>
+          <a:fontRef idx="minor">
+            <a:schemeClr val="lt1"/>
+          </a:fontRef>
+        </p:style>
+        <p:txBody>
+          <a:bodyPr rtlCol="0" anchor="ctr"/>
+          <a:lstStyle/>
+          <a:p/>
+        </p:txBody>
+      </p:sp>
+      <p:sp>
+        <p:nvSpPr>
+          <p:cNvPr id="22" name="TextBox 21"/>
+          <p:cNvSpPr txBox="1"/>
+          <p:nvPr/>
+        </p:nvSpPr>
+        <p:spPr>
+          <a:xfrm>
+            <a:off x="6434175" y="3121913"/>
+            <a:ext cx="365760" cy="256032"/>
+          </a:xfrm>
+          <a:prstGeom prst="rect">
+            <a:avLst/>
+          </a:prstGeom>
+          <a:noFill/>
+        </p:spPr>
+        <p:txBody>
+          <a:bodyPr wrap="square" lIns="0" rIns="0" tIns="0" bIns="0" anchor="t">
+            <a:spAutoFit/>
+          </a:bodyPr>
+          <a:lstStyle/>
+          <a:p>
+            <a:pPr algn="ctr">
+              <a:lnSpc>
+                <a:spcPct val="135000"/>
+              </a:lnSpc>
+            </a:pPr>
+            <a:r>
+              <a:rPr sz="1500" b="1" i="0">
+                <a:solidFill>
+                  <a:srgbClr val="166534"/>
+                </a:solidFill>
+                <a:latin typeface="Verdana"/>
+              </a:rPr>
+              <a:t>4</a:t>
+            </a:r>
+          </a:p>
+        </p:txBody>
+      </p:sp>
+      <p:sp>
+        <p:nvSpPr>
+          <p:cNvPr id="23" name="TextBox 22"/>
+          <p:cNvSpPr txBox="1"/>
+          <p:nvPr/>
+        </p:nvSpPr>
+        <p:spPr>
+          <a:xfrm>
+            <a:off x="6937095" y="3071876"/>
+            <a:ext cx="4504791" cy="374396"/>
+          </a:xfrm>
+          <a:prstGeom prst="rect">
+            <a:avLst/>
+          </a:prstGeom>
+          <a:noFill/>
+        </p:spPr>
+        <p:txBody>
+          <a:bodyPr wrap="square" lIns="0" rIns="0" tIns="0" bIns="0" anchor="t">
+            <a:spAutoFit/>
+          </a:bodyPr>
+          <a:lstStyle/>
+          <a:p>
+            <a:pPr algn="l">
+              <a:lnSpc>
+                <a:spcPct val="140000"/>
+              </a:lnSpc>
+            </a:pPr>
+            <a:r>
+              <a:rPr sz="1900" b="0" i="0">
+                <a:solidFill>
+                  <a:srgbClr val="3A3D40"/>
+                </a:solidFill>
+                <a:latin typeface="Verdana"/>
+              </a:rPr>
+              <a:t>amassé   </a:t>
+            </a:r>
+            <a:r>
+              <a:rPr sz="1900" b="1" i="0">
+                <a:solidFill>
+                  <a:srgbClr val="07734A"/>
+                </a:solidFill>
+                <a:latin typeface="Verdana"/>
+              </a:rPr>
+              <a:t>» le son « s »</a:t>
+            </a:r>
+          </a:p>
+        </p:txBody>
+      </p:sp>
+      <p:sp>
+        <p:nvSpPr>
+          <p:cNvPr id="24" name="Rounded Rectangle 23"/>
+          <p:cNvSpPr/>
+          <p:nvPr/>
+        </p:nvSpPr>
+        <p:spPr>
+          <a:xfrm>
+            <a:off x="566928" y="3693160"/>
+            <a:ext cx="5464911" cy="648716"/>
+          </a:xfrm>
+          <a:prstGeom prst="roundRect">
+            <a:avLst>
+              <a:gd name="adj" fmla="val 22552"/>
+            </a:avLst>
+          </a:prstGeom>
+          <a:solidFill>
+            <a:srgbClr val="E6F5EE"/>
+          </a:solidFill>
+          <a:ln w="12700">
+            <a:solidFill>
+              <a:srgbClr val="EAEAE8"/>
+            </a:solidFill>
+          </a:ln>
+          <a:effectLst/>
+        </p:spPr>
+        <p:style>
+          <a:lnRef idx="1">
+            <a:schemeClr val="accent1"/>
+          </a:lnRef>
+          <a:fillRef idx="3">
+            <a:schemeClr val="accent1"/>
+          </a:fillRef>
+          <a:effectRef idx="2">
+            <a:schemeClr val="accent1"/>
+          </a:effectRef>
+          <a:fontRef idx="minor">
+            <a:schemeClr val="lt1"/>
+          </a:fontRef>
+        </p:style>
+        <p:txBody>
+          <a:bodyPr rtlCol="0" anchor="ctr"/>
+          <a:lstStyle/>
+          <a:p/>
+        </p:txBody>
+      </p:sp>
+      <p:sp>
+        <p:nvSpPr>
+          <p:cNvPr id="25" name="Rounded Rectangle 24"/>
+          <p:cNvSpPr/>
+          <p:nvPr/>
+        </p:nvSpPr>
+        <p:spPr>
+          <a:xfrm>
+            <a:off x="841247" y="3834638"/>
+            <a:ext cx="365760" cy="365760"/>
+          </a:xfrm>
+          <a:prstGeom prst="roundRect">
+            <a:avLst>
+              <a:gd name="adj" fmla="val 32500"/>
+            </a:avLst>
+          </a:prstGeom>
+          <a:solidFill>
+            <a:srgbClr val="E3F1E7"/>
+          </a:solidFill>
+          <a:ln>
+            <a:noFill/>
+          </a:ln>
+          <a:effectLst/>
+        </p:spPr>
+        <p:style>
+          <a:lnRef idx="1">
+            <a:schemeClr val="accent1"/>
+          </a:lnRef>
+          <a:fillRef idx="3">
+            <a:schemeClr val="accent1"/>
+          </a:fillRef>
+          <a:effectRef idx="2">
+            <a:schemeClr val="accent1"/>
+          </a:effectRef>
+          <a:fontRef idx="minor">
+            <a:schemeClr val="lt1"/>
+          </a:fontRef>
+        </p:style>
+        <p:txBody>
+          <a:bodyPr rtlCol="0" anchor="ctr"/>
+          <a:lstStyle/>
+          <a:p/>
+        </p:txBody>
+      </p:sp>
+      <p:sp>
+        <p:nvSpPr>
+          <p:cNvPr id="26" name="TextBox 25"/>
+          <p:cNvSpPr txBox="1"/>
+          <p:nvPr/>
+        </p:nvSpPr>
+        <p:spPr>
+          <a:xfrm>
+            <a:off x="841247" y="3898646"/>
+            <a:ext cx="365760" cy="256032"/>
+          </a:xfrm>
+          <a:prstGeom prst="rect">
+            <a:avLst/>
+          </a:prstGeom>
+          <a:noFill/>
+        </p:spPr>
+        <p:txBody>
+          <a:bodyPr wrap="square" lIns="0" rIns="0" tIns="0" bIns="0" anchor="t">
+            <a:spAutoFit/>
+          </a:bodyPr>
+          <a:lstStyle/>
+          <a:p>
+            <a:pPr algn="ctr">
+              <a:lnSpc>
+                <a:spcPct val="135000"/>
+              </a:lnSpc>
+            </a:pPr>
+            <a:r>
+              <a:rPr sz="1500" b="1" i="0">
+                <a:solidFill>
+                  <a:srgbClr val="166534"/>
+                </a:solidFill>
+                <a:latin typeface="Verdana"/>
+              </a:rPr>
+              <a:t>5</a:t>
+            </a:r>
+          </a:p>
+        </p:txBody>
+      </p:sp>
+      <p:sp>
+        <p:nvSpPr>
+          <p:cNvPr id="27" name="TextBox 26"/>
+          <p:cNvSpPr txBox="1"/>
+          <p:nvPr/>
+        </p:nvSpPr>
+        <p:spPr>
+          <a:xfrm>
+            <a:off x="1344168" y="3848608"/>
+            <a:ext cx="4504791" cy="374396"/>
+          </a:xfrm>
+          <a:prstGeom prst="rect">
+            <a:avLst/>
+          </a:prstGeom>
+          <a:noFill/>
+        </p:spPr>
+        <p:txBody>
+          <a:bodyPr wrap="square" lIns="0" rIns="0" tIns="0" bIns="0" anchor="t">
+            <a:spAutoFit/>
+          </a:bodyPr>
+          <a:lstStyle/>
+          <a:p>
+            <a:pPr algn="l">
+              <a:lnSpc>
+                <a:spcPct val="140000"/>
+              </a:lnSpc>
+            </a:pPr>
+            <a:r>
+              <a:rPr sz="1900" b="0" i="0">
+                <a:solidFill>
+                  <a:srgbClr val="3A3D40"/>
+                </a:solidFill>
+                <a:latin typeface="Verdana"/>
+              </a:rPr>
+              <a:t>organisme   </a:t>
+            </a:r>
+            <a:r>
+              <a:rPr sz="1900" b="1" i="0">
+                <a:solidFill>
+                  <a:srgbClr val="07734A"/>
+                </a:solidFill>
+                <a:latin typeface="Verdana"/>
+              </a:rPr>
+              <a:t>» le son « z »</a:t>
+            </a:r>
+          </a:p>
+        </p:txBody>
+      </p:sp>
+      <p:sp>
+        <p:nvSpPr>
+          <p:cNvPr id="28" name="Rounded Rectangle 27"/>
+          <p:cNvSpPr/>
+          <p:nvPr/>
+        </p:nvSpPr>
+        <p:spPr>
+          <a:xfrm>
+            <a:off x="6159855" y="3693160"/>
+            <a:ext cx="5464911" cy="648716"/>
+          </a:xfrm>
+          <a:prstGeom prst="roundRect">
+            <a:avLst>
+              <a:gd name="adj" fmla="val 22552"/>
+            </a:avLst>
+          </a:prstGeom>
+          <a:solidFill>
+            <a:srgbClr val="E6F5EE"/>
+          </a:solidFill>
+          <a:ln w="12700">
+            <a:solidFill>
+              <a:srgbClr val="EAEAE8"/>
+            </a:solidFill>
+          </a:ln>
+          <a:effectLst/>
+        </p:spPr>
+        <p:style>
+          <a:lnRef idx="1">
+            <a:schemeClr val="accent1"/>
+          </a:lnRef>
+          <a:fillRef idx="3">
+            <a:schemeClr val="accent1"/>
+          </a:fillRef>
+          <a:effectRef idx="2">
+            <a:schemeClr val="accent1"/>
+          </a:effectRef>
+          <a:fontRef idx="minor">
+            <a:schemeClr val="lt1"/>
+          </a:fontRef>
+        </p:style>
+        <p:txBody>
+          <a:bodyPr rtlCol="0" anchor="ctr"/>
+          <a:lstStyle/>
+          <a:p/>
+        </p:txBody>
+      </p:sp>
+      <p:sp>
+        <p:nvSpPr>
+          <p:cNvPr id="29" name="Rounded Rectangle 28"/>
+          <p:cNvSpPr/>
+          <p:nvPr/>
+        </p:nvSpPr>
+        <p:spPr>
+          <a:xfrm>
+            <a:off x="6434175" y="3834638"/>
+            <a:ext cx="365760" cy="365760"/>
+          </a:xfrm>
+          <a:prstGeom prst="roundRect">
+            <a:avLst>
+              <a:gd name="adj" fmla="val 32500"/>
+            </a:avLst>
+          </a:prstGeom>
+          <a:solidFill>
+            <a:srgbClr val="E3F1E7"/>
+          </a:solidFill>
+          <a:ln>
+            <a:noFill/>
+          </a:ln>
+          <a:effectLst/>
+        </p:spPr>
+        <p:style>
+          <a:lnRef idx="1">
+            <a:schemeClr val="accent1"/>
+          </a:lnRef>
+          <a:fillRef idx="3">
+            <a:schemeClr val="accent1"/>
+          </a:fillRef>
+          <a:effectRef idx="2">
+            <a:schemeClr val="accent1"/>
+          </a:effectRef>
+          <a:fontRef idx="minor">
+            <a:schemeClr val="lt1"/>
+          </a:fontRef>
+        </p:style>
+        <p:txBody>
+          <a:bodyPr rtlCol="0" anchor="ctr"/>
+          <a:lstStyle/>
+          <a:p/>
+        </p:txBody>
+      </p:sp>
+      <p:sp>
+        <p:nvSpPr>
+          <p:cNvPr id="30" name="TextBox 29"/>
+          <p:cNvSpPr txBox="1"/>
+          <p:nvPr/>
+        </p:nvSpPr>
+        <p:spPr>
+          <a:xfrm>
+            <a:off x="6434175" y="3898646"/>
+            <a:ext cx="365760" cy="256032"/>
+          </a:xfrm>
+          <a:prstGeom prst="rect">
+            <a:avLst/>
+          </a:prstGeom>
+          <a:noFill/>
+        </p:spPr>
+        <p:txBody>
+          <a:bodyPr wrap="square" lIns="0" rIns="0" tIns="0" bIns="0" anchor="t">
+            <a:spAutoFit/>
+          </a:bodyPr>
+          <a:lstStyle/>
+          <a:p>
+            <a:pPr algn="ctr">
+              <a:lnSpc>
+                <a:spcPct val="135000"/>
+              </a:lnSpc>
+            </a:pPr>
+            <a:r>
+              <a:rPr sz="1500" b="1" i="0">
+                <a:solidFill>
+                  <a:srgbClr val="166534"/>
+                </a:solidFill>
+                <a:latin typeface="Verdana"/>
+              </a:rPr>
+              <a:t>6</a:t>
+            </a:r>
+          </a:p>
+        </p:txBody>
+      </p:sp>
+      <p:sp>
+        <p:nvSpPr>
+          <p:cNvPr id="31" name="TextBox 30"/>
+          <p:cNvSpPr txBox="1"/>
+          <p:nvPr/>
+        </p:nvSpPr>
+        <p:spPr>
+          <a:xfrm>
+            <a:off x="6937095" y="3848608"/>
+            <a:ext cx="4504791" cy="374396"/>
+          </a:xfrm>
+          <a:prstGeom prst="rect">
+            <a:avLst/>
+          </a:prstGeom>
+          <a:noFill/>
+        </p:spPr>
+        <p:txBody>
+          <a:bodyPr wrap="square" lIns="0" rIns="0" tIns="0" bIns="0" anchor="t">
+            <a:spAutoFit/>
+          </a:bodyPr>
+          <a:lstStyle/>
+          <a:p>
+            <a:pPr algn="l">
+              <a:lnSpc>
+                <a:spcPct val="140000"/>
+              </a:lnSpc>
+            </a:pPr>
+            <a:r>
+              <a:rPr sz="1900" b="0" i="0">
+                <a:solidFill>
+                  <a:srgbClr val="3A3D40"/>
+                </a:solidFill>
+                <a:latin typeface="Verdana"/>
+              </a:rPr>
+              <a:t>cents   </a:t>
+            </a:r>
+            <a:r>
+              <a:rPr sz="1900" b="1" i="0">
+                <a:solidFill>
+                  <a:srgbClr val="07734A"/>
+                </a:solidFill>
+                <a:latin typeface="Verdana"/>
+              </a:rPr>
+              <a:t>» le son « s »</a:t>
+            </a:r>
+          </a:p>
+        </p:txBody>
+      </p:sp>
+      <p:sp>
+        <p:nvSpPr>
+          <p:cNvPr id="32" name="Rounded Rectangle 31"/>
+          <p:cNvSpPr/>
+          <p:nvPr/>
+        </p:nvSpPr>
+        <p:spPr>
+          <a:xfrm>
+            <a:off x="566928" y="4469892"/>
+            <a:ext cx="5464911" cy="648716"/>
+          </a:xfrm>
+          <a:prstGeom prst="roundRect">
+            <a:avLst>
+              <a:gd name="adj" fmla="val 22552"/>
+            </a:avLst>
+          </a:prstGeom>
+          <a:solidFill>
+            <a:srgbClr val="E6F5EE"/>
+          </a:solidFill>
+          <a:ln w="12700">
+            <a:solidFill>
+              <a:srgbClr val="EAEAE8"/>
+            </a:solidFill>
+          </a:ln>
+          <a:effectLst/>
+        </p:spPr>
+        <p:style>
+          <a:lnRef idx="1">
+            <a:schemeClr val="accent1"/>
+          </a:lnRef>
+          <a:fillRef idx="3">
+            <a:schemeClr val="accent1"/>
+          </a:fillRef>
+          <a:effectRef idx="2">
+            <a:schemeClr val="accent1"/>
+          </a:effectRef>
+          <a:fontRef idx="minor">
+            <a:schemeClr val="lt1"/>
+          </a:fontRef>
+        </p:style>
+        <p:txBody>
+          <a:bodyPr rtlCol="0" anchor="ctr"/>
+          <a:lstStyle/>
+          <a:p/>
+        </p:txBody>
+      </p:sp>
+      <p:sp>
+        <p:nvSpPr>
+          <p:cNvPr id="33" name="Rounded Rectangle 32"/>
+          <p:cNvSpPr/>
+          <p:nvPr/>
+        </p:nvSpPr>
+        <p:spPr>
+          <a:xfrm>
+            <a:off x="841247" y="4611370"/>
+            <a:ext cx="365760" cy="365760"/>
+          </a:xfrm>
+          <a:prstGeom prst="roundRect">
+            <a:avLst>
+              <a:gd name="adj" fmla="val 32500"/>
+            </a:avLst>
+          </a:prstGeom>
+          <a:solidFill>
+            <a:srgbClr val="E3F1E7"/>
+          </a:solidFill>
+          <a:ln>
+            <a:noFill/>
+          </a:ln>
+          <a:effectLst/>
+        </p:spPr>
+        <p:style>
+          <a:lnRef idx="1">
+            <a:schemeClr val="accent1"/>
+          </a:lnRef>
+          <a:fillRef idx="3">
+            <a:schemeClr val="accent1"/>
+          </a:fillRef>
+          <a:effectRef idx="2">
+            <a:schemeClr val="accent1"/>
+          </a:effectRef>
+          <a:fontRef idx="minor">
+            <a:schemeClr val="lt1"/>
+          </a:fontRef>
+        </p:style>
+        <p:txBody>
+          <a:bodyPr rtlCol="0" anchor="ctr"/>
+          <a:lstStyle/>
+          <a:p/>
+        </p:txBody>
+      </p:sp>
+      <p:sp>
+        <p:nvSpPr>
+          <p:cNvPr id="34" name="TextBox 33"/>
+          <p:cNvSpPr txBox="1"/>
+          <p:nvPr/>
+        </p:nvSpPr>
+        <p:spPr>
+          <a:xfrm>
+            <a:off x="841247" y="4675378"/>
+            <a:ext cx="365760" cy="256032"/>
+          </a:xfrm>
+          <a:prstGeom prst="rect">
+            <a:avLst/>
+          </a:prstGeom>
+          <a:noFill/>
+        </p:spPr>
+        <p:txBody>
+          <a:bodyPr wrap="square" lIns="0" rIns="0" tIns="0" bIns="0" anchor="t">
+            <a:spAutoFit/>
+          </a:bodyPr>
+          <a:lstStyle/>
+          <a:p>
+            <a:pPr algn="ctr">
+              <a:lnSpc>
+                <a:spcPct val="135000"/>
+              </a:lnSpc>
+            </a:pPr>
+            <a:r>
+              <a:rPr sz="1500" b="1" i="0">
+                <a:solidFill>
+                  <a:srgbClr val="166534"/>
+                </a:solidFill>
+                <a:latin typeface="Verdana"/>
+              </a:rPr>
+              <a:t>7</a:t>
+            </a:r>
+          </a:p>
+        </p:txBody>
+      </p:sp>
+      <p:sp>
+        <p:nvSpPr>
+          <p:cNvPr id="35" name="TextBox 34"/>
+          <p:cNvSpPr txBox="1"/>
+          <p:nvPr/>
+        </p:nvSpPr>
+        <p:spPr>
+          <a:xfrm>
+            <a:off x="1344168" y="4625340"/>
+            <a:ext cx="4504791" cy="374396"/>
+          </a:xfrm>
+          <a:prstGeom prst="rect">
+            <a:avLst/>
+          </a:prstGeom>
+          <a:noFill/>
+        </p:spPr>
+        <p:txBody>
+          <a:bodyPr wrap="square" lIns="0" rIns="0" tIns="0" bIns="0" anchor="t">
+            <a:spAutoFit/>
+          </a:bodyPr>
+          <a:lstStyle/>
+          <a:p>
+            <a:pPr algn="l">
+              <a:lnSpc>
+                <a:spcPct val="140000"/>
+              </a:lnSpc>
+            </a:pPr>
+            <a:r>
+              <a:rPr sz="1900" b="0" i="0">
+                <a:solidFill>
+                  <a:srgbClr val="3A3D40"/>
+                </a:solidFill>
+                <a:latin typeface="Verdana"/>
+              </a:rPr>
+              <a:t>visite   </a:t>
+            </a:r>
+            <a:r>
+              <a:rPr sz="1900" b="1" i="0">
+                <a:solidFill>
+                  <a:srgbClr val="07734A"/>
+                </a:solidFill>
+                <a:latin typeface="Verdana"/>
+              </a:rPr>
+              <a:t>» le son « z »</a:t>
+            </a:r>
+          </a:p>
+        </p:txBody>
+      </p:sp>
+      <p:sp>
+        <p:nvSpPr>
+          <p:cNvPr id="36" name="Rounded Rectangle 35"/>
+          <p:cNvSpPr/>
+          <p:nvPr/>
+        </p:nvSpPr>
+        <p:spPr>
+          <a:xfrm>
+            <a:off x="6159855" y="4469892"/>
+            <a:ext cx="5464911" cy="648716"/>
+          </a:xfrm>
+          <a:prstGeom prst="roundRect">
+            <a:avLst>
+              <a:gd name="adj" fmla="val 22552"/>
+            </a:avLst>
+          </a:prstGeom>
+          <a:solidFill>
+            <a:srgbClr val="E6F5EE"/>
+          </a:solidFill>
+          <a:ln w="12700">
+            <a:solidFill>
+              <a:srgbClr val="EAEAE8"/>
+            </a:solidFill>
+          </a:ln>
+          <a:effectLst/>
+        </p:spPr>
+        <p:style>
+          <a:lnRef idx="1">
+            <a:schemeClr val="accent1"/>
+          </a:lnRef>
+          <a:fillRef idx="3">
+            <a:schemeClr val="accent1"/>
+          </a:fillRef>
+          <a:effectRef idx="2">
+            <a:schemeClr val="accent1"/>
+          </a:effectRef>
+          <a:fontRef idx="minor">
+            <a:schemeClr val="lt1"/>
+          </a:fontRef>
+        </p:style>
+        <p:txBody>
+          <a:bodyPr rtlCol="0" anchor="ctr"/>
+          <a:lstStyle/>
+          <a:p/>
+        </p:txBody>
+      </p:sp>
+      <p:sp>
+        <p:nvSpPr>
+          <p:cNvPr id="37" name="Rounded Rectangle 36"/>
+          <p:cNvSpPr/>
+          <p:nvPr/>
+        </p:nvSpPr>
+        <p:spPr>
+          <a:xfrm>
+            <a:off x="6434175" y="4611370"/>
+            <a:ext cx="365760" cy="365760"/>
+          </a:xfrm>
+          <a:prstGeom prst="roundRect">
+            <a:avLst>
+              <a:gd name="adj" fmla="val 32500"/>
+            </a:avLst>
+          </a:prstGeom>
+          <a:solidFill>
+            <a:srgbClr val="E3F1E7"/>
+          </a:solidFill>
+          <a:ln>
+            <a:noFill/>
+          </a:ln>
+          <a:effectLst/>
+        </p:spPr>
+        <p:style>
+          <a:lnRef idx="1">
+            <a:schemeClr val="accent1"/>
+          </a:lnRef>
+          <a:fillRef idx="3">
+            <a:schemeClr val="accent1"/>
+          </a:fillRef>
+          <a:effectRef idx="2">
+            <a:schemeClr val="accent1"/>
+          </a:effectRef>
+          <a:fontRef idx="minor">
+            <a:schemeClr val="lt1"/>
+          </a:fontRef>
+        </p:style>
+        <p:txBody>
+          <a:bodyPr rtlCol="0" anchor="ctr"/>
+          <a:lstStyle/>
+          <a:p/>
+        </p:txBody>
+      </p:sp>
+      <p:sp>
+        <p:nvSpPr>
+          <p:cNvPr id="38" name="TextBox 37"/>
+          <p:cNvSpPr txBox="1"/>
+          <p:nvPr/>
+        </p:nvSpPr>
+        <p:spPr>
+          <a:xfrm>
+            <a:off x="6434175" y="4675378"/>
+            <a:ext cx="365760" cy="256032"/>
+          </a:xfrm>
+          <a:prstGeom prst="rect">
+            <a:avLst/>
+          </a:prstGeom>
+          <a:noFill/>
+        </p:spPr>
+        <p:txBody>
+          <a:bodyPr wrap="square" lIns="0" rIns="0" tIns="0" bIns="0" anchor="t">
+            <a:spAutoFit/>
+          </a:bodyPr>
+          <a:lstStyle/>
+          <a:p>
+            <a:pPr algn="ctr">
+              <a:lnSpc>
+                <a:spcPct val="135000"/>
+              </a:lnSpc>
+            </a:pPr>
+            <a:r>
+              <a:rPr sz="1500" b="1" i="0">
+                <a:solidFill>
+                  <a:srgbClr val="166534"/>
+                </a:solidFill>
+                <a:latin typeface="Verdana"/>
+              </a:rPr>
+              <a:t>8</a:t>
+            </a:r>
+          </a:p>
+        </p:txBody>
+      </p:sp>
+      <p:sp>
+        <p:nvSpPr>
+          <p:cNvPr id="39" name="TextBox 38"/>
+          <p:cNvSpPr txBox="1"/>
+          <p:nvPr/>
+        </p:nvSpPr>
+        <p:spPr>
+          <a:xfrm>
+            <a:off x="6937095" y="4625340"/>
+            <a:ext cx="4504791" cy="374396"/>
+          </a:xfrm>
+          <a:prstGeom prst="rect">
+            <a:avLst/>
+          </a:prstGeom>
+          <a:noFill/>
+        </p:spPr>
+        <p:txBody>
+          <a:bodyPr wrap="square" lIns="0" rIns="0" tIns="0" bIns="0" anchor="t">
+            <a:spAutoFit/>
+          </a:bodyPr>
+          <a:lstStyle/>
+          <a:p>
+            <a:pPr algn="l">
+              <a:lnSpc>
+                <a:spcPct val="140000"/>
+              </a:lnSpc>
+            </a:pPr>
+            <a:r>
+              <a:rPr sz="1900" b="0" i="0">
+                <a:solidFill>
+                  <a:srgbClr val="3A3D40"/>
+                </a:solidFill>
+                <a:latin typeface="Verdana"/>
+              </a:rPr>
+              <a:t>personne   </a:t>
+            </a:r>
+            <a:r>
+              <a:rPr sz="1900" b="1" i="0">
+                <a:solidFill>
+                  <a:srgbClr val="07734A"/>
+                </a:solidFill>
+                <a:latin typeface="Verdana"/>
+              </a:rPr>
+              <a:t>» le son « s »</a:t>
             </a:r>
           </a:p>
         </p:txBody>
@@ -10184,7 +15124,2183 @@
                 </a:solidFill>
                 <a:latin typeface="Verdana"/>
               </a:rPr>
-              <a:t>nommer la catégorie d'une nouvelle qu'on entend.</a:t>
+              <a:t>nommer la catégorie d'une nouvelle qu'on entend ;</a:t>
+            </a:r>
+          </a:p>
+        </p:txBody>
+      </p:sp>
+      <p:sp>
+        <p:nvSpPr>
+          <p:cNvPr id="23" name="Rounded Rectangle 22"/>
+          <p:cNvSpPr/>
+          <p:nvPr/>
+        </p:nvSpPr>
+        <p:spPr>
+          <a:xfrm>
+            <a:off x="566928" y="5308600"/>
+            <a:ext cx="11057839" cy="757936"/>
+          </a:xfrm>
+          <a:prstGeom prst="roundRect">
+            <a:avLst>
+              <a:gd name="adj" fmla="val 19302"/>
+            </a:avLst>
+          </a:prstGeom>
+          <a:solidFill>
+            <a:srgbClr val="FFFFFF"/>
+          </a:solidFill>
+          <a:ln w="12700">
+            <a:solidFill>
+              <a:srgbClr val="EAEAE8"/>
+            </a:solidFill>
+          </a:ln>
+          <a:effectLst/>
+        </p:spPr>
+        <p:style>
+          <a:lnRef idx="1">
+            <a:schemeClr val="accent1"/>
+          </a:lnRef>
+          <a:fillRef idx="3">
+            <a:schemeClr val="accent1"/>
+          </a:fillRef>
+          <a:effectRef idx="2">
+            <a:schemeClr val="accent1"/>
+          </a:effectRef>
+          <a:fontRef idx="minor">
+            <a:schemeClr val="lt1"/>
+          </a:fontRef>
+        </p:style>
+        <p:txBody>
+          <a:bodyPr rtlCol="0" anchor="ctr"/>
+          <a:lstStyle/>
+          <a:p/>
+        </p:txBody>
+      </p:sp>
+      <p:sp>
+        <p:nvSpPr>
+          <p:cNvPr id="24" name="Rounded Rectangle 23"/>
+          <p:cNvSpPr/>
+          <p:nvPr/>
+        </p:nvSpPr>
+        <p:spPr>
+          <a:xfrm>
+            <a:off x="804672" y="5486400"/>
+            <a:ext cx="402336" cy="402336"/>
+          </a:xfrm>
+          <a:prstGeom prst="roundRect">
+            <a:avLst>
+              <a:gd name="adj" fmla="val 31818"/>
+            </a:avLst>
+          </a:prstGeom>
+          <a:solidFill>
+            <a:srgbClr val="E3F1E7"/>
+          </a:solidFill>
+          <a:ln>
+            <a:noFill/>
+          </a:ln>
+          <a:effectLst/>
+        </p:spPr>
+        <p:style>
+          <a:lnRef idx="1">
+            <a:schemeClr val="accent1"/>
+          </a:lnRef>
+          <a:fillRef idx="3">
+            <a:schemeClr val="accent1"/>
+          </a:fillRef>
+          <a:effectRef idx="2">
+            <a:schemeClr val="accent1"/>
+          </a:effectRef>
+          <a:fontRef idx="minor">
+            <a:schemeClr val="lt1"/>
+          </a:fontRef>
+        </p:style>
+        <p:txBody>
+          <a:bodyPr rtlCol="0" anchor="ctr"/>
+          <a:lstStyle/>
+          <a:p/>
+        </p:txBody>
+      </p:sp>
+      <p:sp>
+        <p:nvSpPr>
+          <p:cNvPr id="25" name="TextBox 24"/>
+          <p:cNvSpPr txBox="1"/>
+          <p:nvPr/>
+        </p:nvSpPr>
+        <p:spPr>
+          <a:xfrm>
+            <a:off x="804672" y="5568696"/>
+            <a:ext cx="402336" cy="274320"/>
+          </a:xfrm>
+          <a:prstGeom prst="rect">
+            <a:avLst/>
+          </a:prstGeom>
+          <a:noFill/>
+        </p:spPr>
+        <p:txBody>
+          <a:bodyPr wrap="square" lIns="0" rIns="0" tIns="0" bIns="0" anchor="t">
+            <a:spAutoFit/>
+          </a:bodyPr>
+          <a:lstStyle/>
+          <a:p>
+            <a:pPr algn="ctr">
+              <a:lnSpc>
+                <a:spcPct val="135000"/>
+              </a:lnSpc>
+            </a:pPr>
+            <a:r>
+              <a:rPr sz="1500" b="1" i="0">
+                <a:solidFill>
+                  <a:srgbClr val="166534"/>
+                </a:solidFill>
+                <a:latin typeface="Verdana"/>
+              </a:rPr>
+              <a:t>5</a:t>
+            </a:r>
+          </a:p>
+        </p:txBody>
+      </p:sp>
+      <p:sp>
+        <p:nvSpPr>
+          <p:cNvPr id="26" name="TextBox 25"/>
+          <p:cNvSpPr txBox="1"/>
+          <p:nvPr/>
+        </p:nvSpPr>
+        <p:spPr>
+          <a:xfrm>
+            <a:off x="1408176" y="5509768"/>
+            <a:ext cx="9549079" cy="392176"/>
+          </a:xfrm>
+          <a:prstGeom prst="rect">
+            <a:avLst/>
+          </a:prstGeom>
+          <a:noFill/>
+        </p:spPr>
+        <p:txBody>
+          <a:bodyPr wrap="square" lIns="0" rIns="0" tIns="0" bIns="0" anchor="t">
+            <a:spAutoFit/>
+          </a:bodyPr>
+          <a:lstStyle/>
+          <a:p>
+            <a:pPr algn="l">
+              <a:lnSpc>
+                <a:spcPct val="140000"/>
+              </a:lnSpc>
+            </a:pPr>
+            <a:r>
+              <a:rPr sz="2000" b="0" i="0">
+                <a:solidFill>
+                  <a:srgbClr val="3A3D40"/>
+                </a:solidFill>
+                <a:latin typeface="Verdana"/>
+              </a:rPr>
+              <a:t>distinguer le son « s » du son « z » dans le vocabulaire du bulletin.</a:t>
+            </a:r>
+          </a:p>
+        </p:txBody>
+      </p:sp>
+    </p:spTree>
+  </p:cSld>
+  <p:clrMapOvr>
+    <a:masterClrMapping/>
+  </p:clrMapOvr>
+</p:sld>
+</file>
+
+<file path=ppt/slides/slide20.xml><?xml version="1.0" encoding="utf-8"?>
+<p:sld xmlns:a="http://schemas.openxmlformats.org/drawingml/2006/main" xmlns:p="http://schemas.openxmlformats.org/presentationml/2006/main" xmlns:r="http://schemas.openxmlformats.org/officeDocument/2006/relationships">
+  <p:cSld>
+    <p:spTree>
+      <p:nvGrpSpPr>
+        <p:cNvPr id="1" name=""/>
+        <p:cNvGrpSpPr/>
+        <p:nvPr/>
+      </p:nvGrpSpPr>
+      <p:grpSpPr/>
+      <p:sp>
+        <p:nvSpPr>
+          <p:cNvPr id="2" name="Rectangle 1"/>
+          <p:cNvSpPr/>
+          <p:nvPr/>
+        </p:nvSpPr>
+        <p:spPr>
+          <a:xfrm>
+            <a:off x="0" y="0"/>
+            <a:ext cx="12191695" cy="6858000"/>
+          </a:xfrm>
+          <a:prstGeom prst="rect">
+            <a:avLst/>
+          </a:prstGeom>
+          <a:solidFill>
+            <a:srgbClr val="F7F7F5"/>
+          </a:solidFill>
+          <a:ln>
+            <a:noFill/>
+          </a:ln>
+          <a:effectLst/>
+        </p:spPr>
+        <p:style>
+          <a:lnRef idx="1">
+            <a:schemeClr val="accent1"/>
+          </a:lnRef>
+          <a:fillRef idx="3">
+            <a:schemeClr val="accent1"/>
+          </a:fillRef>
+          <a:effectRef idx="2">
+            <a:schemeClr val="accent1"/>
+          </a:effectRef>
+          <a:fontRef idx="minor">
+            <a:schemeClr val="lt1"/>
+          </a:fontRef>
+        </p:style>
+        <p:txBody>
+          <a:bodyPr rtlCol="0" anchor="ctr"/>
+          <a:lstStyle/>
+          <a:p/>
+        </p:txBody>
+      </p:sp>
+      <p:sp>
+        <p:nvSpPr>
+          <p:cNvPr id="3" name="TextBox 2"/>
+          <p:cNvSpPr txBox="1"/>
+          <p:nvPr/>
+        </p:nvSpPr>
+        <p:spPr>
+          <a:xfrm>
+            <a:off x="566928" y="6355080"/>
+            <a:ext cx="6400800" cy="219456"/>
+          </a:xfrm>
+          <a:prstGeom prst="rect">
+            <a:avLst/>
+          </a:prstGeom>
+          <a:noFill/>
+        </p:spPr>
+        <p:txBody>
+          <a:bodyPr wrap="square" lIns="0" rIns="0" tIns="0" bIns="0" anchor="t">
+            <a:spAutoFit/>
+          </a:bodyPr>
+          <a:lstStyle/>
+          <a:p>
+            <a:pPr algn="l">
+              <a:lnSpc>
+                <a:spcPct val="135000"/>
+              </a:lnSpc>
+            </a:pPr>
+            <a:r>
+              <a:rPr sz="1200" b="0" i="0">
+                <a:solidFill>
+                  <a:srgbClr val="6E7175"/>
+                </a:solidFill>
+                <a:latin typeface="Verdana"/>
+              </a:rPr>
+              <a:t>A2 · C'est l'heure des nouvelles</a:t>
+            </a:r>
+          </a:p>
+        </p:txBody>
+      </p:sp>
+      <p:sp>
+        <p:nvSpPr>
+          <p:cNvPr id="4" name="TextBox 3"/>
+          <p:cNvSpPr txBox="1"/>
+          <p:nvPr/>
+        </p:nvSpPr>
+        <p:spPr>
+          <a:xfrm>
+            <a:off x="10710367" y="6355080"/>
+            <a:ext cx="914400" cy="219456"/>
+          </a:xfrm>
+          <a:prstGeom prst="rect">
+            <a:avLst/>
+          </a:prstGeom>
+          <a:noFill/>
+        </p:spPr>
+        <p:txBody>
+          <a:bodyPr wrap="square" lIns="0" rIns="0" tIns="0" bIns="0" anchor="t">
+            <a:spAutoFit/>
+          </a:bodyPr>
+          <a:lstStyle/>
+          <a:p>
+            <a:pPr algn="r">
+              <a:lnSpc>
+                <a:spcPct val="135000"/>
+              </a:lnSpc>
+            </a:pPr>
+            <a:r>
+              <a:rPr sz="1200" b="0" i="0">
+                <a:solidFill>
+                  <a:srgbClr val="6E7175"/>
+                </a:solidFill>
+                <a:latin typeface="Verdana"/>
+              </a:rPr>
+              <a:t>20</a:t>
+            </a:r>
+          </a:p>
+        </p:txBody>
+      </p:sp>
+      <p:sp>
+        <p:nvSpPr>
+          <p:cNvPr id="5" name="TextBox 4"/>
+          <p:cNvSpPr txBox="1"/>
+          <p:nvPr/>
+        </p:nvSpPr>
+        <p:spPr>
+          <a:xfrm>
+            <a:off x="566928" y="420624"/>
+            <a:ext cx="11057839" cy="237744"/>
+          </a:xfrm>
+          <a:prstGeom prst="rect">
+            <a:avLst/>
+          </a:prstGeom>
+          <a:noFill/>
+        </p:spPr>
+        <p:txBody>
+          <a:bodyPr wrap="square" lIns="0" rIns="0" tIns="0" bIns="0" anchor="t">
+            <a:spAutoFit/>
+          </a:bodyPr>
+          <a:lstStyle/>
+          <a:p>
+            <a:pPr algn="l">
+              <a:lnSpc>
+                <a:spcPct val="135000"/>
+              </a:lnSpc>
+            </a:pPr>
+            <a:r>
+              <a:rPr sz="1300" b="1" i="0" spc="156">
+                <a:solidFill>
+                  <a:srgbClr val="166534"/>
+                </a:solidFill>
+                <a:latin typeface="Verdana"/>
+              </a:rPr>
+              <a:t>PRATIQUE · 6 DE 6</a:t>
+            </a:r>
+          </a:p>
+        </p:txBody>
+      </p:sp>
+      <p:sp>
+        <p:nvSpPr>
+          <p:cNvPr id="6" name="TextBox 5"/>
+          <p:cNvSpPr txBox="1"/>
+          <p:nvPr/>
+        </p:nvSpPr>
+        <p:spPr>
+          <a:xfrm>
+            <a:off x="566928" y="749808"/>
+            <a:ext cx="11057839" cy="877824"/>
+          </a:xfrm>
+          <a:prstGeom prst="rect">
+            <a:avLst/>
+          </a:prstGeom>
+          <a:noFill/>
+        </p:spPr>
+        <p:txBody>
+          <a:bodyPr wrap="square" lIns="0" rIns="0" tIns="0" bIns="0" anchor="t">
+            <a:spAutoFit/>
+          </a:bodyPr>
+          <a:lstStyle/>
+          <a:p>
+            <a:pPr algn="l">
+              <a:lnSpc>
+                <a:spcPct val="115000"/>
+              </a:lnSpc>
+            </a:pPr>
+            <a:r>
+              <a:rPr sz="3400" b="1" i="0">
+                <a:solidFill>
+                  <a:srgbClr val="17181A"/>
+                </a:solidFill>
+                <a:latin typeface="Verdana"/>
+              </a:rPr>
+              <a:t>Trois phrases de nouvelle à lire à voix haute</a:t>
+            </a:r>
+          </a:p>
+        </p:txBody>
+      </p:sp>
+      <p:sp>
+        <p:nvSpPr>
+          <p:cNvPr id="7" name="TextBox 6"/>
+          <p:cNvSpPr txBox="1"/>
+          <p:nvPr/>
+        </p:nvSpPr>
+        <p:spPr>
+          <a:xfrm>
+            <a:off x="566928" y="1645920"/>
+            <a:ext cx="11057839" cy="329184"/>
+          </a:xfrm>
+          <a:prstGeom prst="rect">
+            <a:avLst/>
+          </a:prstGeom>
+          <a:noFill/>
+        </p:spPr>
+        <p:txBody>
+          <a:bodyPr wrap="square" lIns="0" rIns="0" tIns="0" bIns="0" anchor="t">
+            <a:spAutoFit/>
+          </a:bodyPr>
+          <a:lstStyle/>
+          <a:p>
+            <a:pPr algn="l">
+              <a:lnSpc>
+                <a:spcPct val="135000"/>
+              </a:lnSpc>
+            </a:pPr>
+            <a:r>
+              <a:rPr sz="1800" b="0" i="0">
+                <a:solidFill>
+                  <a:srgbClr val="6E7175"/>
+                </a:solidFill>
+                <a:latin typeface="Verdana"/>
+              </a:rPr>
+              <a:t>Chacun lit une phrase. Le groupe ne corrige que les s et les z.</a:t>
+            </a:r>
+          </a:p>
+        </p:txBody>
+      </p:sp>
+      <p:sp>
+        <p:nvSpPr>
+          <p:cNvPr id="8" name="Rounded Rectangle 7"/>
+          <p:cNvSpPr/>
+          <p:nvPr/>
+        </p:nvSpPr>
+        <p:spPr>
+          <a:xfrm>
+            <a:off x="566928" y="2139696"/>
+            <a:ext cx="11057839" cy="648716"/>
+          </a:xfrm>
+          <a:prstGeom prst="roundRect">
+            <a:avLst>
+              <a:gd name="adj" fmla="val 22552"/>
+            </a:avLst>
+          </a:prstGeom>
+          <a:solidFill>
+            <a:srgbClr val="FFFFFF"/>
+          </a:solidFill>
+          <a:ln w="12700">
+            <a:solidFill>
+              <a:srgbClr val="EAEAE8"/>
+            </a:solidFill>
+          </a:ln>
+          <a:effectLst/>
+        </p:spPr>
+        <p:style>
+          <a:lnRef idx="1">
+            <a:schemeClr val="accent1"/>
+          </a:lnRef>
+          <a:fillRef idx="3">
+            <a:schemeClr val="accent1"/>
+          </a:fillRef>
+          <a:effectRef idx="2">
+            <a:schemeClr val="accent1"/>
+          </a:effectRef>
+          <a:fontRef idx="minor">
+            <a:schemeClr val="lt1"/>
+          </a:fontRef>
+        </p:style>
+        <p:txBody>
+          <a:bodyPr rtlCol="0" anchor="ctr"/>
+          <a:lstStyle/>
+          <a:p/>
+        </p:txBody>
+      </p:sp>
+      <p:sp>
+        <p:nvSpPr>
+          <p:cNvPr id="9" name="Rounded Rectangle 8"/>
+          <p:cNvSpPr/>
+          <p:nvPr/>
+        </p:nvSpPr>
+        <p:spPr>
+          <a:xfrm>
+            <a:off x="841247" y="2281174"/>
+            <a:ext cx="365760" cy="365760"/>
+          </a:xfrm>
+          <a:prstGeom prst="roundRect">
+            <a:avLst>
+              <a:gd name="adj" fmla="val 32500"/>
+            </a:avLst>
+          </a:prstGeom>
+          <a:solidFill>
+            <a:srgbClr val="E3F1E7"/>
+          </a:solidFill>
+          <a:ln>
+            <a:noFill/>
+          </a:ln>
+          <a:effectLst/>
+        </p:spPr>
+        <p:style>
+          <a:lnRef idx="1">
+            <a:schemeClr val="accent1"/>
+          </a:lnRef>
+          <a:fillRef idx="3">
+            <a:schemeClr val="accent1"/>
+          </a:fillRef>
+          <a:effectRef idx="2">
+            <a:schemeClr val="accent1"/>
+          </a:effectRef>
+          <a:fontRef idx="minor">
+            <a:schemeClr val="lt1"/>
+          </a:fontRef>
+        </p:style>
+        <p:txBody>
+          <a:bodyPr rtlCol="0" anchor="ctr"/>
+          <a:lstStyle/>
+          <a:p/>
+        </p:txBody>
+      </p:sp>
+      <p:sp>
+        <p:nvSpPr>
+          <p:cNvPr id="10" name="TextBox 9"/>
+          <p:cNvSpPr txBox="1"/>
+          <p:nvPr/>
+        </p:nvSpPr>
+        <p:spPr>
+          <a:xfrm>
+            <a:off x="841247" y="2345182"/>
+            <a:ext cx="365760" cy="256032"/>
+          </a:xfrm>
+          <a:prstGeom prst="rect">
+            <a:avLst/>
+          </a:prstGeom>
+          <a:noFill/>
+        </p:spPr>
+        <p:txBody>
+          <a:bodyPr wrap="square" lIns="0" rIns="0" tIns="0" bIns="0" anchor="t">
+            <a:spAutoFit/>
+          </a:bodyPr>
+          <a:lstStyle/>
+          <a:p>
+            <a:pPr algn="ctr">
+              <a:lnSpc>
+                <a:spcPct val="135000"/>
+              </a:lnSpc>
+            </a:pPr>
+            <a:r>
+              <a:rPr sz="1500" b="1" i="0">
+                <a:solidFill>
+                  <a:srgbClr val="166534"/>
+                </a:solidFill>
+                <a:latin typeface="Verdana"/>
+              </a:rPr>
+              <a:t>1</a:t>
+            </a:r>
+          </a:p>
+        </p:txBody>
+      </p:sp>
+      <p:sp>
+        <p:nvSpPr>
+          <p:cNvPr id="11" name="TextBox 10"/>
+          <p:cNvSpPr txBox="1"/>
+          <p:nvPr/>
+        </p:nvSpPr>
+        <p:spPr>
+          <a:xfrm>
+            <a:off x="1344168" y="2295144"/>
+            <a:ext cx="10097719" cy="374396"/>
+          </a:xfrm>
+          <a:prstGeom prst="rect">
+            <a:avLst/>
+          </a:prstGeom>
+          <a:noFill/>
+        </p:spPr>
+        <p:txBody>
+          <a:bodyPr wrap="square" lIns="0" rIns="0" tIns="0" bIns="0" anchor="t">
+            <a:spAutoFit/>
+          </a:bodyPr>
+          <a:lstStyle/>
+          <a:p>
+            <a:pPr algn="l">
+              <a:lnSpc>
+                <a:spcPct val="140000"/>
+              </a:lnSpc>
+            </a:pPr>
+            <a:r>
+              <a:rPr sz="1900" b="0" i="0">
+                <a:solidFill>
+                  <a:srgbClr val="3A3D40"/>
+                </a:solidFill>
+                <a:latin typeface="Verdana"/>
+              </a:rPr>
+              <a:t>La voisine a retrouvé le chat de la fillette.</a:t>
+            </a:r>
+          </a:p>
+        </p:txBody>
+      </p:sp>
+      <p:sp>
+        <p:nvSpPr>
+          <p:cNvPr id="12" name="Rounded Rectangle 11"/>
+          <p:cNvSpPr/>
+          <p:nvPr/>
+        </p:nvSpPr>
+        <p:spPr>
+          <a:xfrm>
+            <a:off x="566928" y="2916428"/>
+            <a:ext cx="11057839" cy="648716"/>
+          </a:xfrm>
+          <a:prstGeom prst="roundRect">
+            <a:avLst>
+              <a:gd name="adj" fmla="val 22552"/>
+            </a:avLst>
+          </a:prstGeom>
+          <a:solidFill>
+            <a:srgbClr val="FFFFFF"/>
+          </a:solidFill>
+          <a:ln w="12700">
+            <a:solidFill>
+              <a:srgbClr val="EAEAE8"/>
+            </a:solidFill>
+          </a:ln>
+          <a:effectLst/>
+        </p:spPr>
+        <p:style>
+          <a:lnRef idx="1">
+            <a:schemeClr val="accent1"/>
+          </a:lnRef>
+          <a:fillRef idx="3">
+            <a:schemeClr val="accent1"/>
+          </a:fillRef>
+          <a:effectRef idx="2">
+            <a:schemeClr val="accent1"/>
+          </a:effectRef>
+          <a:fontRef idx="minor">
+            <a:schemeClr val="lt1"/>
+          </a:fontRef>
+        </p:style>
+        <p:txBody>
+          <a:bodyPr rtlCol="0" anchor="ctr"/>
+          <a:lstStyle/>
+          <a:p/>
+        </p:txBody>
+      </p:sp>
+      <p:sp>
+        <p:nvSpPr>
+          <p:cNvPr id="13" name="Rounded Rectangle 12"/>
+          <p:cNvSpPr/>
+          <p:nvPr/>
+        </p:nvSpPr>
+        <p:spPr>
+          <a:xfrm>
+            <a:off x="841247" y="3057905"/>
+            <a:ext cx="365760" cy="365760"/>
+          </a:xfrm>
+          <a:prstGeom prst="roundRect">
+            <a:avLst>
+              <a:gd name="adj" fmla="val 32500"/>
+            </a:avLst>
+          </a:prstGeom>
+          <a:solidFill>
+            <a:srgbClr val="E3F1E7"/>
+          </a:solidFill>
+          <a:ln>
+            <a:noFill/>
+          </a:ln>
+          <a:effectLst/>
+        </p:spPr>
+        <p:style>
+          <a:lnRef idx="1">
+            <a:schemeClr val="accent1"/>
+          </a:lnRef>
+          <a:fillRef idx="3">
+            <a:schemeClr val="accent1"/>
+          </a:fillRef>
+          <a:effectRef idx="2">
+            <a:schemeClr val="accent1"/>
+          </a:effectRef>
+          <a:fontRef idx="minor">
+            <a:schemeClr val="lt1"/>
+          </a:fontRef>
+        </p:style>
+        <p:txBody>
+          <a:bodyPr rtlCol="0" anchor="ctr"/>
+          <a:lstStyle/>
+          <a:p/>
+        </p:txBody>
+      </p:sp>
+      <p:sp>
+        <p:nvSpPr>
+          <p:cNvPr id="14" name="TextBox 13"/>
+          <p:cNvSpPr txBox="1"/>
+          <p:nvPr/>
+        </p:nvSpPr>
+        <p:spPr>
+          <a:xfrm>
+            <a:off x="841247" y="3121913"/>
+            <a:ext cx="365760" cy="256032"/>
+          </a:xfrm>
+          <a:prstGeom prst="rect">
+            <a:avLst/>
+          </a:prstGeom>
+          <a:noFill/>
+        </p:spPr>
+        <p:txBody>
+          <a:bodyPr wrap="square" lIns="0" rIns="0" tIns="0" bIns="0" anchor="t">
+            <a:spAutoFit/>
+          </a:bodyPr>
+          <a:lstStyle/>
+          <a:p>
+            <a:pPr algn="ctr">
+              <a:lnSpc>
+                <a:spcPct val="135000"/>
+              </a:lnSpc>
+            </a:pPr>
+            <a:r>
+              <a:rPr sz="1500" b="1" i="0">
+                <a:solidFill>
+                  <a:srgbClr val="166534"/>
+                </a:solidFill>
+                <a:latin typeface="Verdana"/>
+              </a:rPr>
+              <a:t>2</a:t>
+            </a:r>
+          </a:p>
+        </p:txBody>
+      </p:sp>
+      <p:sp>
+        <p:nvSpPr>
+          <p:cNvPr id="15" name="TextBox 14"/>
+          <p:cNvSpPr txBox="1"/>
+          <p:nvPr/>
+        </p:nvSpPr>
+        <p:spPr>
+          <a:xfrm>
+            <a:off x="1344168" y="3071876"/>
+            <a:ext cx="10097719" cy="374396"/>
+          </a:xfrm>
+          <a:prstGeom prst="rect">
+            <a:avLst/>
+          </a:prstGeom>
+          <a:noFill/>
+        </p:spPr>
+        <p:txBody>
+          <a:bodyPr wrap="square" lIns="0" rIns="0" tIns="0" bIns="0" anchor="t">
+            <a:spAutoFit/>
+          </a:bodyPr>
+          <a:lstStyle/>
+          <a:p>
+            <a:pPr algn="l">
+              <a:lnSpc>
+                <a:spcPct val="140000"/>
+              </a:lnSpc>
+            </a:pPr>
+            <a:r>
+              <a:rPr sz="1900" b="0" i="0">
+                <a:solidFill>
+                  <a:srgbClr val="3A3D40"/>
+                </a:solidFill>
+                <a:latin typeface="Verdana"/>
+              </a:rPr>
+              <a:t>Les élèves ont amassé deux cents paires de mitaines.</a:t>
+            </a:r>
+          </a:p>
+        </p:txBody>
+      </p:sp>
+      <p:sp>
+        <p:nvSpPr>
+          <p:cNvPr id="16" name="Rounded Rectangle 15"/>
+          <p:cNvSpPr/>
+          <p:nvPr/>
+        </p:nvSpPr>
+        <p:spPr>
+          <a:xfrm>
+            <a:off x="566928" y="3693160"/>
+            <a:ext cx="11057839" cy="648716"/>
+          </a:xfrm>
+          <a:prstGeom prst="roundRect">
+            <a:avLst>
+              <a:gd name="adj" fmla="val 22552"/>
+            </a:avLst>
+          </a:prstGeom>
+          <a:solidFill>
+            <a:srgbClr val="FFFFFF"/>
+          </a:solidFill>
+          <a:ln w="12700">
+            <a:solidFill>
+              <a:srgbClr val="EAEAE8"/>
+            </a:solidFill>
+          </a:ln>
+          <a:effectLst/>
+        </p:spPr>
+        <p:style>
+          <a:lnRef idx="1">
+            <a:schemeClr val="accent1"/>
+          </a:lnRef>
+          <a:fillRef idx="3">
+            <a:schemeClr val="accent1"/>
+          </a:fillRef>
+          <a:effectRef idx="2">
+            <a:schemeClr val="accent1"/>
+          </a:effectRef>
+          <a:fontRef idx="minor">
+            <a:schemeClr val="lt1"/>
+          </a:fontRef>
+        </p:style>
+        <p:txBody>
+          <a:bodyPr rtlCol="0" anchor="ctr"/>
+          <a:lstStyle/>
+          <a:p/>
+        </p:txBody>
+      </p:sp>
+      <p:sp>
+        <p:nvSpPr>
+          <p:cNvPr id="17" name="Rounded Rectangle 16"/>
+          <p:cNvSpPr/>
+          <p:nvPr/>
+        </p:nvSpPr>
+        <p:spPr>
+          <a:xfrm>
+            <a:off x="841247" y="3834638"/>
+            <a:ext cx="365760" cy="365760"/>
+          </a:xfrm>
+          <a:prstGeom prst="roundRect">
+            <a:avLst>
+              <a:gd name="adj" fmla="val 32500"/>
+            </a:avLst>
+          </a:prstGeom>
+          <a:solidFill>
+            <a:srgbClr val="E3F1E7"/>
+          </a:solidFill>
+          <a:ln>
+            <a:noFill/>
+          </a:ln>
+          <a:effectLst/>
+        </p:spPr>
+        <p:style>
+          <a:lnRef idx="1">
+            <a:schemeClr val="accent1"/>
+          </a:lnRef>
+          <a:fillRef idx="3">
+            <a:schemeClr val="accent1"/>
+          </a:fillRef>
+          <a:effectRef idx="2">
+            <a:schemeClr val="accent1"/>
+          </a:effectRef>
+          <a:fontRef idx="minor">
+            <a:schemeClr val="lt1"/>
+          </a:fontRef>
+        </p:style>
+        <p:txBody>
+          <a:bodyPr rtlCol="0" anchor="ctr"/>
+          <a:lstStyle/>
+          <a:p/>
+        </p:txBody>
+      </p:sp>
+      <p:sp>
+        <p:nvSpPr>
+          <p:cNvPr id="18" name="TextBox 17"/>
+          <p:cNvSpPr txBox="1"/>
+          <p:nvPr/>
+        </p:nvSpPr>
+        <p:spPr>
+          <a:xfrm>
+            <a:off x="841247" y="3898646"/>
+            <a:ext cx="365760" cy="256032"/>
+          </a:xfrm>
+          <a:prstGeom prst="rect">
+            <a:avLst/>
+          </a:prstGeom>
+          <a:noFill/>
+        </p:spPr>
+        <p:txBody>
+          <a:bodyPr wrap="square" lIns="0" rIns="0" tIns="0" bIns="0" anchor="t">
+            <a:spAutoFit/>
+          </a:bodyPr>
+          <a:lstStyle/>
+          <a:p>
+            <a:pPr algn="ctr">
+              <a:lnSpc>
+                <a:spcPct val="135000"/>
+              </a:lnSpc>
+            </a:pPr>
+            <a:r>
+              <a:rPr sz="1500" b="1" i="0">
+                <a:solidFill>
+                  <a:srgbClr val="166534"/>
+                </a:solidFill>
+                <a:latin typeface="Verdana"/>
+              </a:rPr>
+              <a:t>3</a:t>
+            </a:r>
+          </a:p>
+        </p:txBody>
+      </p:sp>
+      <p:sp>
+        <p:nvSpPr>
+          <p:cNvPr id="19" name="TextBox 18"/>
+          <p:cNvSpPr txBox="1"/>
+          <p:nvPr/>
+        </p:nvSpPr>
+        <p:spPr>
+          <a:xfrm>
+            <a:off x="1344168" y="3848608"/>
+            <a:ext cx="10097719" cy="374396"/>
+          </a:xfrm>
+          <a:prstGeom prst="rect">
+            <a:avLst/>
+          </a:prstGeom>
+          <a:noFill/>
+        </p:spPr>
+        <p:txBody>
+          <a:bodyPr wrap="square" lIns="0" rIns="0" tIns="0" bIns="0" anchor="t">
+            <a:spAutoFit/>
+          </a:bodyPr>
+          <a:lstStyle/>
+          <a:p>
+            <a:pPr algn="l">
+              <a:lnSpc>
+                <a:spcPct val="140000"/>
+              </a:lnSpc>
+            </a:pPr>
+            <a:r>
+              <a:rPr sz="1900" b="0" i="0">
+                <a:solidFill>
+                  <a:srgbClr val="3A3D40"/>
+                </a:solidFill>
+                <a:latin typeface="Verdana"/>
+              </a:rPr>
+              <a:t>La collecte organisée par la classe a eu un franc succès.</a:t>
+            </a:r>
+          </a:p>
+        </p:txBody>
+      </p:sp>
+    </p:spTree>
+  </p:cSld>
+  <p:clrMapOvr>
+    <a:masterClrMapping/>
+  </p:clrMapOvr>
+</p:sld>
+</file>
+
+<file path=ppt/slides/slide21.xml><?xml version="1.0" encoding="utf-8"?>
+<p:sld xmlns:a="http://schemas.openxmlformats.org/drawingml/2006/main" xmlns:p="http://schemas.openxmlformats.org/presentationml/2006/main" xmlns:r="http://schemas.openxmlformats.org/officeDocument/2006/relationships">
+  <p:cSld>
+    <p:spTree>
+      <p:nvGrpSpPr>
+        <p:cNvPr id="1" name=""/>
+        <p:cNvGrpSpPr/>
+        <p:nvPr/>
+      </p:nvGrpSpPr>
+      <p:grpSpPr/>
+      <p:sp>
+        <p:nvSpPr>
+          <p:cNvPr id="2" name="Rectangle 1"/>
+          <p:cNvSpPr/>
+          <p:nvPr/>
+        </p:nvSpPr>
+        <p:spPr>
+          <a:xfrm>
+            <a:off x="0" y="0"/>
+            <a:ext cx="12191695" cy="6858000"/>
+          </a:xfrm>
+          <a:prstGeom prst="rect">
+            <a:avLst/>
+          </a:prstGeom>
+          <a:solidFill>
+            <a:srgbClr val="F7F7F5"/>
+          </a:solidFill>
+          <a:ln>
+            <a:noFill/>
+          </a:ln>
+          <a:effectLst/>
+        </p:spPr>
+        <p:style>
+          <a:lnRef idx="1">
+            <a:schemeClr val="accent1"/>
+          </a:lnRef>
+          <a:fillRef idx="3">
+            <a:schemeClr val="accent1"/>
+          </a:fillRef>
+          <a:effectRef idx="2">
+            <a:schemeClr val="accent1"/>
+          </a:effectRef>
+          <a:fontRef idx="minor">
+            <a:schemeClr val="lt1"/>
+          </a:fontRef>
+        </p:style>
+        <p:txBody>
+          <a:bodyPr rtlCol="0" anchor="ctr"/>
+          <a:lstStyle/>
+          <a:p/>
+        </p:txBody>
+      </p:sp>
+      <p:sp>
+        <p:nvSpPr>
+          <p:cNvPr id="3" name="TextBox 2"/>
+          <p:cNvSpPr txBox="1"/>
+          <p:nvPr/>
+        </p:nvSpPr>
+        <p:spPr>
+          <a:xfrm>
+            <a:off x="566928" y="6355080"/>
+            <a:ext cx="6400800" cy="219456"/>
+          </a:xfrm>
+          <a:prstGeom prst="rect">
+            <a:avLst/>
+          </a:prstGeom>
+          <a:noFill/>
+        </p:spPr>
+        <p:txBody>
+          <a:bodyPr wrap="square" lIns="0" rIns="0" tIns="0" bIns="0" anchor="t">
+            <a:spAutoFit/>
+          </a:bodyPr>
+          <a:lstStyle/>
+          <a:p>
+            <a:pPr algn="l">
+              <a:lnSpc>
+                <a:spcPct val="135000"/>
+              </a:lnSpc>
+            </a:pPr>
+            <a:r>
+              <a:rPr sz="1200" b="0" i="0">
+                <a:solidFill>
+                  <a:srgbClr val="6E7175"/>
+                </a:solidFill>
+                <a:latin typeface="Verdana"/>
+              </a:rPr>
+              <a:t>A2 · C'est l'heure des nouvelles</a:t>
+            </a:r>
+          </a:p>
+        </p:txBody>
+      </p:sp>
+      <p:sp>
+        <p:nvSpPr>
+          <p:cNvPr id="4" name="TextBox 3"/>
+          <p:cNvSpPr txBox="1"/>
+          <p:nvPr/>
+        </p:nvSpPr>
+        <p:spPr>
+          <a:xfrm>
+            <a:off x="10710367" y="6355080"/>
+            <a:ext cx="914400" cy="219456"/>
+          </a:xfrm>
+          <a:prstGeom prst="rect">
+            <a:avLst/>
+          </a:prstGeom>
+          <a:noFill/>
+        </p:spPr>
+        <p:txBody>
+          <a:bodyPr wrap="square" lIns="0" rIns="0" tIns="0" bIns="0" anchor="t">
+            <a:spAutoFit/>
+          </a:bodyPr>
+          <a:lstStyle/>
+          <a:p>
+            <a:pPr algn="r">
+              <a:lnSpc>
+                <a:spcPct val="135000"/>
+              </a:lnSpc>
+            </a:pPr>
+            <a:r>
+              <a:rPr sz="1200" b="0" i="0">
+                <a:solidFill>
+                  <a:srgbClr val="6E7175"/>
+                </a:solidFill>
+                <a:latin typeface="Verdana"/>
+              </a:rPr>
+              <a:t>21</a:t>
+            </a:r>
+          </a:p>
+        </p:txBody>
+      </p:sp>
+      <p:sp>
+        <p:nvSpPr>
+          <p:cNvPr id="5" name="TextBox 4"/>
+          <p:cNvSpPr txBox="1"/>
+          <p:nvPr/>
+        </p:nvSpPr>
+        <p:spPr>
+          <a:xfrm>
+            <a:off x="566928" y="420624"/>
+            <a:ext cx="11057839" cy="237744"/>
+          </a:xfrm>
+          <a:prstGeom prst="rect">
+            <a:avLst/>
+          </a:prstGeom>
+          <a:noFill/>
+        </p:spPr>
+        <p:txBody>
+          <a:bodyPr wrap="square" lIns="0" rIns="0" tIns="0" bIns="0" anchor="t">
+            <a:spAutoFit/>
+          </a:bodyPr>
+          <a:lstStyle/>
+          <a:p>
+            <a:pPr algn="l">
+              <a:lnSpc>
+                <a:spcPct val="135000"/>
+              </a:lnSpc>
+            </a:pPr>
+            <a:r>
+              <a:rPr sz="1300" b="1" i="0" spc="156">
+                <a:solidFill>
+                  <a:srgbClr val="166534"/>
+                </a:solidFill>
+                <a:latin typeface="Verdana"/>
+              </a:rPr>
+              <a:t>CORRECTION</a:t>
+            </a:r>
+          </a:p>
+        </p:txBody>
+      </p:sp>
+      <p:sp>
+        <p:nvSpPr>
+          <p:cNvPr id="6" name="TextBox 5"/>
+          <p:cNvSpPr txBox="1"/>
+          <p:nvPr/>
+        </p:nvSpPr>
+        <p:spPr>
+          <a:xfrm>
+            <a:off x="566928" y="749808"/>
+            <a:ext cx="11057839" cy="877824"/>
+          </a:xfrm>
+          <a:prstGeom prst="rect">
+            <a:avLst/>
+          </a:prstGeom>
+          <a:noFill/>
+        </p:spPr>
+        <p:txBody>
+          <a:bodyPr wrap="square" lIns="0" rIns="0" tIns="0" bIns="0" anchor="t">
+            <a:spAutoFit/>
+          </a:bodyPr>
+          <a:lstStyle/>
+          <a:p>
+            <a:pPr algn="l">
+              <a:lnSpc>
+                <a:spcPct val="115000"/>
+              </a:lnSpc>
+            </a:pPr>
+            <a:r>
+              <a:rPr sz="3400" b="1" i="0">
+                <a:solidFill>
+                  <a:srgbClr val="17181A"/>
+                </a:solidFill>
+                <a:latin typeface="Verdana"/>
+              </a:rPr>
+              <a:t>Trois phrases de nouvelle à lire à voix haute</a:t>
+            </a:r>
+          </a:p>
+        </p:txBody>
+      </p:sp>
+      <p:sp>
+        <p:nvSpPr>
+          <p:cNvPr id="7" name="TextBox 6"/>
+          <p:cNvSpPr txBox="1"/>
+          <p:nvPr/>
+        </p:nvSpPr>
+        <p:spPr>
+          <a:xfrm>
+            <a:off x="566928" y="1645920"/>
+            <a:ext cx="11057839" cy="329184"/>
+          </a:xfrm>
+          <a:prstGeom prst="rect">
+            <a:avLst/>
+          </a:prstGeom>
+          <a:noFill/>
+        </p:spPr>
+        <p:txBody>
+          <a:bodyPr wrap="square" lIns="0" rIns="0" tIns="0" bIns="0" anchor="t">
+            <a:spAutoFit/>
+          </a:bodyPr>
+          <a:lstStyle/>
+          <a:p>
+            <a:pPr algn="l">
+              <a:lnSpc>
+                <a:spcPct val="135000"/>
+              </a:lnSpc>
+            </a:pPr>
+            <a:r>
+              <a:rPr sz="1800" b="0" i="0">
+                <a:solidFill>
+                  <a:srgbClr val="6E7175"/>
+                </a:solidFill>
+                <a:latin typeface="Verdana"/>
+              </a:rPr>
+              <a:t>Correction — on lit la réponse, on ne commente pas l'erreur.</a:t>
+            </a:r>
+          </a:p>
+        </p:txBody>
+      </p:sp>
+      <p:sp>
+        <p:nvSpPr>
+          <p:cNvPr id="8" name="Rounded Rectangle 7"/>
+          <p:cNvSpPr/>
+          <p:nvPr/>
+        </p:nvSpPr>
+        <p:spPr>
+          <a:xfrm>
+            <a:off x="566928" y="2139696"/>
+            <a:ext cx="11057839" cy="648716"/>
+          </a:xfrm>
+          <a:prstGeom prst="roundRect">
+            <a:avLst>
+              <a:gd name="adj" fmla="val 22552"/>
+            </a:avLst>
+          </a:prstGeom>
+          <a:solidFill>
+            <a:srgbClr val="E6F5EE"/>
+          </a:solidFill>
+          <a:ln w="12700">
+            <a:solidFill>
+              <a:srgbClr val="EAEAE8"/>
+            </a:solidFill>
+          </a:ln>
+          <a:effectLst/>
+        </p:spPr>
+        <p:style>
+          <a:lnRef idx="1">
+            <a:schemeClr val="accent1"/>
+          </a:lnRef>
+          <a:fillRef idx="3">
+            <a:schemeClr val="accent1"/>
+          </a:fillRef>
+          <a:effectRef idx="2">
+            <a:schemeClr val="accent1"/>
+          </a:effectRef>
+          <a:fontRef idx="minor">
+            <a:schemeClr val="lt1"/>
+          </a:fontRef>
+        </p:style>
+        <p:txBody>
+          <a:bodyPr rtlCol="0" anchor="ctr"/>
+          <a:lstStyle/>
+          <a:p/>
+        </p:txBody>
+      </p:sp>
+      <p:sp>
+        <p:nvSpPr>
+          <p:cNvPr id="9" name="Rounded Rectangle 8"/>
+          <p:cNvSpPr/>
+          <p:nvPr/>
+        </p:nvSpPr>
+        <p:spPr>
+          <a:xfrm>
+            <a:off x="841247" y="2281174"/>
+            <a:ext cx="365760" cy="365760"/>
+          </a:xfrm>
+          <a:prstGeom prst="roundRect">
+            <a:avLst>
+              <a:gd name="adj" fmla="val 32500"/>
+            </a:avLst>
+          </a:prstGeom>
+          <a:solidFill>
+            <a:srgbClr val="E3F1E7"/>
+          </a:solidFill>
+          <a:ln>
+            <a:noFill/>
+          </a:ln>
+          <a:effectLst/>
+        </p:spPr>
+        <p:style>
+          <a:lnRef idx="1">
+            <a:schemeClr val="accent1"/>
+          </a:lnRef>
+          <a:fillRef idx="3">
+            <a:schemeClr val="accent1"/>
+          </a:fillRef>
+          <a:effectRef idx="2">
+            <a:schemeClr val="accent1"/>
+          </a:effectRef>
+          <a:fontRef idx="minor">
+            <a:schemeClr val="lt1"/>
+          </a:fontRef>
+        </p:style>
+        <p:txBody>
+          <a:bodyPr rtlCol="0" anchor="ctr"/>
+          <a:lstStyle/>
+          <a:p/>
+        </p:txBody>
+      </p:sp>
+      <p:sp>
+        <p:nvSpPr>
+          <p:cNvPr id="10" name="TextBox 9"/>
+          <p:cNvSpPr txBox="1"/>
+          <p:nvPr/>
+        </p:nvSpPr>
+        <p:spPr>
+          <a:xfrm>
+            <a:off x="841247" y="2345182"/>
+            <a:ext cx="365760" cy="256032"/>
+          </a:xfrm>
+          <a:prstGeom prst="rect">
+            <a:avLst/>
+          </a:prstGeom>
+          <a:noFill/>
+        </p:spPr>
+        <p:txBody>
+          <a:bodyPr wrap="square" lIns="0" rIns="0" tIns="0" bIns="0" anchor="t">
+            <a:spAutoFit/>
+          </a:bodyPr>
+          <a:lstStyle/>
+          <a:p>
+            <a:pPr algn="ctr">
+              <a:lnSpc>
+                <a:spcPct val="135000"/>
+              </a:lnSpc>
+            </a:pPr>
+            <a:r>
+              <a:rPr sz="1500" b="1" i="0">
+                <a:solidFill>
+                  <a:srgbClr val="166534"/>
+                </a:solidFill>
+                <a:latin typeface="Verdana"/>
+              </a:rPr>
+              <a:t>1</a:t>
+            </a:r>
+          </a:p>
+        </p:txBody>
+      </p:sp>
+      <p:sp>
+        <p:nvSpPr>
+          <p:cNvPr id="11" name="TextBox 10"/>
+          <p:cNvSpPr txBox="1"/>
+          <p:nvPr/>
+        </p:nvSpPr>
+        <p:spPr>
+          <a:xfrm>
+            <a:off x="1344168" y="2295144"/>
+            <a:ext cx="10097719" cy="374396"/>
+          </a:xfrm>
+          <a:prstGeom prst="rect">
+            <a:avLst/>
+          </a:prstGeom>
+          <a:noFill/>
+        </p:spPr>
+        <p:txBody>
+          <a:bodyPr wrap="square" lIns="0" rIns="0" tIns="0" bIns="0" anchor="t">
+            <a:spAutoFit/>
+          </a:bodyPr>
+          <a:lstStyle/>
+          <a:p>
+            <a:pPr algn="l">
+              <a:lnSpc>
+                <a:spcPct val="140000"/>
+              </a:lnSpc>
+            </a:pPr>
+            <a:r>
+              <a:rPr sz="1900" b="0" i="0">
+                <a:solidFill>
+                  <a:srgbClr val="3A3D40"/>
+                </a:solidFill>
+                <a:latin typeface="Verdana"/>
+              </a:rPr>
+              <a:t>La voisine a retrouvé le chat de la fillette.   </a:t>
+            </a:r>
+            <a:r>
+              <a:rPr sz="1900" b="1" i="0">
+                <a:solidFill>
+                  <a:srgbClr val="07734A"/>
+                </a:solidFill>
+                <a:latin typeface="Verdana"/>
+              </a:rPr>
+              <a:t>» z</a:t>
+            </a:r>
+          </a:p>
+        </p:txBody>
+      </p:sp>
+      <p:sp>
+        <p:nvSpPr>
+          <p:cNvPr id="12" name="Rounded Rectangle 11"/>
+          <p:cNvSpPr/>
+          <p:nvPr/>
+        </p:nvSpPr>
+        <p:spPr>
+          <a:xfrm>
+            <a:off x="566928" y="2916428"/>
+            <a:ext cx="11057839" cy="648716"/>
+          </a:xfrm>
+          <a:prstGeom prst="roundRect">
+            <a:avLst>
+              <a:gd name="adj" fmla="val 22552"/>
+            </a:avLst>
+          </a:prstGeom>
+          <a:solidFill>
+            <a:srgbClr val="E6F5EE"/>
+          </a:solidFill>
+          <a:ln w="12700">
+            <a:solidFill>
+              <a:srgbClr val="EAEAE8"/>
+            </a:solidFill>
+          </a:ln>
+          <a:effectLst/>
+        </p:spPr>
+        <p:style>
+          <a:lnRef idx="1">
+            <a:schemeClr val="accent1"/>
+          </a:lnRef>
+          <a:fillRef idx="3">
+            <a:schemeClr val="accent1"/>
+          </a:fillRef>
+          <a:effectRef idx="2">
+            <a:schemeClr val="accent1"/>
+          </a:effectRef>
+          <a:fontRef idx="minor">
+            <a:schemeClr val="lt1"/>
+          </a:fontRef>
+        </p:style>
+        <p:txBody>
+          <a:bodyPr rtlCol="0" anchor="ctr"/>
+          <a:lstStyle/>
+          <a:p/>
+        </p:txBody>
+      </p:sp>
+      <p:sp>
+        <p:nvSpPr>
+          <p:cNvPr id="13" name="Rounded Rectangle 12"/>
+          <p:cNvSpPr/>
+          <p:nvPr/>
+        </p:nvSpPr>
+        <p:spPr>
+          <a:xfrm>
+            <a:off x="841247" y="3057905"/>
+            <a:ext cx="365760" cy="365760"/>
+          </a:xfrm>
+          <a:prstGeom prst="roundRect">
+            <a:avLst>
+              <a:gd name="adj" fmla="val 32500"/>
+            </a:avLst>
+          </a:prstGeom>
+          <a:solidFill>
+            <a:srgbClr val="E3F1E7"/>
+          </a:solidFill>
+          <a:ln>
+            <a:noFill/>
+          </a:ln>
+          <a:effectLst/>
+        </p:spPr>
+        <p:style>
+          <a:lnRef idx="1">
+            <a:schemeClr val="accent1"/>
+          </a:lnRef>
+          <a:fillRef idx="3">
+            <a:schemeClr val="accent1"/>
+          </a:fillRef>
+          <a:effectRef idx="2">
+            <a:schemeClr val="accent1"/>
+          </a:effectRef>
+          <a:fontRef idx="minor">
+            <a:schemeClr val="lt1"/>
+          </a:fontRef>
+        </p:style>
+        <p:txBody>
+          <a:bodyPr rtlCol="0" anchor="ctr"/>
+          <a:lstStyle/>
+          <a:p/>
+        </p:txBody>
+      </p:sp>
+      <p:sp>
+        <p:nvSpPr>
+          <p:cNvPr id="14" name="TextBox 13"/>
+          <p:cNvSpPr txBox="1"/>
+          <p:nvPr/>
+        </p:nvSpPr>
+        <p:spPr>
+          <a:xfrm>
+            <a:off x="841247" y="3121913"/>
+            <a:ext cx="365760" cy="256032"/>
+          </a:xfrm>
+          <a:prstGeom prst="rect">
+            <a:avLst/>
+          </a:prstGeom>
+          <a:noFill/>
+        </p:spPr>
+        <p:txBody>
+          <a:bodyPr wrap="square" lIns="0" rIns="0" tIns="0" bIns="0" anchor="t">
+            <a:spAutoFit/>
+          </a:bodyPr>
+          <a:lstStyle/>
+          <a:p>
+            <a:pPr algn="ctr">
+              <a:lnSpc>
+                <a:spcPct val="135000"/>
+              </a:lnSpc>
+            </a:pPr>
+            <a:r>
+              <a:rPr sz="1500" b="1" i="0">
+                <a:solidFill>
+                  <a:srgbClr val="166534"/>
+                </a:solidFill>
+                <a:latin typeface="Verdana"/>
+              </a:rPr>
+              <a:t>2</a:t>
+            </a:r>
+          </a:p>
+        </p:txBody>
+      </p:sp>
+      <p:sp>
+        <p:nvSpPr>
+          <p:cNvPr id="15" name="TextBox 14"/>
+          <p:cNvSpPr txBox="1"/>
+          <p:nvPr/>
+        </p:nvSpPr>
+        <p:spPr>
+          <a:xfrm>
+            <a:off x="1344168" y="3071876"/>
+            <a:ext cx="10097719" cy="374396"/>
+          </a:xfrm>
+          <a:prstGeom prst="rect">
+            <a:avLst/>
+          </a:prstGeom>
+          <a:noFill/>
+        </p:spPr>
+        <p:txBody>
+          <a:bodyPr wrap="square" lIns="0" rIns="0" tIns="0" bIns="0" anchor="t">
+            <a:spAutoFit/>
+          </a:bodyPr>
+          <a:lstStyle/>
+          <a:p>
+            <a:pPr algn="l">
+              <a:lnSpc>
+                <a:spcPct val="140000"/>
+              </a:lnSpc>
+            </a:pPr>
+            <a:r>
+              <a:rPr sz="1900" b="0" i="0">
+                <a:solidFill>
+                  <a:srgbClr val="3A3D40"/>
+                </a:solidFill>
+                <a:latin typeface="Verdana"/>
+              </a:rPr>
+              <a:t>Les élèves ont amassé deux cents paires de mitaines.   </a:t>
+            </a:r>
+            <a:r>
+              <a:rPr sz="1900" b="1" i="0">
+                <a:solidFill>
+                  <a:srgbClr val="07734A"/>
+                </a:solidFill>
+                <a:latin typeface="Verdana"/>
+              </a:rPr>
+              <a:t>» s · s</a:t>
+            </a:r>
+          </a:p>
+        </p:txBody>
+      </p:sp>
+      <p:sp>
+        <p:nvSpPr>
+          <p:cNvPr id="16" name="Rounded Rectangle 15"/>
+          <p:cNvSpPr/>
+          <p:nvPr/>
+        </p:nvSpPr>
+        <p:spPr>
+          <a:xfrm>
+            <a:off x="566928" y="3693160"/>
+            <a:ext cx="11057839" cy="648716"/>
+          </a:xfrm>
+          <a:prstGeom prst="roundRect">
+            <a:avLst>
+              <a:gd name="adj" fmla="val 22552"/>
+            </a:avLst>
+          </a:prstGeom>
+          <a:solidFill>
+            <a:srgbClr val="E6F5EE"/>
+          </a:solidFill>
+          <a:ln w="12700">
+            <a:solidFill>
+              <a:srgbClr val="EAEAE8"/>
+            </a:solidFill>
+          </a:ln>
+          <a:effectLst/>
+        </p:spPr>
+        <p:style>
+          <a:lnRef idx="1">
+            <a:schemeClr val="accent1"/>
+          </a:lnRef>
+          <a:fillRef idx="3">
+            <a:schemeClr val="accent1"/>
+          </a:fillRef>
+          <a:effectRef idx="2">
+            <a:schemeClr val="accent1"/>
+          </a:effectRef>
+          <a:fontRef idx="minor">
+            <a:schemeClr val="lt1"/>
+          </a:fontRef>
+        </p:style>
+        <p:txBody>
+          <a:bodyPr rtlCol="0" anchor="ctr"/>
+          <a:lstStyle/>
+          <a:p/>
+        </p:txBody>
+      </p:sp>
+      <p:sp>
+        <p:nvSpPr>
+          <p:cNvPr id="17" name="Rounded Rectangle 16"/>
+          <p:cNvSpPr/>
+          <p:nvPr/>
+        </p:nvSpPr>
+        <p:spPr>
+          <a:xfrm>
+            <a:off x="841247" y="3834638"/>
+            <a:ext cx="365760" cy="365760"/>
+          </a:xfrm>
+          <a:prstGeom prst="roundRect">
+            <a:avLst>
+              <a:gd name="adj" fmla="val 32500"/>
+            </a:avLst>
+          </a:prstGeom>
+          <a:solidFill>
+            <a:srgbClr val="E3F1E7"/>
+          </a:solidFill>
+          <a:ln>
+            <a:noFill/>
+          </a:ln>
+          <a:effectLst/>
+        </p:spPr>
+        <p:style>
+          <a:lnRef idx="1">
+            <a:schemeClr val="accent1"/>
+          </a:lnRef>
+          <a:fillRef idx="3">
+            <a:schemeClr val="accent1"/>
+          </a:fillRef>
+          <a:effectRef idx="2">
+            <a:schemeClr val="accent1"/>
+          </a:effectRef>
+          <a:fontRef idx="minor">
+            <a:schemeClr val="lt1"/>
+          </a:fontRef>
+        </p:style>
+        <p:txBody>
+          <a:bodyPr rtlCol="0" anchor="ctr"/>
+          <a:lstStyle/>
+          <a:p/>
+        </p:txBody>
+      </p:sp>
+      <p:sp>
+        <p:nvSpPr>
+          <p:cNvPr id="18" name="TextBox 17"/>
+          <p:cNvSpPr txBox="1"/>
+          <p:nvPr/>
+        </p:nvSpPr>
+        <p:spPr>
+          <a:xfrm>
+            <a:off x="841247" y="3898646"/>
+            <a:ext cx="365760" cy="256032"/>
+          </a:xfrm>
+          <a:prstGeom prst="rect">
+            <a:avLst/>
+          </a:prstGeom>
+          <a:noFill/>
+        </p:spPr>
+        <p:txBody>
+          <a:bodyPr wrap="square" lIns="0" rIns="0" tIns="0" bIns="0" anchor="t">
+            <a:spAutoFit/>
+          </a:bodyPr>
+          <a:lstStyle/>
+          <a:p>
+            <a:pPr algn="ctr">
+              <a:lnSpc>
+                <a:spcPct val="135000"/>
+              </a:lnSpc>
+            </a:pPr>
+            <a:r>
+              <a:rPr sz="1500" b="1" i="0">
+                <a:solidFill>
+                  <a:srgbClr val="166534"/>
+                </a:solidFill>
+                <a:latin typeface="Verdana"/>
+              </a:rPr>
+              <a:t>3</a:t>
+            </a:r>
+          </a:p>
+        </p:txBody>
+      </p:sp>
+      <p:sp>
+        <p:nvSpPr>
+          <p:cNvPr id="19" name="TextBox 18"/>
+          <p:cNvSpPr txBox="1"/>
+          <p:nvPr/>
+        </p:nvSpPr>
+        <p:spPr>
+          <a:xfrm>
+            <a:off x="1344168" y="3848608"/>
+            <a:ext cx="10097719" cy="374396"/>
+          </a:xfrm>
+          <a:prstGeom prst="rect">
+            <a:avLst/>
+          </a:prstGeom>
+          <a:noFill/>
+        </p:spPr>
+        <p:txBody>
+          <a:bodyPr wrap="square" lIns="0" rIns="0" tIns="0" bIns="0" anchor="t">
+            <a:spAutoFit/>
+          </a:bodyPr>
+          <a:lstStyle/>
+          <a:p>
+            <a:pPr algn="l">
+              <a:lnSpc>
+                <a:spcPct val="140000"/>
+              </a:lnSpc>
+            </a:pPr>
+            <a:r>
+              <a:rPr sz="1900" b="0" i="0">
+                <a:solidFill>
+                  <a:srgbClr val="3A3D40"/>
+                </a:solidFill>
+                <a:latin typeface="Verdana"/>
+              </a:rPr>
+              <a:t>La collecte organisée par la classe a eu un franc succès.   </a:t>
+            </a:r>
+            <a:r>
+              <a:rPr sz="1900" b="1" i="0">
+                <a:solidFill>
+                  <a:srgbClr val="07734A"/>
+                </a:solidFill>
+                <a:latin typeface="Verdana"/>
+              </a:rPr>
+              <a:t>» z · s</a:t>
+            </a:r>
+          </a:p>
+        </p:txBody>
+      </p:sp>
+    </p:spTree>
+  </p:cSld>
+  <p:clrMapOvr>
+    <a:masterClrMapping/>
+  </p:clrMapOvr>
+</p:sld>
+</file>
+
+<file path=ppt/slides/slide22.xml><?xml version="1.0" encoding="utf-8"?>
+<p:sld xmlns:a="http://schemas.openxmlformats.org/drawingml/2006/main" xmlns:p="http://schemas.openxmlformats.org/presentationml/2006/main" xmlns:r="http://schemas.openxmlformats.org/officeDocument/2006/relationships">
+  <p:cSld>
+    <p:spTree>
+      <p:nvGrpSpPr>
+        <p:cNvPr id="1" name=""/>
+        <p:cNvGrpSpPr/>
+        <p:nvPr/>
+      </p:nvGrpSpPr>
+      <p:grpSpPr/>
+      <p:sp>
+        <p:nvSpPr>
+          <p:cNvPr id="2" name="Rectangle 1"/>
+          <p:cNvSpPr/>
+          <p:nvPr/>
+        </p:nvSpPr>
+        <p:spPr>
+          <a:xfrm>
+            <a:off x="0" y="0"/>
+            <a:ext cx="12191695" cy="6858000"/>
+          </a:xfrm>
+          <a:prstGeom prst="rect">
+            <a:avLst/>
+          </a:prstGeom>
+          <a:solidFill>
+            <a:srgbClr val="F7F7F5"/>
+          </a:solidFill>
+          <a:ln>
+            <a:noFill/>
+          </a:ln>
+          <a:effectLst/>
+        </p:spPr>
+        <p:style>
+          <a:lnRef idx="1">
+            <a:schemeClr val="accent1"/>
+          </a:lnRef>
+          <a:fillRef idx="3">
+            <a:schemeClr val="accent1"/>
+          </a:fillRef>
+          <a:effectRef idx="2">
+            <a:schemeClr val="accent1"/>
+          </a:effectRef>
+          <a:fontRef idx="minor">
+            <a:schemeClr val="lt1"/>
+          </a:fontRef>
+        </p:style>
+        <p:txBody>
+          <a:bodyPr rtlCol="0" anchor="ctr"/>
+          <a:lstStyle/>
+          <a:p/>
+        </p:txBody>
+      </p:sp>
+      <p:sp>
+        <p:nvSpPr>
+          <p:cNvPr id="3" name="TextBox 2"/>
+          <p:cNvSpPr txBox="1"/>
+          <p:nvPr/>
+        </p:nvSpPr>
+        <p:spPr>
+          <a:xfrm>
+            <a:off x="566928" y="6355080"/>
+            <a:ext cx="6400800" cy="219456"/>
+          </a:xfrm>
+          <a:prstGeom prst="rect">
+            <a:avLst/>
+          </a:prstGeom>
+          <a:noFill/>
+        </p:spPr>
+        <p:txBody>
+          <a:bodyPr wrap="square" lIns="0" rIns="0" tIns="0" bIns="0" anchor="t">
+            <a:spAutoFit/>
+          </a:bodyPr>
+          <a:lstStyle/>
+          <a:p>
+            <a:pPr algn="l">
+              <a:lnSpc>
+                <a:spcPct val="135000"/>
+              </a:lnSpc>
+            </a:pPr>
+            <a:r>
+              <a:rPr sz="1200" b="0" i="0">
+                <a:solidFill>
+                  <a:srgbClr val="6E7175"/>
+                </a:solidFill>
+                <a:latin typeface="Verdana"/>
+              </a:rPr>
+              <a:t>A2 · C'est l'heure des nouvelles</a:t>
+            </a:r>
+          </a:p>
+        </p:txBody>
+      </p:sp>
+      <p:sp>
+        <p:nvSpPr>
+          <p:cNvPr id="4" name="TextBox 3"/>
+          <p:cNvSpPr txBox="1"/>
+          <p:nvPr/>
+        </p:nvSpPr>
+        <p:spPr>
+          <a:xfrm>
+            <a:off x="10710367" y="6355080"/>
+            <a:ext cx="914400" cy="219456"/>
+          </a:xfrm>
+          <a:prstGeom prst="rect">
+            <a:avLst/>
+          </a:prstGeom>
+          <a:noFill/>
+        </p:spPr>
+        <p:txBody>
+          <a:bodyPr wrap="square" lIns="0" rIns="0" tIns="0" bIns="0" anchor="t">
+            <a:spAutoFit/>
+          </a:bodyPr>
+          <a:lstStyle/>
+          <a:p>
+            <a:pPr algn="r">
+              <a:lnSpc>
+                <a:spcPct val="135000"/>
+              </a:lnSpc>
+            </a:pPr>
+            <a:r>
+              <a:rPr sz="1200" b="0" i="0">
+                <a:solidFill>
+                  <a:srgbClr val="6E7175"/>
+                </a:solidFill>
+                <a:latin typeface="Verdana"/>
+              </a:rPr>
+              <a:t>22</a:t>
+            </a:r>
+          </a:p>
+        </p:txBody>
+      </p:sp>
+      <p:sp>
+        <p:nvSpPr>
+          <p:cNvPr id="5" name="Rectangle 4"/>
+          <p:cNvSpPr/>
+          <p:nvPr/>
+        </p:nvSpPr>
+        <p:spPr>
+          <a:xfrm>
+            <a:off x="0" y="0"/>
+            <a:ext cx="12191695" cy="6858000"/>
+          </a:xfrm>
+          <a:prstGeom prst="rect">
+            <a:avLst/>
+          </a:prstGeom>
+          <a:solidFill>
+            <a:srgbClr val="17181A"/>
+          </a:solidFill>
+          <a:ln>
+            <a:noFill/>
+          </a:ln>
+          <a:effectLst/>
+        </p:spPr>
+        <p:style>
+          <a:lnRef idx="1">
+            <a:schemeClr val="accent1"/>
+          </a:lnRef>
+          <a:fillRef idx="3">
+            <a:schemeClr val="accent1"/>
+          </a:fillRef>
+          <a:effectRef idx="2">
+            <a:schemeClr val="accent1"/>
+          </a:effectRef>
+          <a:fontRef idx="minor">
+            <a:schemeClr val="lt1"/>
+          </a:fontRef>
+        </p:style>
+        <p:txBody>
+          <a:bodyPr rtlCol="0" anchor="ctr"/>
+          <a:lstStyle/>
+          <a:p/>
+        </p:txBody>
+      </p:sp>
+      <p:sp>
+        <p:nvSpPr>
+          <p:cNvPr id="6" name="TextBox 5"/>
+          <p:cNvSpPr txBox="1"/>
+          <p:nvPr/>
+        </p:nvSpPr>
+        <p:spPr>
+          <a:xfrm>
+            <a:off x="566928" y="1051560"/>
+            <a:ext cx="11057839" cy="274320"/>
+          </a:xfrm>
+          <a:prstGeom prst="rect">
+            <a:avLst/>
+          </a:prstGeom>
+          <a:noFill/>
+        </p:spPr>
+        <p:txBody>
+          <a:bodyPr wrap="square" lIns="0" rIns="0" tIns="0" bIns="0" anchor="t">
+            <a:spAutoFit/>
+          </a:bodyPr>
+          <a:lstStyle/>
+          <a:p>
+            <a:pPr algn="l">
+              <a:lnSpc>
+                <a:spcPct val="135000"/>
+              </a:lnSpc>
+            </a:pPr>
+            <a:r>
+              <a:rPr sz="1300" b="1" i="0" spc="156">
+                <a:solidFill>
+                  <a:srgbClr val="FFFFFF"/>
+                </a:solidFill>
+                <a:latin typeface="Verdana"/>
+              </a:rPr>
+              <a:t>BILLET DE SORTIE</a:t>
+            </a:r>
+          </a:p>
+        </p:txBody>
+      </p:sp>
+      <p:sp>
+        <p:nvSpPr>
+          <p:cNvPr id="7" name="TextBox 6"/>
+          <p:cNvSpPr txBox="1"/>
+          <p:nvPr/>
+        </p:nvSpPr>
+        <p:spPr>
+          <a:xfrm>
+            <a:off x="566928" y="1572768"/>
+            <a:ext cx="9777679" cy="2103120"/>
+          </a:xfrm>
+          <a:prstGeom prst="rect">
+            <a:avLst/>
+          </a:prstGeom>
+          <a:noFill/>
+        </p:spPr>
+        <p:txBody>
+          <a:bodyPr wrap="square" lIns="0" rIns="0" tIns="0" bIns="0" anchor="t">
+            <a:spAutoFit/>
+          </a:bodyPr>
+          <a:lstStyle/>
+          <a:p>
+            <a:pPr algn="l">
+              <a:lnSpc>
+                <a:spcPct val="125000"/>
+              </a:lnSpc>
+            </a:pPr>
+            <a:r>
+              <a:rPr sz="3400" b="1" i="0">
+                <a:solidFill>
+                  <a:srgbClr val="FFFFFF"/>
+                </a:solidFill>
+                <a:latin typeface="Verdana"/>
+              </a:rPr>
+              <a:t>Écrivez quatre titres de nouvelles, un par catégorie.</a:t>
+            </a:r>
+          </a:p>
+        </p:txBody>
+      </p:sp>
+      <p:sp>
+        <p:nvSpPr>
+          <p:cNvPr id="8" name="Rounded Rectangle 7"/>
+          <p:cNvSpPr/>
+          <p:nvPr/>
+        </p:nvSpPr>
+        <p:spPr>
+          <a:xfrm>
+            <a:off x="566928" y="3931920"/>
+            <a:ext cx="11057839" cy="666496"/>
+          </a:xfrm>
+          <a:prstGeom prst="roundRect">
+            <a:avLst>
+              <a:gd name="adj" fmla="val 13719"/>
+            </a:avLst>
+          </a:prstGeom>
+          <a:solidFill>
+            <a:srgbClr val="2A2C2F"/>
+          </a:solidFill>
+          <a:ln>
+            <a:noFill/>
+          </a:ln>
+          <a:effectLst/>
+        </p:spPr>
+        <p:style>
+          <a:lnRef idx="1">
+            <a:schemeClr val="accent1"/>
+          </a:lnRef>
+          <a:fillRef idx="3">
+            <a:schemeClr val="accent1"/>
+          </a:fillRef>
+          <a:effectRef idx="2">
+            <a:schemeClr val="accent1"/>
+          </a:effectRef>
+          <a:fontRef idx="minor">
+            <a:schemeClr val="lt1"/>
+          </a:fontRef>
+        </p:style>
+        <p:txBody>
+          <a:bodyPr rtlCol="0" anchor="ctr"/>
+          <a:lstStyle/>
+          <a:p/>
+        </p:txBody>
+      </p:sp>
+      <p:sp>
+        <p:nvSpPr>
+          <p:cNvPr id="9" name="TextBox 8"/>
+          <p:cNvSpPr txBox="1"/>
+          <p:nvPr/>
+        </p:nvSpPr>
+        <p:spPr>
+          <a:xfrm>
+            <a:off x="932688" y="4087368"/>
+            <a:ext cx="10051999" cy="392176"/>
+          </a:xfrm>
+          <a:prstGeom prst="rect">
+            <a:avLst/>
+          </a:prstGeom>
+          <a:noFill/>
+        </p:spPr>
+        <p:txBody>
+          <a:bodyPr wrap="square" lIns="0" rIns="0" tIns="0" bIns="0" anchor="t">
+            <a:spAutoFit/>
+          </a:bodyPr>
+          <a:lstStyle/>
+          <a:p>
+            <a:pPr algn="l">
+              <a:lnSpc>
+                <a:spcPct val="140000"/>
+              </a:lnSpc>
+            </a:pPr>
+            <a:r>
+              <a:rPr sz="2000" b="0" i="0">
+                <a:solidFill>
+                  <a:srgbClr val="FFFFFF"/>
+                </a:solidFill>
+                <a:latin typeface="Verdana"/>
+              </a:rPr>
+              <a:t>Une régionale, une nationale, une internationale, un fait divers.</a:t>
+            </a:r>
+          </a:p>
+        </p:txBody>
+      </p:sp>
+      <p:sp>
+        <p:nvSpPr>
+          <p:cNvPr id="10" name="Rounded Rectangle 9"/>
+          <p:cNvSpPr/>
+          <p:nvPr/>
+        </p:nvSpPr>
+        <p:spPr>
+          <a:xfrm>
+            <a:off x="566928" y="4680712"/>
+            <a:ext cx="11057839" cy="666496"/>
+          </a:xfrm>
+          <a:prstGeom prst="roundRect">
+            <a:avLst>
+              <a:gd name="adj" fmla="val 13719"/>
+            </a:avLst>
+          </a:prstGeom>
+          <a:solidFill>
+            <a:srgbClr val="2A2C2F"/>
+          </a:solidFill>
+          <a:ln>
+            <a:noFill/>
+          </a:ln>
+          <a:effectLst/>
+        </p:spPr>
+        <p:style>
+          <a:lnRef idx="1">
+            <a:schemeClr val="accent1"/>
+          </a:lnRef>
+          <a:fillRef idx="3">
+            <a:schemeClr val="accent1"/>
+          </a:fillRef>
+          <a:effectRef idx="2">
+            <a:schemeClr val="accent1"/>
+          </a:effectRef>
+          <a:fontRef idx="minor">
+            <a:schemeClr val="lt1"/>
+          </a:fontRef>
+        </p:style>
+        <p:txBody>
+          <a:bodyPr rtlCol="0" anchor="ctr"/>
+          <a:lstStyle/>
+          <a:p/>
+        </p:txBody>
+      </p:sp>
+      <p:sp>
+        <p:nvSpPr>
+          <p:cNvPr id="11" name="TextBox 10"/>
+          <p:cNvSpPr txBox="1"/>
+          <p:nvPr/>
+        </p:nvSpPr>
+        <p:spPr>
+          <a:xfrm>
+            <a:off x="932688" y="4836160"/>
+            <a:ext cx="10051999" cy="392176"/>
+          </a:xfrm>
+          <a:prstGeom prst="rect">
+            <a:avLst/>
+          </a:prstGeom>
+          <a:noFill/>
+        </p:spPr>
+        <p:txBody>
+          <a:bodyPr wrap="square" lIns="0" rIns="0" tIns="0" bIns="0" anchor="t">
+            <a:spAutoFit/>
+          </a:bodyPr>
+          <a:lstStyle/>
+          <a:p>
+            <a:pPr algn="l">
+              <a:lnSpc>
+                <a:spcPct val="140000"/>
+              </a:lnSpc>
+            </a:pPr>
+            <a:r>
+              <a:rPr sz="2000" b="0" i="0">
+                <a:solidFill>
+                  <a:srgbClr val="FFFFFF"/>
+                </a:solidFill>
+                <a:latin typeface="Verdana"/>
+              </a:rPr>
+              <a:t>Un titre court : cinq à huit mots.</a:t>
+            </a:r>
+          </a:p>
+        </p:txBody>
+      </p:sp>
+      <p:sp>
+        <p:nvSpPr>
+          <p:cNvPr id="12" name="TextBox 11"/>
+          <p:cNvSpPr txBox="1"/>
+          <p:nvPr/>
+        </p:nvSpPr>
+        <p:spPr>
+          <a:xfrm>
+            <a:off x="566928" y="6355080"/>
+            <a:ext cx="6400800" cy="219456"/>
+          </a:xfrm>
+          <a:prstGeom prst="rect">
+            <a:avLst/>
+          </a:prstGeom>
+          <a:noFill/>
+        </p:spPr>
+        <p:txBody>
+          <a:bodyPr wrap="square" lIns="0" rIns="0" tIns="0" bIns="0" anchor="t">
+            <a:spAutoFit/>
+          </a:bodyPr>
+          <a:lstStyle/>
+          <a:p>
+            <a:pPr algn="l">
+              <a:lnSpc>
+                <a:spcPct val="135000"/>
+              </a:lnSpc>
+            </a:pPr>
+            <a:r>
+              <a:rPr sz="1200" b="0" i="0">
+                <a:solidFill>
+                  <a:srgbClr val="6E7175"/>
+                </a:solidFill>
+                <a:latin typeface="Verdana"/>
+              </a:rPr>
+              <a:t>A2 · C'est l'heure des nouvelles</a:t>
             </a:r>
           </a:p>
         </p:txBody>
@@ -12283,7 +19399,7 @@
                 </a:solidFill>
                 <a:latin typeface="Verdana"/>
               </a:rPr>
-              <a:t>PRATIQUE · 1 DE 4</a:t>
+              <a:t>PRATIQUE · 1 DE 6</a:t>
             </a:r>
           </a:p>
         </p:txBody>
@@ -14518,7 +21634,7 @@
                 </a:solidFill>
                 <a:latin typeface="Verdana"/>
               </a:rPr>
-              <a:t>PRATIQUE · 2 DE 4</a:t>
+              <a:t>PRATIQUE · 2 DE 6</a:t>
             </a:r>
           </a:p>
         </p:txBody>

--- a/assets/powerpoints/module-nouvelles/A2-quatre-sortes-de-nouvelles.pptx
+++ b/assets/powerpoints/module-nouvelles/A2-quatre-sortes-de-nouvelles.pptx
@@ -5071,7 +5071,7 @@
             <a:r>
               <a:rPr sz="1300" b="1" i="0" spc="156">
                 <a:solidFill>
-                  <a:srgbClr val="166534"/>
+                  <a:srgbClr val="A5335F"/>
                 </a:solidFill>
                 <a:latin typeface="Verdana"/>
               </a:rPr>
@@ -5411,7 +5411,7 @@
             <a:r>
               <a:rPr sz="1300" b="1" i="0" spc="156">
                 <a:solidFill>
-                  <a:srgbClr val="166534"/>
+                  <a:srgbClr val="A5335F"/>
                 </a:solidFill>
                 <a:latin typeface="Verdana"/>
               </a:rPr>
@@ -5960,7 +5960,7 @@
             <a:r>
               <a:rPr sz="1300" b="1" i="0" spc="156">
                 <a:solidFill>
-                  <a:srgbClr val="166534"/>
+                  <a:srgbClr val="A5335F"/>
                 </a:solidFill>
                 <a:latin typeface="Verdana"/>
               </a:rPr>
@@ -6509,7 +6509,7 @@
             <a:r>
               <a:rPr sz="1300" b="1" i="0" spc="156">
                 <a:solidFill>
-                  <a:srgbClr val="166534"/>
+                  <a:srgbClr val="A5335F"/>
                 </a:solidFill>
                 <a:latin typeface="Verdana"/>
               </a:rPr>
@@ -6659,7 +6659,7 @@
             </a:avLst>
           </a:prstGeom>
           <a:solidFill>
-            <a:srgbClr val="E3F1E7"/>
+            <a:srgbClr val="FCE9F0"/>
           </a:solidFill>
           <a:ln>
             <a:noFill/>
@@ -6716,7 +6716,7 @@
             <a:r>
               <a:rPr sz="1500" b="1" i="0">
                 <a:solidFill>
-                  <a:srgbClr val="166534"/>
+                  <a:srgbClr val="A5335F"/>
                 </a:solidFill>
                 <a:latin typeface="Verdana"/>
               </a:rPr>
@@ -6827,7 +6827,7 @@
             </a:avLst>
           </a:prstGeom>
           <a:solidFill>
-            <a:srgbClr val="E3F1E7"/>
+            <a:srgbClr val="FCE9F0"/>
           </a:solidFill>
           <a:ln>
             <a:noFill/>
@@ -6884,7 +6884,7 @@
             <a:r>
               <a:rPr sz="1500" b="1" i="0">
                 <a:solidFill>
-                  <a:srgbClr val="166534"/>
+                  <a:srgbClr val="A5335F"/>
                 </a:solidFill>
                 <a:latin typeface="Verdana"/>
               </a:rPr>
@@ -6995,7 +6995,7 @@
             </a:avLst>
           </a:prstGeom>
           <a:solidFill>
-            <a:srgbClr val="E3F1E7"/>
+            <a:srgbClr val="FCE9F0"/>
           </a:solidFill>
           <a:ln>
             <a:noFill/>
@@ -7052,7 +7052,7 @@
             <a:r>
               <a:rPr sz="1500" b="1" i="0">
                 <a:solidFill>
-                  <a:srgbClr val="166534"/>
+                  <a:srgbClr val="A5335F"/>
                 </a:solidFill>
                 <a:latin typeface="Verdana"/>
               </a:rPr>
@@ -7163,7 +7163,7 @@
             </a:avLst>
           </a:prstGeom>
           <a:solidFill>
-            <a:srgbClr val="E3F1E7"/>
+            <a:srgbClr val="FCE9F0"/>
           </a:solidFill>
           <a:ln>
             <a:noFill/>
@@ -7220,7 +7220,7 @@
             <a:r>
               <a:rPr sz="1500" b="1" i="0">
                 <a:solidFill>
-                  <a:srgbClr val="166534"/>
+                  <a:srgbClr val="A5335F"/>
                 </a:solidFill>
                 <a:latin typeface="Verdana"/>
               </a:rPr>
@@ -7331,7 +7331,7 @@
             </a:avLst>
           </a:prstGeom>
           <a:solidFill>
-            <a:srgbClr val="E3F1E7"/>
+            <a:srgbClr val="FCE9F0"/>
           </a:solidFill>
           <a:ln>
             <a:noFill/>
@@ -7388,7 +7388,7 @@
             <a:r>
               <a:rPr sz="1500" b="1" i="0">
                 <a:solidFill>
-                  <a:srgbClr val="166534"/>
+                  <a:srgbClr val="A5335F"/>
                 </a:solidFill>
                 <a:latin typeface="Verdana"/>
               </a:rPr>
@@ -7604,7 +7604,7 @@
             <a:r>
               <a:rPr sz="1300" b="1" i="0" spc="156">
                 <a:solidFill>
-                  <a:srgbClr val="166534"/>
+                  <a:srgbClr val="A5335F"/>
                 </a:solidFill>
                 <a:latin typeface="Verdana"/>
               </a:rPr>
@@ -7754,7 +7754,7 @@
             </a:avLst>
           </a:prstGeom>
           <a:solidFill>
-            <a:srgbClr val="E3F1E7"/>
+            <a:srgbClr val="FCE9F0"/>
           </a:solidFill>
           <a:ln>
             <a:noFill/>
@@ -7811,7 +7811,7 @@
             <a:r>
               <a:rPr sz="1500" b="1" i="0">
                 <a:solidFill>
-                  <a:srgbClr val="166534"/>
+                  <a:srgbClr val="A5335F"/>
                 </a:solidFill>
                 <a:latin typeface="Verdana"/>
               </a:rPr>
@@ -7931,7 +7931,7 @@
             </a:avLst>
           </a:prstGeom>
           <a:solidFill>
-            <a:srgbClr val="E3F1E7"/>
+            <a:srgbClr val="FCE9F0"/>
           </a:solidFill>
           <a:ln>
             <a:noFill/>
@@ -7988,7 +7988,7 @@
             <a:r>
               <a:rPr sz="1500" b="1" i="0">
                 <a:solidFill>
-                  <a:srgbClr val="166534"/>
+                  <a:srgbClr val="A5335F"/>
                 </a:solidFill>
                 <a:latin typeface="Verdana"/>
               </a:rPr>
@@ -8108,7 +8108,7 @@
             </a:avLst>
           </a:prstGeom>
           <a:solidFill>
-            <a:srgbClr val="E3F1E7"/>
+            <a:srgbClr val="FCE9F0"/>
           </a:solidFill>
           <a:ln>
             <a:noFill/>
@@ -8165,7 +8165,7 @@
             <a:r>
               <a:rPr sz="1500" b="1" i="0">
                 <a:solidFill>
-                  <a:srgbClr val="166534"/>
+                  <a:srgbClr val="A5335F"/>
                 </a:solidFill>
                 <a:latin typeface="Verdana"/>
               </a:rPr>
@@ -8285,7 +8285,7 @@
             </a:avLst>
           </a:prstGeom>
           <a:solidFill>
-            <a:srgbClr val="E3F1E7"/>
+            <a:srgbClr val="FCE9F0"/>
           </a:solidFill>
           <a:ln>
             <a:noFill/>
@@ -8342,7 +8342,7 @@
             <a:r>
               <a:rPr sz="1500" b="1" i="0">
                 <a:solidFill>
-                  <a:srgbClr val="166534"/>
+                  <a:srgbClr val="A5335F"/>
                 </a:solidFill>
                 <a:latin typeface="Verdana"/>
               </a:rPr>
@@ -8462,7 +8462,7 @@
             </a:avLst>
           </a:prstGeom>
           <a:solidFill>
-            <a:srgbClr val="E3F1E7"/>
+            <a:srgbClr val="FCE9F0"/>
           </a:solidFill>
           <a:ln>
             <a:noFill/>
@@ -8519,7 +8519,7 @@
             <a:r>
               <a:rPr sz="1500" b="1" i="0">
                 <a:solidFill>
-                  <a:srgbClr val="166534"/>
+                  <a:srgbClr val="A5335F"/>
                 </a:solidFill>
                 <a:latin typeface="Verdana"/>
               </a:rPr>
@@ -8744,7 +8744,7 @@
             <a:r>
               <a:rPr sz="1300" b="1" i="0" spc="156">
                 <a:solidFill>
-                  <a:srgbClr val="166534"/>
+                  <a:srgbClr val="A5335F"/>
                 </a:solidFill>
                 <a:latin typeface="Verdana"/>
               </a:rPr>
@@ -8894,7 +8894,7 @@
             </a:avLst>
           </a:prstGeom>
           <a:solidFill>
-            <a:srgbClr val="E3F1E7"/>
+            <a:srgbClr val="FCE9F0"/>
           </a:solidFill>
           <a:ln>
             <a:noFill/>
@@ -8951,7 +8951,7 @@
             <a:r>
               <a:rPr sz="1500" b="1" i="0">
                 <a:solidFill>
-                  <a:srgbClr val="166534"/>
+                  <a:srgbClr val="A5335F"/>
                 </a:solidFill>
                 <a:latin typeface="Verdana"/>
               </a:rPr>
@@ -9062,7 +9062,7 @@
             </a:avLst>
           </a:prstGeom>
           <a:solidFill>
-            <a:srgbClr val="E3F1E7"/>
+            <a:srgbClr val="FCE9F0"/>
           </a:solidFill>
           <a:ln>
             <a:noFill/>
@@ -9119,7 +9119,7 @@
             <a:r>
               <a:rPr sz="1500" b="1" i="0">
                 <a:solidFill>
-                  <a:srgbClr val="166534"/>
+                  <a:srgbClr val="A5335F"/>
                 </a:solidFill>
                 <a:latin typeface="Verdana"/>
               </a:rPr>
@@ -9230,7 +9230,7 @@
             </a:avLst>
           </a:prstGeom>
           <a:solidFill>
-            <a:srgbClr val="E3F1E7"/>
+            <a:srgbClr val="FCE9F0"/>
           </a:solidFill>
           <a:ln>
             <a:noFill/>
@@ -9287,7 +9287,7 @@
             <a:r>
               <a:rPr sz="1500" b="1" i="0">
                 <a:solidFill>
-                  <a:srgbClr val="166534"/>
+                  <a:srgbClr val="A5335F"/>
                 </a:solidFill>
                 <a:latin typeface="Verdana"/>
               </a:rPr>
@@ -9503,7 +9503,7 @@
             <a:r>
               <a:rPr sz="1300" b="1" i="0" spc="156">
                 <a:solidFill>
-                  <a:srgbClr val="166534"/>
+                  <a:srgbClr val="A5335F"/>
                 </a:solidFill>
                 <a:latin typeface="Verdana"/>
               </a:rPr>
@@ -9529,7 +9529,7 @@
             </a:avLst>
           </a:prstGeom>
           <a:solidFill>
-            <a:srgbClr val="E3F1E7"/>
+            <a:srgbClr val="FCE9F0"/>
           </a:solidFill>
           <a:ln w="12700">
             <a:solidFill>
@@ -9850,7 +9850,7 @@
             <a:r>
               <a:rPr sz="1300" b="1" i="0" spc="156">
                 <a:solidFill>
-                  <a:srgbClr val="166534"/>
+                  <a:srgbClr val="A5335F"/>
                 </a:solidFill>
                 <a:latin typeface="Verdana"/>
               </a:rPr>
@@ -10091,7 +10091,7 @@
             <a:r>
               <a:rPr sz="1800" b="1" i="0">
                 <a:solidFill>
-                  <a:srgbClr val="166534"/>
+                  <a:srgbClr val="A5335F"/>
                 </a:solidFill>
                 <a:latin typeface="Verdana"/>
               </a:rPr>
@@ -10250,7 +10250,7 @@
             <a:r>
               <a:rPr sz="1800" b="1" i="0">
                 <a:solidFill>
-                  <a:srgbClr val="166534"/>
+                  <a:srgbClr val="A5335F"/>
                 </a:solidFill>
                 <a:latin typeface="Verdana"/>
               </a:rPr>
@@ -10590,7 +10590,7 @@
             <a:r>
               <a:rPr sz="1300" b="1" i="0" spc="156">
                 <a:solidFill>
-                  <a:srgbClr val="166534"/>
+                  <a:srgbClr val="A5335F"/>
                 </a:solidFill>
                 <a:latin typeface="Verdana"/>
               </a:rPr>
@@ -11139,7 +11139,7 @@
             <a:r>
               <a:rPr sz="1300" b="1" i="0" spc="156">
                 <a:solidFill>
-                  <a:srgbClr val="166534"/>
+                  <a:srgbClr val="A5335F"/>
                 </a:solidFill>
                 <a:latin typeface="Verdana"/>
               </a:rPr>
@@ -11289,7 +11289,7 @@
             </a:avLst>
           </a:prstGeom>
           <a:solidFill>
-            <a:srgbClr val="E3F1E7"/>
+            <a:srgbClr val="FCE9F0"/>
           </a:solidFill>
           <a:ln>
             <a:noFill/>
@@ -11346,7 +11346,7 @@
             <a:r>
               <a:rPr sz="1500" b="1" i="0">
                 <a:solidFill>
-                  <a:srgbClr val="166534"/>
+                  <a:srgbClr val="A5335F"/>
                 </a:solidFill>
                 <a:latin typeface="Verdana"/>
               </a:rPr>
@@ -11457,7 +11457,7 @@
             </a:avLst>
           </a:prstGeom>
           <a:solidFill>
-            <a:srgbClr val="E3F1E7"/>
+            <a:srgbClr val="FCE9F0"/>
           </a:solidFill>
           <a:ln>
             <a:noFill/>
@@ -11514,7 +11514,7 @@
             <a:r>
               <a:rPr sz="1500" b="1" i="0">
                 <a:solidFill>
-                  <a:srgbClr val="166534"/>
+                  <a:srgbClr val="A5335F"/>
                 </a:solidFill>
                 <a:latin typeface="Verdana"/>
               </a:rPr>
@@ -11625,7 +11625,7 @@
             </a:avLst>
           </a:prstGeom>
           <a:solidFill>
-            <a:srgbClr val="E3F1E7"/>
+            <a:srgbClr val="FCE9F0"/>
           </a:solidFill>
           <a:ln>
             <a:noFill/>
@@ -11682,7 +11682,7 @@
             <a:r>
               <a:rPr sz="1500" b="1" i="0">
                 <a:solidFill>
-                  <a:srgbClr val="166534"/>
+                  <a:srgbClr val="A5335F"/>
                 </a:solidFill>
                 <a:latin typeface="Verdana"/>
               </a:rPr>
@@ -11793,7 +11793,7 @@
             </a:avLst>
           </a:prstGeom>
           <a:solidFill>
-            <a:srgbClr val="E3F1E7"/>
+            <a:srgbClr val="FCE9F0"/>
           </a:solidFill>
           <a:ln>
             <a:noFill/>
@@ -11850,7 +11850,7 @@
             <a:r>
               <a:rPr sz="1500" b="1" i="0">
                 <a:solidFill>
-                  <a:srgbClr val="166534"/>
+                  <a:srgbClr val="A5335F"/>
                 </a:solidFill>
                 <a:latin typeface="Verdana"/>
               </a:rPr>
@@ -11961,7 +11961,7 @@
             </a:avLst>
           </a:prstGeom>
           <a:solidFill>
-            <a:srgbClr val="E3F1E7"/>
+            <a:srgbClr val="FCE9F0"/>
           </a:solidFill>
           <a:ln>
             <a:noFill/>
@@ -12018,7 +12018,7 @@
             <a:r>
               <a:rPr sz="1500" b="1" i="0">
                 <a:solidFill>
-                  <a:srgbClr val="166534"/>
+                  <a:srgbClr val="A5335F"/>
                 </a:solidFill>
                 <a:latin typeface="Verdana"/>
               </a:rPr>
@@ -12129,7 +12129,7 @@
             </a:avLst>
           </a:prstGeom>
           <a:solidFill>
-            <a:srgbClr val="E3F1E7"/>
+            <a:srgbClr val="FCE9F0"/>
           </a:solidFill>
           <a:ln>
             <a:noFill/>
@@ -12186,7 +12186,7 @@
             <a:r>
               <a:rPr sz="1500" b="1" i="0">
                 <a:solidFill>
-                  <a:srgbClr val="166534"/>
+                  <a:srgbClr val="A5335F"/>
                 </a:solidFill>
                 <a:latin typeface="Verdana"/>
               </a:rPr>
@@ -12297,7 +12297,7 @@
             </a:avLst>
           </a:prstGeom>
           <a:solidFill>
-            <a:srgbClr val="E3F1E7"/>
+            <a:srgbClr val="FCE9F0"/>
           </a:solidFill>
           <a:ln>
             <a:noFill/>
@@ -12354,7 +12354,7 @@
             <a:r>
               <a:rPr sz="1500" b="1" i="0">
                 <a:solidFill>
-                  <a:srgbClr val="166534"/>
+                  <a:srgbClr val="A5335F"/>
                 </a:solidFill>
                 <a:latin typeface="Verdana"/>
               </a:rPr>
@@ -12465,7 +12465,7 @@
             </a:avLst>
           </a:prstGeom>
           <a:solidFill>
-            <a:srgbClr val="E3F1E7"/>
+            <a:srgbClr val="FCE9F0"/>
           </a:solidFill>
           <a:ln>
             <a:noFill/>
@@ -12522,7 +12522,7 @@
             <a:r>
               <a:rPr sz="1500" b="1" i="0">
                 <a:solidFill>
-                  <a:srgbClr val="166534"/>
+                  <a:srgbClr val="A5335F"/>
                 </a:solidFill>
                 <a:latin typeface="Verdana"/>
               </a:rPr>
@@ -12738,7 +12738,7 @@
             <a:r>
               <a:rPr sz="1300" b="1" i="0" spc="156">
                 <a:solidFill>
-                  <a:srgbClr val="166534"/>
+                  <a:srgbClr val="A5335F"/>
                 </a:solidFill>
                 <a:latin typeface="Verdana"/>
               </a:rPr>
@@ -12888,7 +12888,7 @@
             </a:avLst>
           </a:prstGeom>
           <a:solidFill>
-            <a:srgbClr val="E3F1E7"/>
+            <a:srgbClr val="FCE9F0"/>
           </a:solidFill>
           <a:ln>
             <a:noFill/>
@@ -12945,7 +12945,7 @@
             <a:r>
               <a:rPr sz="1500" b="1" i="0">
                 <a:solidFill>
-                  <a:srgbClr val="166534"/>
+                  <a:srgbClr val="A5335F"/>
                 </a:solidFill>
                 <a:latin typeface="Verdana"/>
               </a:rPr>
@@ -13065,7 +13065,7 @@
             </a:avLst>
           </a:prstGeom>
           <a:solidFill>
-            <a:srgbClr val="E3F1E7"/>
+            <a:srgbClr val="FCE9F0"/>
           </a:solidFill>
           <a:ln>
             <a:noFill/>
@@ -13122,7 +13122,7 @@
             <a:r>
               <a:rPr sz="1500" b="1" i="0">
                 <a:solidFill>
-                  <a:srgbClr val="166534"/>
+                  <a:srgbClr val="A5335F"/>
                 </a:solidFill>
                 <a:latin typeface="Verdana"/>
               </a:rPr>
@@ -13242,7 +13242,7 @@
             </a:avLst>
           </a:prstGeom>
           <a:solidFill>
-            <a:srgbClr val="E3F1E7"/>
+            <a:srgbClr val="FCE9F0"/>
           </a:solidFill>
           <a:ln>
             <a:noFill/>
@@ -13299,7 +13299,7 @@
             <a:r>
               <a:rPr sz="1500" b="1" i="0">
                 <a:solidFill>
-                  <a:srgbClr val="166534"/>
+                  <a:srgbClr val="A5335F"/>
                 </a:solidFill>
                 <a:latin typeface="Verdana"/>
               </a:rPr>
@@ -13419,7 +13419,7 @@
             </a:avLst>
           </a:prstGeom>
           <a:solidFill>
-            <a:srgbClr val="E3F1E7"/>
+            <a:srgbClr val="FCE9F0"/>
           </a:solidFill>
           <a:ln>
             <a:noFill/>
@@ -13476,7 +13476,7 @@
             <a:r>
               <a:rPr sz="1500" b="1" i="0">
                 <a:solidFill>
-                  <a:srgbClr val="166534"/>
+                  <a:srgbClr val="A5335F"/>
                 </a:solidFill>
                 <a:latin typeface="Verdana"/>
               </a:rPr>
@@ -13596,7 +13596,7 @@
             </a:avLst>
           </a:prstGeom>
           <a:solidFill>
-            <a:srgbClr val="E3F1E7"/>
+            <a:srgbClr val="FCE9F0"/>
           </a:solidFill>
           <a:ln>
             <a:noFill/>
@@ -13653,7 +13653,7 @@
             <a:r>
               <a:rPr sz="1500" b="1" i="0">
                 <a:solidFill>
-                  <a:srgbClr val="166534"/>
+                  <a:srgbClr val="A5335F"/>
                 </a:solidFill>
                 <a:latin typeface="Verdana"/>
               </a:rPr>
@@ -13773,7 +13773,7 @@
             </a:avLst>
           </a:prstGeom>
           <a:solidFill>
-            <a:srgbClr val="E3F1E7"/>
+            <a:srgbClr val="FCE9F0"/>
           </a:solidFill>
           <a:ln>
             <a:noFill/>
@@ -13830,7 +13830,7 @@
             <a:r>
               <a:rPr sz="1500" b="1" i="0">
                 <a:solidFill>
-                  <a:srgbClr val="166534"/>
+                  <a:srgbClr val="A5335F"/>
                 </a:solidFill>
                 <a:latin typeface="Verdana"/>
               </a:rPr>
@@ -13950,7 +13950,7 @@
             </a:avLst>
           </a:prstGeom>
           <a:solidFill>
-            <a:srgbClr val="E3F1E7"/>
+            <a:srgbClr val="FCE9F0"/>
           </a:solidFill>
           <a:ln>
             <a:noFill/>
@@ -14007,7 +14007,7 @@
             <a:r>
               <a:rPr sz="1500" b="1" i="0">
                 <a:solidFill>
-                  <a:srgbClr val="166534"/>
+                  <a:srgbClr val="A5335F"/>
                 </a:solidFill>
                 <a:latin typeface="Verdana"/>
               </a:rPr>
@@ -14127,7 +14127,7 @@
             </a:avLst>
           </a:prstGeom>
           <a:solidFill>
-            <a:srgbClr val="E3F1E7"/>
+            <a:srgbClr val="FCE9F0"/>
           </a:solidFill>
           <a:ln>
             <a:noFill/>
@@ -14184,7 +14184,7 @@
             <a:r>
               <a:rPr sz="1500" b="1" i="0">
                 <a:solidFill>
-                  <a:srgbClr val="166534"/>
+                  <a:srgbClr val="A5335F"/>
                 </a:solidFill>
                 <a:latin typeface="Verdana"/>
               </a:rPr>
@@ -14409,7 +14409,7 @@
             <a:r>
               <a:rPr sz="1300" b="1" i="0" spc="156">
                 <a:solidFill>
-                  <a:srgbClr val="166534"/>
+                  <a:srgbClr val="A5335F"/>
                 </a:solidFill>
                 <a:latin typeface="Verdana"/>
               </a:rPr>
@@ -14520,7 +14520,7 @@
             </a:avLst>
           </a:prstGeom>
           <a:solidFill>
-            <a:srgbClr val="E3F1E7"/>
+            <a:srgbClr val="FCE9F0"/>
           </a:solidFill>
           <a:ln>
             <a:noFill/>
@@ -14577,7 +14577,7 @@
             <a:r>
               <a:rPr sz="1500" b="1" i="0">
                 <a:solidFill>
-                  <a:srgbClr val="166534"/>
+                  <a:srgbClr val="A5335F"/>
                 </a:solidFill>
                 <a:latin typeface="Verdana"/>
               </a:rPr>
@@ -14688,7 +14688,7 @@
             </a:avLst>
           </a:prstGeom>
           <a:solidFill>
-            <a:srgbClr val="E3F1E7"/>
+            <a:srgbClr val="FCE9F0"/>
           </a:solidFill>
           <a:ln>
             <a:noFill/>
@@ -14745,7 +14745,7 @@
             <a:r>
               <a:rPr sz="1500" b="1" i="0">
                 <a:solidFill>
-                  <a:srgbClr val="166534"/>
+                  <a:srgbClr val="A5335F"/>
                 </a:solidFill>
                 <a:latin typeface="Verdana"/>
               </a:rPr>
@@ -14856,7 +14856,7 @@
             </a:avLst>
           </a:prstGeom>
           <a:solidFill>
-            <a:srgbClr val="E3F1E7"/>
+            <a:srgbClr val="FCE9F0"/>
           </a:solidFill>
           <a:ln>
             <a:noFill/>
@@ -14913,7 +14913,7 @@
             <a:r>
               <a:rPr sz="1500" b="1" i="0">
                 <a:solidFill>
-                  <a:srgbClr val="166534"/>
+                  <a:srgbClr val="A5335F"/>
                 </a:solidFill>
                 <a:latin typeface="Verdana"/>
               </a:rPr>
@@ -15024,7 +15024,7 @@
             </a:avLst>
           </a:prstGeom>
           <a:solidFill>
-            <a:srgbClr val="E3F1E7"/>
+            <a:srgbClr val="FCE9F0"/>
           </a:solidFill>
           <a:ln>
             <a:noFill/>
@@ -15081,7 +15081,7 @@
             <a:r>
               <a:rPr sz="1500" b="1" i="0">
                 <a:solidFill>
-                  <a:srgbClr val="166534"/>
+                  <a:srgbClr val="A5335F"/>
                 </a:solidFill>
                 <a:latin typeface="Verdana"/>
               </a:rPr>
@@ -15192,7 +15192,7 @@
             </a:avLst>
           </a:prstGeom>
           <a:solidFill>
-            <a:srgbClr val="E3F1E7"/>
+            <a:srgbClr val="FCE9F0"/>
           </a:solidFill>
           <a:ln>
             <a:noFill/>
@@ -15249,7 +15249,7 @@
             <a:r>
               <a:rPr sz="1500" b="1" i="0">
                 <a:solidFill>
-                  <a:srgbClr val="166534"/>
+                  <a:srgbClr val="A5335F"/>
                 </a:solidFill>
                 <a:latin typeface="Verdana"/>
               </a:rPr>
@@ -15465,7 +15465,7 @@
             <a:r>
               <a:rPr sz="1300" b="1" i="0" spc="156">
                 <a:solidFill>
-                  <a:srgbClr val="166534"/>
+                  <a:srgbClr val="A5335F"/>
                 </a:solidFill>
                 <a:latin typeface="Verdana"/>
               </a:rPr>
@@ -15615,7 +15615,7 @@
             </a:avLst>
           </a:prstGeom>
           <a:solidFill>
-            <a:srgbClr val="E3F1E7"/>
+            <a:srgbClr val="FCE9F0"/>
           </a:solidFill>
           <a:ln>
             <a:noFill/>
@@ -15672,7 +15672,7 @@
             <a:r>
               <a:rPr sz="1500" b="1" i="0">
                 <a:solidFill>
-                  <a:srgbClr val="166534"/>
+                  <a:srgbClr val="A5335F"/>
                 </a:solidFill>
                 <a:latin typeface="Verdana"/>
               </a:rPr>
@@ -15783,7 +15783,7 @@
             </a:avLst>
           </a:prstGeom>
           <a:solidFill>
-            <a:srgbClr val="E3F1E7"/>
+            <a:srgbClr val="FCE9F0"/>
           </a:solidFill>
           <a:ln>
             <a:noFill/>
@@ -15840,7 +15840,7 @@
             <a:r>
               <a:rPr sz="1500" b="1" i="0">
                 <a:solidFill>
-                  <a:srgbClr val="166534"/>
+                  <a:srgbClr val="A5335F"/>
                 </a:solidFill>
                 <a:latin typeface="Verdana"/>
               </a:rPr>
@@ -15951,7 +15951,7 @@
             </a:avLst>
           </a:prstGeom>
           <a:solidFill>
-            <a:srgbClr val="E3F1E7"/>
+            <a:srgbClr val="FCE9F0"/>
           </a:solidFill>
           <a:ln>
             <a:noFill/>
@@ -16008,7 +16008,7 @@
             <a:r>
               <a:rPr sz="1500" b="1" i="0">
                 <a:solidFill>
-                  <a:srgbClr val="166534"/>
+                  <a:srgbClr val="A5335F"/>
                 </a:solidFill>
                 <a:latin typeface="Verdana"/>
               </a:rPr>
@@ -16224,7 +16224,7 @@
             <a:r>
               <a:rPr sz="1300" b="1" i="0" spc="156">
                 <a:solidFill>
-                  <a:srgbClr val="166534"/>
+                  <a:srgbClr val="A5335F"/>
                 </a:solidFill>
                 <a:latin typeface="Verdana"/>
               </a:rPr>
@@ -16374,7 +16374,7 @@
             </a:avLst>
           </a:prstGeom>
           <a:solidFill>
-            <a:srgbClr val="E3F1E7"/>
+            <a:srgbClr val="FCE9F0"/>
           </a:solidFill>
           <a:ln>
             <a:noFill/>
@@ -16431,7 +16431,7 @@
             <a:r>
               <a:rPr sz="1500" b="1" i="0">
                 <a:solidFill>
-                  <a:srgbClr val="166534"/>
+                  <a:srgbClr val="A5335F"/>
                 </a:solidFill>
                 <a:latin typeface="Verdana"/>
               </a:rPr>
@@ -16551,7 +16551,7 @@
             </a:avLst>
           </a:prstGeom>
           <a:solidFill>
-            <a:srgbClr val="E3F1E7"/>
+            <a:srgbClr val="FCE9F0"/>
           </a:solidFill>
           <a:ln>
             <a:noFill/>
@@ -16608,7 +16608,7 @@
             <a:r>
               <a:rPr sz="1500" b="1" i="0">
                 <a:solidFill>
-                  <a:srgbClr val="166534"/>
+                  <a:srgbClr val="A5335F"/>
                 </a:solidFill>
                 <a:latin typeface="Verdana"/>
               </a:rPr>
@@ -16728,7 +16728,7 @@
             </a:avLst>
           </a:prstGeom>
           <a:solidFill>
-            <a:srgbClr val="E3F1E7"/>
+            <a:srgbClr val="FCE9F0"/>
           </a:solidFill>
           <a:ln>
             <a:noFill/>
@@ -16785,7 +16785,7 @@
             <a:r>
               <a:rPr sz="1500" b="1" i="0">
                 <a:solidFill>
-                  <a:srgbClr val="166534"/>
+                  <a:srgbClr val="A5335F"/>
                 </a:solidFill>
                 <a:latin typeface="Verdana"/>
               </a:rPr>
@@ -17473,7 +17473,7 @@
             <a:r>
               <a:rPr sz="1300" b="1" i="0" spc="156">
                 <a:solidFill>
-                  <a:srgbClr val="166534"/>
+                  <a:srgbClr val="A5335F"/>
                 </a:solidFill>
                 <a:latin typeface="Verdana"/>
               </a:rPr>
@@ -17675,7 +17675,7 @@
             <a:r>
               <a:rPr sz="1800" b="1" i="0">
                 <a:solidFill>
-                  <a:srgbClr val="166534"/>
+                  <a:srgbClr val="A5335F"/>
                 </a:solidFill>
                 <a:latin typeface="Verdana"/>
               </a:rPr>
@@ -17795,7 +17795,7 @@
             <a:r>
               <a:rPr sz="1800" b="1" i="0">
                 <a:solidFill>
-                  <a:srgbClr val="166534"/>
+                  <a:srgbClr val="A5335F"/>
                 </a:solidFill>
                 <a:latin typeface="Verdana"/>
               </a:rPr>
@@ -17915,7 +17915,7 @@
             <a:r>
               <a:rPr sz="1800" b="1" i="0">
                 <a:solidFill>
-                  <a:srgbClr val="166534"/>
+                  <a:srgbClr val="A5335F"/>
                 </a:solidFill>
                 <a:latin typeface="Verdana"/>
               </a:rPr>
@@ -18035,7 +18035,7 @@
             <a:r>
               <a:rPr sz="1800" b="1" i="0">
                 <a:solidFill>
-                  <a:srgbClr val="166534"/>
+                  <a:srgbClr val="A5335F"/>
                 </a:solidFill>
                 <a:latin typeface="Verdana"/>
               </a:rPr>
@@ -18336,7 +18336,7 @@
             <a:r>
               <a:rPr sz="1300" b="1" i="0" spc="156">
                 <a:solidFill>
-                  <a:srgbClr val="166534"/>
+                  <a:srgbClr val="A5335F"/>
                 </a:solidFill>
                 <a:latin typeface="Verdana"/>
               </a:rPr>
@@ -18362,7 +18362,7 @@
             </a:avLst>
           </a:prstGeom>
           <a:solidFill>
-            <a:srgbClr val="E3F1E7"/>
+            <a:srgbClr val="FCE9F0"/>
           </a:solidFill>
           <a:ln w="12700">
             <a:solidFill>
@@ -18683,7 +18683,7 @@
             <a:r>
               <a:rPr sz="1300" b="1" i="0" spc="156">
                 <a:solidFill>
-                  <a:srgbClr val="166534"/>
+                  <a:srgbClr val="A5335F"/>
                 </a:solidFill>
                 <a:latin typeface="Verdana"/>
               </a:rPr>
@@ -18807,7 +18807,7 @@
             <a:r>
               <a:rPr sz="2100" b="1" i="0">
                 <a:solidFill>
-                  <a:srgbClr val="166534"/>
+                  <a:srgbClr val="A5335F"/>
                 </a:solidFill>
                 <a:latin typeface="Verdana"/>
               </a:rPr>
@@ -18931,7 +18931,7 @@
             <a:r>
               <a:rPr sz="2100" b="1" i="0">
                 <a:solidFill>
-                  <a:srgbClr val="166534"/>
+                  <a:srgbClr val="A5335F"/>
                 </a:solidFill>
                 <a:latin typeface="Verdana"/>
               </a:rPr>
@@ -19055,7 +19055,7 @@
             <a:r>
               <a:rPr sz="2100" b="1" i="0">
                 <a:solidFill>
-                  <a:srgbClr val="166534"/>
+                  <a:srgbClr val="A5335F"/>
                 </a:solidFill>
                 <a:latin typeface="Verdana"/>
               </a:rPr>
@@ -19179,7 +19179,7 @@
             <a:r>
               <a:rPr sz="2100" b="1" i="0">
                 <a:solidFill>
-                  <a:srgbClr val="166534"/>
+                  <a:srgbClr val="A5335F"/>
                 </a:solidFill>
                 <a:latin typeface="Verdana"/>
               </a:rPr>
@@ -19395,7 +19395,7 @@
             <a:r>
               <a:rPr sz="1300" b="1" i="0" spc="156">
                 <a:solidFill>
-                  <a:srgbClr val="166534"/>
+                  <a:srgbClr val="A5335F"/>
                 </a:solidFill>
                 <a:latin typeface="Verdana"/>
               </a:rPr>
@@ -19545,7 +19545,7 @@
             </a:avLst>
           </a:prstGeom>
           <a:solidFill>
-            <a:srgbClr val="E3F1E7"/>
+            <a:srgbClr val="FCE9F0"/>
           </a:solidFill>
           <a:ln>
             <a:noFill/>
@@ -19602,7 +19602,7 @@
             <a:r>
               <a:rPr sz="1500" b="1" i="0">
                 <a:solidFill>
-                  <a:srgbClr val="166534"/>
+                  <a:srgbClr val="A5335F"/>
                 </a:solidFill>
                 <a:latin typeface="Verdana"/>
               </a:rPr>
@@ -19713,7 +19713,7 @@
             </a:avLst>
           </a:prstGeom>
           <a:solidFill>
-            <a:srgbClr val="E3F1E7"/>
+            <a:srgbClr val="FCE9F0"/>
           </a:solidFill>
           <a:ln>
             <a:noFill/>
@@ -19770,7 +19770,7 @@
             <a:r>
               <a:rPr sz="1500" b="1" i="0">
                 <a:solidFill>
-                  <a:srgbClr val="166534"/>
+                  <a:srgbClr val="A5335F"/>
                 </a:solidFill>
                 <a:latin typeface="Verdana"/>
               </a:rPr>
@@ -19881,7 +19881,7 @@
             </a:avLst>
           </a:prstGeom>
           <a:solidFill>
-            <a:srgbClr val="E3F1E7"/>
+            <a:srgbClr val="FCE9F0"/>
           </a:solidFill>
           <a:ln>
             <a:noFill/>
@@ -19938,7 +19938,7 @@
             <a:r>
               <a:rPr sz="1500" b="1" i="0">
                 <a:solidFill>
-                  <a:srgbClr val="166534"/>
+                  <a:srgbClr val="A5335F"/>
                 </a:solidFill>
                 <a:latin typeface="Verdana"/>
               </a:rPr>
@@ -20049,7 +20049,7 @@
             </a:avLst>
           </a:prstGeom>
           <a:solidFill>
-            <a:srgbClr val="E3F1E7"/>
+            <a:srgbClr val="FCE9F0"/>
           </a:solidFill>
           <a:ln>
             <a:noFill/>
@@ -20106,7 +20106,7 @@
             <a:r>
               <a:rPr sz="1500" b="1" i="0">
                 <a:solidFill>
-                  <a:srgbClr val="166534"/>
+                  <a:srgbClr val="A5335F"/>
                 </a:solidFill>
                 <a:latin typeface="Verdana"/>
               </a:rPr>
@@ -20217,7 +20217,7 @@
             </a:avLst>
           </a:prstGeom>
           <a:solidFill>
-            <a:srgbClr val="E3F1E7"/>
+            <a:srgbClr val="FCE9F0"/>
           </a:solidFill>
           <a:ln>
             <a:noFill/>
@@ -20274,7 +20274,7 @@
             <a:r>
               <a:rPr sz="1500" b="1" i="0">
                 <a:solidFill>
-                  <a:srgbClr val="166534"/>
+                  <a:srgbClr val="A5335F"/>
                 </a:solidFill>
                 <a:latin typeface="Verdana"/>
               </a:rPr>
@@ -20490,7 +20490,7 @@
             <a:r>
               <a:rPr sz="1300" b="1" i="0" spc="156">
                 <a:solidFill>
-                  <a:srgbClr val="166534"/>
+                  <a:srgbClr val="A5335F"/>
                 </a:solidFill>
                 <a:latin typeface="Verdana"/>
               </a:rPr>
@@ -20640,7 +20640,7 @@
             </a:avLst>
           </a:prstGeom>
           <a:solidFill>
-            <a:srgbClr val="E3F1E7"/>
+            <a:srgbClr val="FCE9F0"/>
           </a:solidFill>
           <a:ln>
             <a:noFill/>
@@ -20697,7 +20697,7 @@
             <a:r>
               <a:rPr sz="1500" b="1" i="0">
                 <a:solidFill>
-                  <a:srgbClr val="166534"/>
+                  <a:srgbClr val="A5335F"/>
                 </a:solidFill>
                 <a:latin typeface="Verdana"/>
               </a:rPr>
@@ -20817,7 +20817,7 @@
             </a:avLst>
           </a:prstGeom>
           <a:solidFill>
-            <a:srgbClr val="E3F1E7"/>
+            <a:srgbClr val="FCE9F0"/>
           </a:solidFill>
           <a:ln>
             <a:noFill/>
@@ -20874,7 +20874,7 @@
             <a:r>
               <a:rPr sz="1500" b="1" i="0">
                 <a:solidFill>
-                  <a:srgbClr val="166534"/>
+                  <a:srgbClr val="A5335F"/>
                 </a:solidFill>
                 <a:latin typeface="Verdana"/>
               </a:rPr>
@@ -20994,7 +20994,7 @@
             </a:avLst>
           </a:prstGeom>
           <a:solidFill>
-            <a:srgbClr val="E3F1E7"/>
+            <a:srgbClr val="FCE9F0"/>
           </a:solidFill>
           <a:ln>
             <a:noFill/>
@@ -21051,7 +21051,7 @@
             <a:r>
               <a:rPr sz="1500" b="1" i="0">
                 <a:solidFill>
-                  <a:srgbClr val="166534"/>
+                  <a:srgbClr val="A5335F"/>
                 </a:solidFill>
                 <a:latin typeface="Verdana"/>
               </a:rPr>
@@ -21171,7 +21171,7 @@
             </a:avLst>
           </a:prstGeom>
           <a:solidFill>
-            <a:srgbClr val="E3F1E7"/>
+            <a:srgbClr val="FCE9F0"/>
           </a:solidFill>
           <a:ln>
             <a:noFill/>
@@ -21228,7 +21228,7 @@
             <a:r>
               <a:rPr sz="1500" b="1" i="0">
                 <a:solidFill>
-                  <a:srgbClr val="166534"/>
+                  <a:srgbClr val="A5335F"/>
                 </a:solidFill>
                 <a:latin typeface="Verdana"/>
               </a:rPr>
@@ -21348,7 +21348,7 @@
             </a:avLst>
           </a:prstGeom>
           <a:solidFill>
-            <a:srgbClr val="E3F1E7"/>
+            <a:srgbClr val="FCE9F0"/>
           </a:solidFill>
           <a:ln>
             <a:noFill/>
@@ -21405,7 +21405,7 @@
             <a:r>
               <a:rPr sz="1500" b="1" i="0">
                 <a:solidFill>
-                  <a:srgbClr val="166534"/>
+                  <a:srgbClr val="A5335F"/>
                 </a:solidFill>
                 <a:latin typeface="Verdana"/>
               </a:rPr>
@@ -21630,7 +21630,7 @@
             <a:r>
               <a:rPr sz="1300" b="1" i="0" spc="156">
                 <a:solidFill>
-                  <a:srgbClr val="166534"/>
+                  <a:srgbClr val="A5335F"/>
                 </a:solidFill>
                 <a:latin typeface="Verdana"/>
               </a:rPr>
@@ -21780,7 +21780,7 @@
             </a:avLst>
           </a:prstGeom>
           <a:solidFill>
-            <a:srgbClr val="E3F1E7"/>
+            <a:srgbClr val="FCE9F0"/>
           </a:solidFill>
           <a:ln>
             <a:noFill/>
@@ -21837,7 +21837,7 @@
             <a:r>
               <a:rPr sz="1500" b="1" i="0">
                 <a:solidFill>
-                  <a:srgbClr val="166534"/>
+                  <a:srgbClr val="A5335F"/>
                 </a:solidFill>
                 <a:latin typeface="Verdana"/>
               </a:rPr>
@@ -21948,7 +21948,7 @@
             </a:avLst>
           </a:prstGeom>
           <a:solidFill>
-            <a:srgbClr val="E3F1E7"/>
+            <a:srgbClr val="FCE9F0"/>
           </a:solidFill>
           <a:ln>
             <a:noFill/>
@@ -22005,7 +22005,7 @@
             <a:r>
               <a:rPr sz="1500" b="1" i="0">
                 <a:solidFill>
-                  <a:srgbClr val="166534"/>
+                  <a:srgbClr val="A5335F"/>
                 </a:solidFill>
                 <a:latin typeface="Verdana"/>
               </a:rPr>
@@ -22116,7 +22116,7 @@
             </a:avLst>
           </a:prstGeom>
           <a:solidFill>
-            <a:srgbClr val="E3F1E7"/>
+            <a:srgbClr val="FCE9F0"/>
           </a:solidFill>
           <a:ln>
             <a:noFill/>
@@ -22173,7 +22173,7 @@
             <a:r>
               <a:rPr sz="1500" b="1" i="0">
                 <a:solidFill>
-                  <a:srgbClr val="166534"/>
+                  <a:srgbClr val="A5335F"/>
                 </a:solidFill>
                 <a:latin typeface="Verdana"/>
               </a:rPr>
@@ -22284,7 +22284,7 @@
             </a:avLst>
           </a:prstGeom>
           <a:solidFill>
-            <a:srgbClr val="E3F1E7"/>
+            <a:srgbClr val="FCE9F0"/>
           </a:solidFill>
           <a:ln>
             <a:noFill/>
@@ -22341,7 +22341,7 @@
             <a:r>
               <a:rPr sz="1500" b="1" i="0">
                 <a:solidFill>
-                  <a:srgbClr val="166534"/>
+                  <a:srgbClr val="A5335F"/>
                 </a:solidFill>
                 <a:latin typeface="Verdana"/>
               </a:rPr>
@@ -22557,7 +22557,7 @@
             <a:r>
               <a:rPr sz="1300" b="1" i="0" spc="156">
                 <a:solidFill>
-                  <a:srgbClr val="166534"/>
+                  <a:srgbClr val="A5335F"/>
                 </a:solidFill>
                 <a:latin typeface="Verdana"/>
               </a:rPr>
@@ -22707,7 +22707,7 @@
             </a:avLst>
           </a:prstGeom>
           <a:solidFill>
-            <a:srgbClr val="E3F1E7"/>
+            <a:srgbClr val="FCE9F0"/>
           </a:solidFill>
           <a:ln>
             <a:noFill/>
@@ -22764,7 +22764,7 @@
             <a:r>
               <a:rPr sz="1500" b="1" i="0">
                 <a:solidFill>
-                  <a:srgbClr val="166534"/>
+                  <a:srgbClr val="A5335F"/>
                 </a:solidFill>
                 <a:latin typeface="Verdana"/>
               </a:rPr>
@@ -22884,7 +22884,7 @@
             </a:avLst>
           </a:prstGeom>
           <a:solidFill>
-            <a:srgbClr val="E3F1E7"/>
+            <a:srgbClr val="FCE9F0"/>
           </a:solidFill>
           <a:ln>
             <a:noFill/>
@@ -22941,7 +22941,7 @@
             <a:r>
               <a:rPr sz="1500" b="1" i="0">
                 <a:solidFill>
-                  <a:srgbClr val="166534"/>
+                  <a:srgbClr val="A5335F"/>
                 </a:solidFill>
                 <a:latin typeface="Verdana"/>
               </a:rPr>
@@ -23061,7 +23061,7 @@
             </a:avLst>
           </a:prstGeom>
           <a:solidFill>
-            <a:srgbClr val="E3F1E7"/>
+            <a:srgbClr val="FCE9F0"/>
           </a:solidFill>
           <a:ln>
             <a:noFill/>
@@ -23118,7 +23118,7 @@
             <a:r>
               <a:rPr sz="1500" b="1" i="0">
                 <a:solidFill>
-                  <a:srgbClr val="166534"/>
+                  <a:srgbClr val="A5335F"/>
                 </a:solidFill>
                 <a:latin typeface="Verdana"/>
               </a:rPr>
@@ -23238,7 +23238,7 @@
             </a:avLst>
           </a:prstGeom>
           <a:solidFill>
-            <a:srgbClr val="E3F1E7"/>
+            <a:srgbClr val="FCE9F0"/>
           </a:solidFill>
           <a:ln>
             <a:noFill/>
@@ -23295,7 +23295,7 @@
             <a:r>
               <a:rPr sz="1500" b="1" i="0">
                 <a:solidFill>
-                  <a:srgbClr val="166534"/>
+                  <a:srgbClr val="A5335F"/>
                 </a:solidFill>
                 <a:latin typeface="Verdana"/>
               </a:rPr>
